--- a/18s_ASVPlots.pptx
+++ b/18s_ASVPlots.pptx
@@ -129,6 +129,506 @@
     </p:ext>
   </p:extLst>
 </p:presentation>
+</file>
+
+<file path=ppt/revisionInfo.xml><?xml version="1.0" encoding="utf-8"?>
+<p1510:revInfo xmlns:a="http://schemas.openxmlformats.org/drawingml/2006/main" xmlns:r="http://schemas.openxmlformats.org/officeDocument/2006/relationships" xmlns:p1510="http://schemas.microsoft.com/office/powerpoint/2015/10/main">
+  <p1510:revLst>
+    <p1510:client id="{7015499D-6EAB-4DF0-9D97-00CF899AF250}" v="4" dt="2026-04-07T18:57:25.291"/>
+  </p1510:revLst>
+</p1510:revInfo>
+</file>
+
+<file path=ppt/changesInfos/changesInfo1.xml><?xml version="1.0" encoding="utf-8"?>
+<pc:chgInfo xmlns:a="http://schemas.openxmlformats.org/drawingml/2006/main" xmlns:r="http://schemas.openxmlformats.org/officeDocument/2006/relationships" xmlns:ac="http://schemas.microsoft.com/office/drawing/2013/main/command" xmlns:pc="http://schemas.microsoft.com/office/powerpoint/2013/main/command">
+  <pc:docChgLst>
+    <pc:chgData name="Eckhoff, Amanda Bryn - eckhofax" userId="cd4a9e7b-1ef2-42f1-9b2d-d5ebde744648" providerId="ADAL" clId="{462F397F-3FFD-40DA-ACDE-BEFE90E09729}"/>
+    <pc:docChg chg="custSel modSld">
+      <pc:chgData name="Eckhoff, Amanda Bryn - eckhofax" userId="cd4a9e7b-1ef2-42f1-9b2d-d5ebde744648" providerId="ADAL" clId="{462F397F-3FFD-40DA-ACDE-BEFE90E09729}" dt="2026-04-07T18:57:25.289" v="434" actId="164"/>
+      <pc:docMkLst>
+        <pc:docMk/>
+      </pc:docMkLst>
+      <pc:sldChg chg="delSp modSp mod">
+        <pc:chgData name="Eckhoff, Amanda Bryn - eckhofax" userId="cd4a9e7b-1ef2-42f1-9b2d-d5ebde744648" providerId="ADAL" clId="{462F397F-3FFD-40DA-ACDE-BEFE90E09729}" dt="2026-04-07T18:41:34.431" v="47" actId="478"/>
+        <pc:sldMkLst>
+          <pc:docMk/>
+          <pc:sldMk cId="0" sldId="256"/>
+        </pc:sldMkLst>
+        <pc:spChg chg="del">
+          <ac:chgData name="Eckhoff, Amanda Bryn - eckhofax" userId="cd4a9e7b-1ef2-42f1-9b2d-d5ebde744648" providerId="ADAL" clId="{462F397F-3FFD-40DA-ACDE-BEFE90E09729}" dt="2026-04-07T18:41:32.384" v="46" actId="478"/>
+          <ac:spMkLst>
+            <pc:docMk/>
+            <pc:sldMk cId="0" sldId="256"/>
+            <ac:spMk id="3" creationId="{00000000-0000-0000-0000-000000000000}"/>
+          </ac:spMkLst>
+        </pc:spChg>
+        <pc:spChg chg="del">
+          <ac:chgData name="Eckhoff, Amanda Bryn - eckhofax" userId="cd4a9e7b-1ef2-42f1-9b2d-d5ebde744648" providerId="ADAL" clId="{462F397F-3FFD-40DA-ACDE-BEFE90E09729}" dt="2026-04-07T18:41:30.607" v="45" actId="478"/>
+          <ac:spMkLst>
+            <pc:docMk/>
+            <pc:sldMk cId="0" sldId="256"/>
+            <ac:spMk id="4" creationId="{00000000-0000-0000-0000-000000000000}"/>
+          </ac:spMkLst>
+        </pc:spChg>
+        <pc:spChg chg="mod">
+          <ac:chgData name="Eckhoff, Amanda Bryn - eckhofax" userId="cd4a9e7b-1ef2-42f1-9b2d-d5ebde744648" providerId="ADAL" clId="{462F397F-3FFD-40DA-ACDE-BEFE90E09729}" dt="2026-04-07T18:40:09.643" v="10" actId="20577"/>
+          <ac:spMkLst>
+            <pc:docMk/>
+            <pc:sldMk cId="0" sldId="256"/>
+            <ac:spMk id="136" creationId="{00000000-0000-0000-0000-000000000000}"/>
+          </ac:spMkLst>
+        </pc:spChg>
+        <pc:spChg chg="mod">
+          <ac:chgData name="Eckhoff, Amanda Bryn - eckhofax" userId="cd4a9e7b-1ef2-42f1-9b2d-d5ebde744648" providerId="ADAL" clId="{462F397F-3FFD-40DA-ACDE-BEFE90E09729}" dt="2026-04-07T18:40:12.471" v="16" actId="20577"/>
+          <ac:spMkLst>
+            <pc:docMk/>
+            <pc:sldMk cId="0" sldId="256"/>
+            <ac:spMk id="138" creationId="{00000000-0000-0000-0000-000000000000}"/>
+          </ac:spMkLst>
+        </pc:spChg>
+        <pc:spChg chg="mod">
+          <ac:chgData name="Eckhoff, Amanda Bryn - eckhofax" userId="cd4a9e7b-1ef2-42f1-9b2d-d5ebde744648" providerId="ADAL" clId="{462F397F-3FFD-40DA-ACDE-BEFE90E09729}" dt="2026-04-07T18:41:12.232" v="40" actId="403"/>
+          <ac:spMkLst>
+            <pc:docMk/>
+            <pc:sldMk cId="0" sldId="256"/>
+            <ac:spMk id="141" creationId="{00000000-0000-0000-0000-000000000000}"/>
+          </ac:spMkLst>
+        </pc:spChg>
+        <pc:spChg chg="mod">
+          <ac:chgData name="Eckhoff, Amanda Bryn - eckhofax" userId="cd4a9e7b-1ef2-42f1-9b2d-d5ebde744648" providerId="ADAL" clId="{462F397F-3FFD-40DA-ACDE-BEFE90E09729}" dt="2026-04-07T18:41:12.232" v="40" actId="403"/>
+          <ac:spMkLst>
+            <pc:docMk/>
+            <pc:sldMk cId="0" sldId="256"/>
+            <ac:spMk id="142" creationId="{00000000-0000-0000-0000-000000000000}"/>
+          </ac:spMkLst>
+        </pc:spChg>
+        <pc:spChg chg="mod">
+          <ac:chgData name="Eckhoff, Amanda Bryn - eckhofax" userId="cd4a9e7b-1ef2-42f1-9b2d-d5ebde744648" providerId="ADAL" clId="{462F397F-3FFD-40DA-ACDE-BEFE90E09729}" dt="2026-04-07T18:41:12.232" v="40" actId="403"/>
+          <ac:spMkLst>
+            <pc:docMk/>
+            <pc:sldMk cId="0" sldId="256"/>
+            <ac:spMk id="145" creationId="{00000000-0000-0000-0000-000000000000}"/>
+          </ac:spMkLst>
+        </pc:spChg>
+        <pc:spChg chg="mod">
+          <ac:chgData name="Eckhoff, Amanda Bryn - eckhofax" userId="cd4a9e7b-1ef2-42f1-9b2d-d5ebde744648" providerId="ADAL" clId="{462F397F-3FFD-40DA-ACDE-BEFE90E09729}" dt="2026-04-07T18:41:12.232" v="40" actId="403"/>
+          <ac:spMkLst>
+            <pc:docMk/>
+            <pc:sldMk cId="0" sldId="256"/>
+            <ac:spMk id="146" creationId="{00000000-0000-0000-0000-000000000000}"/>
+          </ac:spMkLst>
+        </pc:spChg>
+        <pc:spChg chg="mod">
+          <ac:chgData name="Eckhoff, Amanda Bryn - eckhofax" userId="cd4a9e7b-1ef2-42f1-9b2d-d5ebde744648" providerId="ADAL" clId="{462F397F-3FFD-40DA-ACDE-BEFE90E09729}" dt="2026-04-07T18:40:23.109" v="17" actId="255"/>
+          <ac:spMkLst>
+            <pc:docMk/>
+            <pc:sldMk cId="0" sldId="256"/>
+            <ac:spMk id="147" creationId="{00000000-0000-0000-0000-000000000000}"/>
+          </ac:spMkLst>
+        </pc:spChg>
+        <pc:spChg chg="mod">
+          <ac:chgData name="Eckhoff, Amanda Bryn - eckhofax" userId="cd4a9e7b-1ef2-42f1-9b2d-d5ebde744648" providerId="ADAL" clId="{462F397F-3FFD-40DA-ACDE-BEFE90E09729}" dt="2026-04-07T18:40:23.109" v="17" actId="255"/>
+          <ac:spMkLst>
+            <pc:docMk/>
+            <pc:sldMk cId="0" sldId="256"/>
+            <ac:spMk id="148" creationId="{00000000-0000-0000-0000-000000000000}"/>
+          </ac:spMkLst>
+        </pc:spChg>
+        <pc:spChg chg="mod">
+          <ac:chgData name="Eckhoff, Amanda Bryn - eckhofax" userId="cd4a9e7b-1ef2-42f1-9b2d-d5ebde744648" providerId="ADAL" clId="{462F397F-3FFD-40DA-ACDE-BEFE90E09729}" dt="2026-04-07T18:40:23.109" v="17" actId="255"/>
+          <ac:spMkLst>
+            <pc:docMk/>
+            <pc:sldMk cId="0" sldId="256"/>
+            <ac:spMk id="149" creationId="{00000000-0000-0000-0000-000000000000}"/>
+          </ac:spMkLst>
+        </pc:spChg>
+        <pc:spChg chg="mod">
+          <ac:chgData name="Eckhoff, Amanda Bryn - eckhofax" userId="cd4a9e7b-1ef2-42f1-9b2d-d5ebde744648" providerId="ADAL" clId="{462F397F-3FFD-40DA-ACDE-BEFE90E09729}" dt="2026-04-07T18:40:29.387" v="18" actId="255"/>
+          <ac:spMkLst>
+            <pc:docMk/>
+            <pc:sldMk cId="0" sldId="256"/>
+            <ac:spMk id="153" creationId="{00000000-0000-0000-0000-000000000000}"/>
+          </ac:spMkLst>
+        </pc:spChg>
+        <pc:spChg chg="del">
+          <ac:chgData name="Eckhoff, Amanda Bryn - eckhofax" userId="cd4a9e7b-1ef2-42f1-9b2d-d5ebde744648" providerId="ADAL" clId="{462F397F-3FFD-40DA-ACDE-BEFE90E09729}" dt="2026-04-07T18:41:34.431" v="47" actId="478"/>
+          <ac:spMkLst>
+            <pc:docMk/>
+            <pc:sldMk cId="0" sldId="256"/>
+            <ac:spMk id="154" creationId="{00000000-0000-0000-0000-000000000000}"/>
+          </ac:spMkLst>
+        </pc:spChg>
+        <pc:spChg chg="mod">
+          <ac:chgData name="Eckhoff, Amanda Bryn - eckhofax" userId="cd4a9e7b-1ef2-42f1-9b2d-d5ebde744648" providerId="ADAL" clId="{462F397F-3FFD-40DA-ACDE-BEFE90E09729}" dt="2026-04-07T18:41:26.830" v="44" actId="20577"/>
+          <ac:spMkLst>
+            <pc:docMk/>
+            <pc:sldMk cId="0" sldId="256"/>
+            <ac:spMk id="155" creationId="{00000000-0000-0000-0000-000000000000}"/>
+          </ac:spMkLst>
+        </pc:spChg>
+        <pc:spChg chg="mod">
+          <ac:chgData name="Eckhoff, Amanda Bryn - eckhofax" userId="cd4a9e7b-1ef2-42f1-9b2d-d5ebde744648" providerId="ADAL" clId="{462F397F-3FFD-40DA-ACDE-BEFE90E09729}" dt="2026-04-07T18:41:19.537" v="41" actId="255"/>
+          <ac:spMkLst>
+            <pc:docMk/>
+            <pc:sldMk cId="0" sldId="256"/>
+            <ac:spMk id="163" creationId="{00000000-0000-0000-0000-000000000000}"/>
+          </ac:spMkLst>
+        </pc:spChg>
+        <pc:spChg chg="mod">
+          <ac:chgData name="Eckhoff, Amanda Bryn - eckhofax" userId="cd4a9e7b-1ef2-42f1-9b2d-d5ebde744648" providerId="ADAL" clId="{462F397F-3FFD-40DA-ACDE-BEFE90E09729}" dt="2026-04-07T18:41:24.064" v="42" actId="255"/>
+          <ac:spMkLst>
+            <pc:docMk/>
+            <pc:sldMk cId="0" sldId="256"/>
+            <ac:spMk id="164" creationId="{00000000-0000-0000-0000-000000000000}"/>
+          </ac:spMkLst>
+        </pc:spChg>
+        <pc:spChg chg="mod">
+          <ac:chgData name="Eckhoff, Amanda Bryn - eckhofax" userId="cd4a9e7b-1ef2-42f1-9b2d-d5ebde744648" providerId="ADAL" clId="{462F397F-3FFD-40DA-ACDE-BEFE90E09729}" dt="2026-04-07T18:41:19.537" v="41" actId="255"/>
+          <ac:spMkLst>
+            <pc:docMk/>
+            <pc:sldMk cId="0" sldId="256"/>
+            <ac:spMk id="165" creationId="{00000000-0000-0000-0000-000000000000}"/>
+          </ac:spMkLst>
+        </pc:spChg>
+        <pc:grpChg chg="mod">
+          <ac:chgData name="Eckhoff, Amanda Bryn - eckhofax" userId="cd4a9e7b-1ef2-42f1-9b2d-d5ebde744648" providerId="ADAL" clId="{462F397F-3FFD-40DA-ACDE-BEFE90E09729}" dt="2026-04-07T18:40:49.478" v="37" actId="14100"/>
+          <ac:grpSpMkLst>
+            <pc:docMk/>
+            <pc:sldMk cId="0" sldId="256"/>
+            <ac:grpSpMk id="2" creationId="{00000000-0000-0000-0000-000000000000}"/>
+          </ac:grpSpMkLst>
+        </pc:grpChg>
+      </pc:sldChg>
+      <pc:sldChg chg="addSp delSp modSp mod">
+        <pc:chgData name="Eckhoff, Amanda Bryn - eckhofax" userId="cd4a9e7b-1ef2-42f1-9b2d-d5ebde744648" providerId="ADAL" clId="{462F397F-3FFD-40DA-ACDE-BEFE90E09729}" dt="2026-04-07T18:57:25.289" v="434" actId="164"/>
+        <pc:sldMkLst>
+          <pc:docMk/>
+          <pc:sldMk cId="0" sldId="257"/>
+        </pc:sldMkLst>
+        <pc:spChg chg="del">
+          <ac:chgData name="Eckhoff, Amanda Bryn - eckhofax" userId="cd4a9e7b-1ef2-42f1-9b2d-d5ebde744648" providerId="ADAL" clId="{462F397F-3FFD-40DA-ACDE-BEFE90E09729}" dt="2026-04-07T18:55:45.129" v="55" actId="478"/>
+          <ac:spMkLst>
+            <pc:docMk/>
+            <pc:sldMk cId="0" sldId="257"/>
+            <ac:spMk id="3" creationId="{00000000-0000-0000-0000-000000000000}"/>
+          </ac:spMkLst>
+        </pc:spChg>
+        <pc:spChg chg="del">
+          <ac:chgData name="Eckhoff, Amanda Bryn - eckhofax" userId="cd4a9e7b-1ef2-42f1-9b2d-d5ebde744648" providerId="ADAL" clId="{462F397F-3FFD-40DA-ACDE-BEFE90E09729}" dt="2026-04-07T18:55:41.097" v="54" actId="478"/>
+          <ac:spMkLst>
+            <pc:docMk/>
+            <pc:sldMk cId="0" sldId="257"/>
+            <ac:spMk id="4" creationId="{00000000-0000-0000-0000-000000000000}"/>
+          </ac:spMkLst>
+        </pc:spChg>
+        <pc:spChg chg="mod">
+          <ac:chgData name="Eckhoff, Amanda Bryn - eckhofax" userId="cd4a9e7b-1ef2-42f1-9b2d-d5ebde744648" providerId="ADAL" clId="{462F397F-3FFD-40DA-ACDE-BEFE90E09729}" dt="2026-04-07T18:56:00.604" v="60" actId="571"/>
+          <ac:spMkLst>
+            <pc:docMk/>
+            <pc:sldMk cId="0" sldId="257"/>
+            <ac:spMk id="15" creationId="{00000000-0000-0000-0000-000000000000}"/>
+          </ac:spMkLst>
+        </pc:spChg>
+        <pc:spChg chg="mod">
+          <ac:chgData name="Eckhoff, Amanda Bryn - eckhofax" userId="cd4a9e7b-1ef2-42f1-9b2d-d5ebde744648" providerId="ADAL" clId="{462F397F-3FFD-40DA-ACDE-BEFE90E09729}" dt="2026-04-07T18:56:00.604" v="60" actId="571"/>
+          <ac:spMkLst>
+            <pc:docMk/>
+            <pc:sldMk cId="0" sldId="257"/>
+            <ac:spMk id="23" creationId="{00000000-0000-0000-0000-000000000000}"/>
+          </ac:spMkLst>
+        </pc:spChg>
+        <pc:spChg chg="mod">
+          <ac:chgData name="Eckhoff, Amanda Bryn - eckhofax" userId="cd4a9e7b-1ef2-42f1-9b2d-d5ebde744648" providerId="ADAL" clId="{462F397F-3FFD-40DA-ACDE-BEFE90E09729}" dt="2026-04-07T18:56:00.604" v="60" actId="571"/>
+          <ac:spMkLst>
+            <pc:docMk/>
+            <pc:sldMk cId="0" sldId="257"/>
+            <ac:spMk id="26" creationId="{00000000-0000-0000-0000-000000000000}"/>
+          </ac:spMkLst>
+        </pc:spChg>
+        <pc:spChg chg="mod">
+          <ac:chgData name="Eckhoff, Amanda Bryn - eckhofax" userId="cd4a9e7b-1ef2-42f1-9b2d-d5ebde744648" providerId="ADAL" clId="{462F397F-3FFD-40DA-ACDE-BEFE90E09729}" dt="2026-04-07T18:56:00.604" v="60" actId="571"/>
+          <ac:spMkLst>
+            <pc:docMk/>
+            <pc:sldMk cId="0" sldId="257"/>
+            <ac:spMk id="27" creationId="{00000000-0000-0000-0000-000000000000}"/>
+          </ac:spMkLst>
+        </pc:spChg>
+        <pc:spChg chg="mod">
+          <ac:chgData name="Eckhoff, Amanda Bryn - eckhofax" userId="cd4a9e7b-1ef2-42f1-9b2d-d5ebde744648" providerId="ADAL" clId="{462F397F-3FFD-40DA-ACDE-BEFE90E09729}" dt="2026-04-07T18:56:00.604" v="60" actId="571"/>
+          <ac:spMkLst>
+            <pc:docMk/>
+            <pc:sldMk cId="0" sldId="257"/>
+            <ac:spMk id="30" creationId="{00000000-0000-0000-0000-000000000000}"/>
+          </ac:spMkLst>
+        </pc:spChg>
+        <pc:spChg chg="mod">
+          <ac:chgData name="Eckhoff, Amanda Bryn - eckhofax" userId="cd4a9e7b-1ef2-42f1-9b2d-d5ebde744648" providerId="ADAL" clId="{462F397F-3FFD-40DA-ACDE-BEFE90E09729}" dt="2026-04-07T18:56:00.604" v="60" actId="571"/>
+          <ac:spMkLst>
+            <pc:docMk/>
+            <pc:sldMk cId="0" sldId="257"/>
+            <ac:spMk id="35" creationId="{00000000-0000-0000-0000-000000000000}"/>
+          </ac:spMkLst>
+        </pc:spChg>
+        <pc:spChg chg="mod">
+          <ac:chgData name="Eckhoff, Amanda Bryn - eckhofax" userId="cd4a9e7b-1ef2-42f1-9b2d-d5ebde744648" providerId="ADAL" clId="{462F397F-3FFD-40DA-ACDE-BEFE90E09729}" dt="2026-04-07T18:56:00.604" v="60" actId="571"/>
+          <ac:spMkLst>
+            <pc:docMk/>
+            <pc:sldMk cId="0" sldId="257"/>
+            <ac:spMk id="57" creationId="{00000000-0000-0000-0000-000000000000}"/>
+          </ac:spMkLst>
+        </pc:spChg>
+        <pc:spChg chg="mod">
+          <ac:chgData name="Eckhoff, Amanda Bryn - eckhofax" userId="cd4a9e7b-1ef2-42f1-9b2d-d5ebde744648" providerId="ADAL" clId="{462F397F-3FFD-40DA-ACDE-BEFE90E09729}" dt="2026-04-07T18:56:00.604" v="60" actId="571"/>
+          <ac:spMkLst>
+            <pc:docMk/>
+            <pc:sldMk cId="0" sldId="257"/>
+            <ac:spMk id="59" creationId="{00000000-0000-0000-0000-000000000000}"/>
+          </ac:spMkLst>
+        </pc:spChg>
+        <pc:spChg chg="mod">
+          <ac:chgData name="Eckhoff, Amanda Bryn - eckhofax" userId="cd4a9e7b-1ef2-42f1-9b2d-d5ebde744648" providerId="ADAL" clId="{462F397F-3FFD-40DA-ACDE-BEFE90E09729}" dt="2026-04-07T18:56:03.744" v="61" actId="255"/>
+          <ac:spMkLst>
+            <pc:docMk/>
+            <pc:sldMk cId="0" sldId="257"/>
+            <ac:spMk id="68" creationId="{00000000-0000-0000-0000-000000000000}"/>
+          </ac:spMkLst>
+        </pc:spChg>
+        <pc:spChg chg="mod">
+          <ac:chgData name="Eckhoff, Amanda Bryn - eckhofax" userId="cd4a9e7b-1ef2-42f1-9b2d-d5ebde744648" providerId="ADAL" clId="{462F397F-3FFD-40DA-ACDE-BEFE90E09729}" dt="2026-04-07T18:56:03.744" v="61" actId="255"/>
+          <ac:spMkLst>
+            <pc:docMk/>
+            <pc:sldMk cId="0" sldId="257"/>
+            <ac:spMk id="69" creationId="{00000000-0000-0000-0000-000000000000}"/>
+          </ac:spMkLst>
+        </pc:spChg>
+        <pc:spChg chg="mod">
+          <ac:chgData name="Eckhoff, Amanda Bryn - eckhofax" userId="cd4a9e7b-1ef2-42f1-9b2d-d5ebde744648" providerId="ADAL" clId="{462F397F-3FFD-40DA-ACDE-BEFE90E09729}" dt="2026-04-07T18:56:03.744" v="61" actId="255"/>
+          <ac:spMkLst>
+            <pc:docMk/>
+            <pc:sldMk cId="0" sldId="257"/>
+            <ac:spMk id="70" creationId="{00000000-0000-0000-0000-000000000000}"/>
+          </ac:spMkLst>
+        </pc:spChg>
+        <pc:spChg chg="mod">
+          <ac:chgData name="Eckhoff, Amanda Bryn - eckhofax" userId="cd4a9e7b-1ef2-42f1-9b2d-d5ebde744648" providerId="ADAL" clId="{462F397F-3FFD-40DA-ACDE-BEFE90E09729}" dt="2026-04-07T18:56:03.744" v="61" actId="255"/>
+          <ac:spMkLst>
+            <pc:docMk/>
+            <pc:sldMk cId="0" sldId="257"/>
+            <ac:spMk id="76" creationId="{00000000-0000-0000-0000-000000000000}"/>
+          </ac:spMkLst>
+        </pc:spChg>
+        <pc:spChg chg="mod">
+          <ac:chgData name="Eckhoff, Amanda Bryn - eckhofax" userId="cd4a9e7b-1ef2-42f1-9b2d-d5ebde744648" providerId="ADAL" clId="{462F397F-3FFD-40DA-ACDE-BEFE90E09729}" dt="2026-04-07T18:56:03.744" v="61" actId="255"/>
+          <ac:spMkLst>
+            <pc:docMk/>
+            <pc:sldMk cId="0" sldId="257"/>
+            <ac:spMk id="77" creationId="{00000000-0000-0000-0000-000000000000}"/>
+          </ac:spMkLst>
+        </pc:spChg>
+        <pc:spChg chg="mod">
+          <ac:chgData name="Eckhoff, Amanda Bryn - eckhofax" userId="cd4a9e7b-1ef2-42f1-9b2d-d5ebde744648" providerId="ADAL" clId="{462F397F-3FFD-40DA-ACDE-BEFE90E09729}" dt="2026-04-07T18:56:10.268" v="63" actId="113"/>
+          <ac:spMkLst>
+            <pc:docMk/>
+            <pc:sldMk cId="0" sldId="257"/>
+            <ac:spMk id="78" creationId="{00000000-0000-0000-0000-000000000000}"/>
+          </ac:spMkLst>
+        </pc:spChg>
+        <pc:spChg chg="mod">
+          <ac:chgData name="Eckhoff, Amanda Bryn - eckhofax" userId="cd4a9e7b-1ef2-42f1-9b2d-d5ebde744648" providerId="ADAL" clId="{462F397F-3FFD-40DA-ACDE-BEFE90E09729}" dt="2026-04-07T18:56:10.268" v="63" actId="113"/>
+          <ac:spMkLst>
+            <pc:docMk/>
+            <pc:sldMk cId="0" sldId="257"/>
+            <ac:spMk id="79" creationId="{00000000-0000-0000-0000-000000000000}"/>
+          </ac:spMkLst>
+        </pc:spChg>
+        <pc:spChg chg="del">
+          <ac:chgData name="Eckhoff, Amanda Bryn - eckhofax" userId="cd4a9e7b-1ef2-42f1-9b2d-d5ebde744648" providerId="ADAL" clId="{462F397F-3FFD-40DA-ACDE-BEFE90E09729}" dt="2026-04-07T18:55:19.636" v="49" actId="478"/>
+          <ac:spMkLst>
+            <pc:docMk/>
+            <pc:sldMk cId="0" sldId="257"/>
+            <ac:spMk id="80" creationId="{00000000-0000-0000-0000-000000000000}"/>
+          </ac:spMkLst>
+        </pc:spChg>
+        <pc:spChg chg="del">
+          <ac:chgData name="Eckhoff, Amanda Bryn - eckhofax" userId="cd4a9e7b-1ef2-42f1-9b2d-d5ebde744648" providerId="ADAL" clId="{462F397F-3FFD-40DA-ACDE-BEFE90E09729}" dt="2026-04-07T18:55:19.636" v="49" actId="478"/>
+          <ac:spMkLst>
+            <pc:docMk/>
+            <pc:sldMk cId="0" sldId="257"/>
+            <ac:spMk id="81" creationId="{00000000-0000-0000-0000-000000000000}"/>
+          </ac:spMkLst>
+        </pc:spChg>
+        <pc:spChg chg="del">
+          <ac:chgData name="Eckhoff, Amanda Bryn - eckhofax" userId="cd4a9e7b-1ef2-42f1-9b2d-d5ebde744648" providerId="ADAL" clId="{462F397F-3FFD-40DA-ACDE-BEFE90E09729}" dt="2026-04-07T18:55:32.371" v="52" actId="478"/>
+          <ac:spMkLst>
+            <pc:docMk/>
+            <pc:sldMk cId="0" sldId="257"/>
+            <ac:spMk id="82" creationId="{00000000-0000-0000-0000-000000000000}"/>
+          </ac:spMkLst>
+        </pc:spChg>
+        <pc:spChg chg="del">
+          <ac:chgData name="Eckhoff, Amanda Bryn - eckhofax" userId="cd4a9e7b-1ef2-42f1-9b2d-d5ebde744648" providerId="ADAL" clId="{462F397F-3FFD-40DA-ACDE-BEFE90E09729}" dt="2026-04-07T18:55:19.636" v="49" actId="478"/>
+          <ac:spMkLst>
+            <pc:docMk/>
+            <pc:sldMk cId="0" sldId="257"/>
+            <ac:spMk id="83" creationId="{00000000-0000-0000-0000-000000000000}"/>
+          </ac:spMkLst>
+        </pc:spChg>
+        <pc:spChg chg="del">
+          <ac:chgData name="Eckhoff, Amanda Bryn - eckhofax" userId="cd4a9e7b-1ef2-42f1-9b2d-d5ebde744648" providerId="ADAL" clId="{462F397F-3FFD-40DA-ACDE-BEFE90E09729}" dt="2026-04-07T18:55:19.636" v="49" actId="478"/>
+          <ac:spMkLst>
+            <pc:docMk/>
+            <pc:sldMk cId="0" sldId="257"/>
+            <ac:spMk id="84" creationId="{00000000-0000-0000-0000-000000000000}"/>
+          </ac:spMkLst>
+        </pc:spChg>
+        <pc:spChg chg="del">
+          <ac:chgData name="Eckhoff, Amanda Bryn - eckhofax" userId="cd4a9e7b-1ef2-42f1-9b2d-d5ebde744648" providerId="ADAL" clId="{462F397F-3FFD-40DA-ACDE-BEFE90E09729}" dt="2026-04-07T18:55:22.978" v="50" actId="478"/>
+          <ac:spMkLst>
+            <pc:docMk/>
+            <pc:sldMk cId="0" sldId="257"/>
+            <ac:spMk id="85" creationId="{00000000-0000-0000-0000-000000000000}"/>
+          </ac:spMkLst>
+        </pc:spChg>
+        <pc:spChg chg="del">
+          <ac:chgData name="Eckhoff, Amanda Bryn - eckhofax" userId="cd4a9e7b-1ef2-42f1-9b2d-d5ebde744648" providerId="ADAL" clId="{462F397F-3FFD-40DA-ACDE-BEFE90E09729}" dt="2026-04-07T18:55:26.983" v="51" actId="478"/>
+          <ac:spMkLst>
+            <pc:docMk/>
+            <pc:sldMk cId="0" sldId="257"/>
+            <ac:spMk id="86" creationId="{00000000-0000-0000-0000-000000000000}"/>
+          </ac:spMkLst>
+        </pc:spChg>
+        <pc:spChg chg="del">
+          <ac:chgData name="Eckhoff, Amanda Bryn - eckhofax" userId="cd4a9e7b-1ef2-42f1-9b2d-d5ebde744648" providerId="ADAL" clId="{462F397F-3FFD-40DA-ACDE-BEFE90E09729}" dt="2026-04-07T18:55:19.636" v="49" actId="478"/>
+          <ac:spMkLst>
+            <pc:docMk/>
+            <pc:sldMk cId="0" sldId="257"/>
+            <ac:spMk id="87" creationId="{00000000-0000-0000-0000-000000000000}"/>
+          </ac:spMkLst>
+        </pc:spChg>
+        <pc:spChg chg="del">
+          <ac:chgData name="Eckhoff, Amanda Bryn - eckhofax" userId="cd4a9e7b-1ef2-42f1-9b2d-d5ebde744648" providerId="ADAL" clId="{462F397F-3FFD-40DA-ACDE-BEFE90E09729}" dt="2026-04-07T18:55:38.558" v="53" actId="478"/>
+          <ac:spMkLst>
+            <pc:docMk/>
+            <pc:sldMk cId="0" sldId="257"/>
+            <ac:spMk id="88" creationId="{00000000-0000-0000-0000-000000000000}"/>
+          </ac:spMkLst>
+        </pc:spChg>
+        <pc:spChg chg="del">
+          <ac:chgData name="Eckhoff, Amanda Bryn - eckhofax" userId="cd4a9e7b-1ef2-42f1-9b2d-d5ebde744648" providerId="ADAL" clId="{462F397F-3FFD-40DA-ACDE-BEFE90E09729}" dt="2026-04-07T18:55:19.636" v="49" actId="478"/>
+          <ac:spMkLst>
+            <pc:docMk/>
+            <pc:sldMk cId="0" sldId="257"/>
+            <ac:spMk id="89" creationId="{00000000-0000-0000-0000-000000000000}"/>
+          </ac:spMkLst>
+        </pc:spChg>
+        <pc:spChg chg="del">
+          <ac:chgData name="Eckhoff, Amanda Bryn - eckhofax" userId="cd4a9e7b-1ef2-42f1-9b2d-d5ebde744648" providerId="ADAL" clId="{462F397F-3FFD-40DA-ACDE-BEFE90E09729}" dt="2026-04-07T18:55:19.636" v="49" actId="478"/>
+          <ac:spMkLst>
+            <pc:docMk/>
+            <pc:sldMk cId="0" sldId="257"/>
+            <ac:spMk id="90" creationId="{00000000-0000-0000-0000-000000000000}"/>
+          </ac:spMkLst>
+        </pc:spChg>
+        <pc:spChg chg="del">
+          <ac:chgData name="Eckhoff, Amanda Bryn - eckhofax" userId="cd4a9e7b-1ef2-42f1-9b2d-d5ebde744648" providerId="ADAL" clId="{462F397F-3FFD-40DA-ACDE-BEFE90E09729}" dt="2026-04-07T18:55:19.636" v="49" actId="478"/>
+          <ac:spMkLst>
+            <pc:docMk/>
+            <pc:sldMk cId="0" sldId="257"/>
+            <ac:spMk id="91" creationId="{00000000-0000-0000-0000-000000000000}"/>
+          </ac:spMkLst>
+        </pc:spChg>
+        <pc:spChg chg="del">
+          <ac:chgData name="Eckhoff, Amanda Bryn - eckhofax" userId="cd4a9e7b-1ef2-42f1-9b2d-d5ebde744648" providerId="ADAL" clId="{462F397F-3FFD-40DA-ACDE-BEFE90E09729}" dt="2026-04-07T18:55:19.636" v="49" actId="478"/>
+          <ac:spMkLst>
+            <pc:docMk/>
+            <pc:sldMk cId="0" sldId="257"/>
+            <ac:spMk id="92" creationId="{00000000-0000-0000-0000-000000000000}"/>
+          </ac:spMkLst>
+        </pc:spChg>
+        <pc:spChg chg="del">
+          <ac:chgData name="Eckhoff, Amanda Bryn - eckhofax" userId="cd4a9e7b-1ef2-42f1-9b2d-d5ebde744648" providerId="ADAL" clId="{462F397F-3FFD-40DA-ACDE-BEFE90E09729}" dt="2026-04-07T18:55:19.636" v="49" actId="478"/>
+          <ac:spMkLst>
+            <pc:docMk/>
+            <pc:sldMk cId="0" sldId="257"/>
+            <ac:spMk id="93" creationId="{00000000-0000-0000-0000-000000000000}"/>
+          </ac:spMkLst>
+        </pc:spChg>
+        <pc:spChg chg="del">
+          <ac:chgData name="Eckhoff, Amanda Bryn - eckhofax" userId="cd4a9e7b-1ef2-42f1-9b2d-d5ebde744648" providerId="ADAL" clId="{462F397F-3FFD-40DA-ACDE-BEFE90E09729}" dt="2026-04-07T18:55:54.543" v="58" actId="478"/>
+          <ac:spMkLst>
+            <pc:docMk/>
+            <pc:sldMk cId="0" sldId="257"/>
+            <ac:spMk id="94" creationId="{00000000-0000-0000-0000-000000000000}"/>
+          </ac:spMkLst>
+        </pc:spChg>
+        <pc:spChg chg="add mod">
+          <ac:chgData name="Eckhoff, Amanda Bryn - eckhofax" userId="cd4a9e7b-1ef2-42f1-9b2d-d5ebde744648" providerId="ADAL" clId="{462F397F-3FFD-40DA-ACDE-BEFE90E09729}" dt="2026-04-07T18:56:00.604" v="60" actId="571"/>
+          <ac:spMkLst>
+            <pc:docMk/>
+            <pc:sldMk cId="0" sldId="257"/>
+            <ac:spMk id="98" creationId="{E3C6932F-6FB1-A739-619E-6E414A391F7C}"/>
+          </ac:spMkLst>
+        </pc:spChg>
+        <pc:spChg chg="add mod">
+          <ac:chgData name="Eckhoff, Amanda Bryn - eckhofax" userId="cd4a9e7b-1ef2-42f1-9b2d-d5ebde744648" providerId="ADAL" clId="{462F397F-3FFD-40DA-ACDE-BEFE90E09729}" dt="2026-04-07T18:56:49.785" v="431" actId="1076"/>
+          <ac:spMkLst>
+            <pc:docMk/>
+            <pc:sldMk cId="0" sldId="257"/>
+            <ac:spMk id="99" creationId="{FD54E357-DC2A-3A57-2BD3-DE69C8F52C3E}"/>
+          </ac:spMkLst>
+        </pc:spChg>
+        <pc:spChg chg="add mod">
+          <ac:chgData name="Eckhoff, Amanda Bryn - eckhofax" userId="cd4a9e7b-1ef2-42f1-9b2d-d5ebde744648" providerId="ADAL" clId="{462F397F-3FFD-40DA-ACDE-BEFE90E09729}" dt="2026-04-07T18:57:25.289" v="434" actId="164"/>
+          <ac:spMkLst>
+            <pc:docMk/>
+            <pc:sldMk cId="0" sldId="257"/>
+            <ac:spMk id="100" creationId="{0BC7470D-A812-3F6A-6580-4EB779E17535}"/>
+          </ac:spMkLst>
+        </pc:spChg>
+        <pc:spChg chg="add mod">
+          <ac:chgData name="Eckhoff, Amanda Bryn - eckhofax" userId="cd4a9e7b-1ef2-42f1-9b2d-d5ebde744648" providerId="ADAL" clId="{462F397F-3FFD-40DA-ACDE-BEFE90E09729}" dt="2026-04-07T18:56:49.785" v="431" actId="1076"/>
+          <ac:spMkLst>
+            <pc:docMk/>
+            <pc:sldMk cId="0" sldId="257"/>
+            <ac:spMk id="101" creationId="{AAD1E718-6DD2-FE01-F962-EAD1121DF006}"/>
+          </ac:spMkLst>
+        </pc:spChg>
+        <pc:spChg chg="add mod">
+          <ac:chgData name="Eckhoff, Amanda Bryn - eckhofax" userId="cd4a9e7b-1ef2-42f1-9b2d-d5ebde744648" providerId="ADAL" clId="{462F397F-3FFD-40DA-ACDE-BEFE90E09729}" dt="2026-04-07T18:57:25.289" v="434" actId="164"/>
+          <ac:spMkLst>
+            <pc:docMk/>
+            <pc:sldMk cId="0" sldId="257"/>
+            <ac:spMk id="102" creationId="{1829D111-5504-44C5-2BB5-4D1FAD2D4FDE}"/>
+          </ac:spMkLst>
+        </pc:spChg>
+        <pc:grpChg chg="mod">
+          <ac:chgData name="Eckhoff, Amanda Bryn - eckhofax" userId="cd4a9e7b-1ef2-42f1-9b2d-d5ebde744648" providerId="ADAL" clId="{462F397F-3FFD-40DA-ACDE-BEFE90E09729}" dt="2026-04-07T18:57:25.289" v="434" actId="164"/>
+          <ac:grpSpMkLst>
+            <pc:docMk/>
+            <pc:sldMk cId="0" sldId="257"/>
+            <ac:grpSpMk id="2" creationId="{00000000-0000-0000-0000-000000000000}"/>
+          </ac:grpSpMkLst>
+        </pc:grpChg>
+        <pc:grpChg chg="add mod">
+          <ac:chgData name="Eckhoff, Amanda Bryn - eckhofax" userId="cd4a9e7b-1ef2-42f1-9b2d-d5ebde744648" providerId="ADAL" clId="{462F397F-3FFD-40DA-ACDE-BEFE90E09729}" dt="2026-04-07T18:57:25.289" v="434" actId="164"/>
+          <ac:grpSpMkLst>
+            <pc:docMk/>
+            <pc:sldMk cId="0" sldId="257"/>
+            <ac:grpSpMk id="104" creationId="{C4A84F92-5A04-722B-5EC8-0CBA0D4437C9}"/>
+          </ac:grpSpMkLst>
+        </pc:grpChg>
+        <pc:cxnChg chg="add mod">
+          <ac:chgData name="Eckhoff, Amanda Bryn - eckhofax" userId="cd4a9e7b-1ef2-42f1-9b2d-d5ebde744648" providerId="ADAL" clId="{462F397F-3FFD-40DA-ACDE-BEFE90E09729}" dt="2026-04-07T18:56:49.785" v="431" actId="1076"/>
+          <ac:cxnSpMkLst>
+            <pc:docMk/>
+            <pc:sldMk cId="0" sldId="257"/>
+            <ac:cxnSpMk id="103" creationId="{F4B97BF2-1632-7CF4-D094-6E0E5508B796}"/>
+          </ac:cxnSpMkLst>
+        </pc:cxnChg>
+      </pc:sldChg>
+    </pc:docChg>
+  </pc:docChgLst>
+</pc:chgInfo>
 </file>
 
 <file path=ppt/notesMasters/notesMaster1.xml><?xml version="1.0" encoding="utf-8"?>
@@ -2676,86 +3176,12 @@
         </p:nvGrpSpPr>
         <p:grpSpPr>
           <a:xfrm>
-            <a:off x="914400" y="914400"/>
-            <a:ext cx="3657600" cy="2743200"/>
-            <a:chOff x="914400" y="914400"/>
-            <a:chExt cx="3657600" cy="2743200"/>
+            <a:off x="1040160" y="1012897"/>
+            <a:ext cx="6232647" cy="3652495"/>
+            <a:chOff x="983989" y="983989"/>
+            <a:chExt cx="3448832" cy="2580521"/>
           </a:xfrm>
         </p:grpSpPr>
-        <p:sp>
-          <p:nvSpPr>
-            <p:cNvPr id="3" name="rc3"/>
-            <p:cNvSpPr/>
-            <p:nvPr/>
-          </p:nvSpPr>
-          <p:spPr>
-            <a:xfrm>
-              <a:off x="914400" y="914400"/>
-              <a:ext cx="3657600" cy="2743200"/>
-            </a:xfrm>
-            <a:prstGeom prst="rect">
-              <a:avLst/>
-            </a:prstGeom>
-            <a:solidFill>
-              <a:srgbClr val="FFFFFF">
-                <a:alpha val="100000"/>
-              </a:srgbClr>
-            </a:solidFill>
-            <a:ln w="9525" cap="rnd">
-              <a:solidFill>
-                <a:srgbClr val="FFFFFF">
-                  <a:alpha val="100000"/>
-                </a:srgbClr>
-              </a:solidFill>
-              <a:prstDash val="solid"/>
-              <a:round/>
-            </a:ln>
-          </p:spPr>
-          <p:txBody>
-            <a:bodyPr/>
-            <a:lstStyle/>
-            <a:p>
-              <a:endParaRPr/>
-            </a:p>
-          </p:txBody>
-        </p:sp>
-        <p:sp>
-          <p:nvSpPr>
-            <p:cNvPr id="4" name="rc4"/>
-            <p:cNvSpPr/>
-            <p:nvPr/>
-          </p:nvSpPr>
-          <p:spPr>
-            <a:xfrm>
-              <a:off x="914400" y="914400"/>
-              <a:ext cx="3657600" cy="2743200"/>
-            </a:xfrm>
-            <a:prstGeom prst="rect">
-              <a:avLst/>
-            </a:prstGeom>
-            <a:solidFill>
-              <a:srgbClr val="FFFFFF">
-                <a:alpha val="100000"/>
-              </a:srgbClr>
-            </a:solidFill>
-            <a:ln w="13550" cap="rnd">
-              <a:solidFill>
-                <a:srgbClr val="FFFFFF">
-                  <a:alpha val="100000"/>
-                </a:srgbClr>
-              </a:solidFill>
-              <a:prstDash val="solid"/>
-              <a:round/>
-            </a:ln>
-          </p:spPr>
-          <p:txBody>
-            <a:bodyPr/>
-            <a:lstStyle/>
-            <a:p>
-              <a:endParaRPr/>
-            </a:p>
-          </p:txBody>
-        </p:sp>
         <p:sp>
           <p:nvSpPr>
             <p:cNvPr id="5" name="rc5"/>
@@ -7990,7 +8416,7 @@
                 </a:spcAft>
               </a:pPr>
               <a:r>
-                <a:rPr sz="880" b="0" i="0">
+                <a:rPr lang="en-US" sz="2400" b="1" dirty="0">
                   <a:solidFill>
                     <a:srgbClr val="1A1A1A">
                       <a:alpha val="100000"/>
@@ -7999,8 +8425,17 @@
                   <a:latin typeface="Arial"/>
                   <a:cs typeface="Arial"/>
                 </a:rPr>
-                <a:t>lia</a:t>
+                <a:t>LIA</a:t>
               </a:r>
+              <a:endParaRPr sz="2400" b="1" i="0" dirty="0">
+                <a:solidFill>
+                  <a:srgbClr val="1A1A1A">
+                    <a:alpha val="100000"/>
+                  </a:srgbClr>
+                </a:solidFill>
+                <a:latin typeface="Arial"/>
+                <a:cs typeface="Arial"/>
+              </a:endParaRPr>
             </a:p>
           </p:txBody>
         </p:sp>
@@ -8070,7 +8505,7 @@
                 </a:spcAft>
               </a:pPr>
               <a:r>
-                <a:rPr sz="880" b="0" i="0">
+                <a:rPr lang="en-US" sz="2400" b="1" dirty="0">
                   <a:solidFill>
                     <a:srgbClr val="1A1A1A">
                       <a:alpha val="100000"/>
@@ -8079,8 +8514,17 @@
                   <a:latin typeface="Arial"/>
                   <a:cs typeface="Arial"/>
                 </a:rPr>
-                <a:t>rgm</a:t>
+                <a:t>RGM</a:t>
               </a:r>
+              <a:endParaRPr sz="2400" b="1" i="0" dirty="0">
+                <a:solidFill>
+                  <a:srgbClr val="1A1A1A">
+                    <a:alpha val="100000"/>
+                  </a:srgbClr>
+                </a:solidFill>
+                <a:latin typeface="Arial"/>
+                <a:cs typeface="Arial"/>
+              </a:endParaRPr>
             </a:p>
           </p:txBody>
         </p:sp>
@@ -8205,17 +8649,16 @@
                 </a:spcAft>
               </a:pPr>
               <a:r>
-                <a:rPr sz="880" b="0" i="0">
-                  <a:solidFill>
-                    <a:srgbClr val="4D4D4D">
-                      <a:alpha val="100000"/>
-                    </a:srgbClr>
-                  </a:solidFill>
+                <a:rPr lang="en-US" sz="2400" b="1" i="0" dirty="0">
                   <a:latin typeface="Arial"/>
                   <a:cs typeface="Arial"/>
                 </a:rPr>
-                <a:t>control</a:t>
+                <a:t>reference</a:t>
               </a:r>
+              <a:endParaRPr sz="2400" b="1" i="0" dirty="0">
+                <a:latin typeface="Arial"/>
+                <a:cs typeface="Arial"/>
+              </a:endParaRPr>
             </a:p>
           </p:txBody>
         </p:sp>
@@ -8248,12 +8691,7 @@
                 </a:spcAft>
               </a:pPr>
               <a:r>
-                <a:rPr sz="880" b="0" i="0">
-                  <a:solidFill>
-                    <a:srgbClr val="4D4D4D">
-                      <a:alpha val="100000"/>
-                    </a:srgbClr>
-                  </a:solidFill>
+                <a:rPr sz="2400" b="1" i="0">
                   <a:latin typeface="Arial"/>
                   <a:cs typeface="Arial"/>
                 </a:rPr>
@@ -8383,17 +8821,16 @@
                 </a:spcAft>
               </a:pPr>
               <a:r>
-                <a:rPr sz="880" b="0" i="0">
-                  <a:solidFill>
-                    <a:srgbClr val="4D4D4D">
-                      <a:alpha val="100000"/>
-                    </a:srgbClr>
-                  </a:solidFill>
+                <a:rPr lang="en-US" sz="2400" b="1" i="0" dirty="0">
                   <a:latin typeface="Arial"/>
                   <a:cs typeface="Arial"/>
                 </a:rPr>
-                <a:t>control</a:t>
+                <a:t>reference</a:t>
               </a:r>
+              <a:endParaRPr sz="2400" b="1" i="0" dirty="0">
+                <a:latin typeface="Arial"/>
+                <a:cs typeface="Arial"/>
+              </a:endParaRPr>
             </a:p>
           </p:txBody>
         </p:sp>
@@ -8426,12 +8863,7 @@
                 </a:spcAft>
               </a:pPr>
               <a:r>
-                <a:rPr sz="880" b="0" i="0">
-                  <a:solidFill>
-                    <a:srgbClr val="4D4D4D">
-                      <a:alpha val="100000"/>
-                    </a:srgbClr>
-                  </a:solidFill>
+                <a:rPr sz="2400" b="1" i="0" dirty="0">
                   <a:latin typeface="Arial"/>
                   <a:cs typeface="Arial"/>
                 </a:rPr>
@@ -8469,7 +8901,7 @@
                 </a:spcAft>
               </a:pPr>
               <a:r>
-                <a:rPr sz="880" b="0" i="0">
+                <a:rPr sz="2000" b="0" i="0">
                   <a:solidFill>
                     <a:srgbClr val="4D4D4D">
                       <a:alpha val="100000"/>
@@ -8512,7 +8944,7 @@
                 </a:spcAft>
               </a:pPr>
               <a:r>
-                <a:rPr sz="880" b="0" i="0">
+                <a:rPr sz="2000" b="0" i="0">
                   <a:solidFill>
                     <a:srgbClr val="4D4D4D">
                       <a:alpha val="100000"/>
@@ -8555,7 +8987,7 @@
                 </a:spcAft>
               </a:pPr>
               <a:r>
-                <a:rPr sz="880" b="0" i="0">
+                <a:rPr sz="2000" b="0" i="0" dirty="0">
                   <a:solidFill>
                     <a:srgbClr val="4D4D4D">
                       <a:alpha val="100000"/>
@@ -8736,7 +9168,7 @@
                 </a:spcAft>
               </a:pPr>
               <a:r>
-                <a:rPr sz="1100" b="0" i="0">
+                <a:rPr sz="2400" b="0" i="0" dirty="0">
                   <a:solidFill>
                     <a:srgbClr val="000000">
                       <a:alpha val="100000"/>
@@ -8747,34 +9179,6 @@
                 </a:rPr>
                 <a:t>ASV Richness</a:t>
               </a:r>
-            </a:p>
-          </p:txBody>
-        </p:sp>
-        <p:sp>
-          <p:nvSpPr>
-            <p:cNvPr id="154" name="rc154"/>
-            <p:cNvSpPr/>
-            <p:nvPr/>
-          </p:nvSpPr>
-          <p:spPr>
-            <a:xfrm>
-              <a:off x="3803894" y="1704974"/>
-              <a:ext cx="698516" cy="1435526"/>
-            </a:xfrm>
-            <a:prstGeom prst="rect">
-              <a:avLst/>
-            </a:prstGeom>
-            <a:solidFill>
-              <a:srgbClr val="FFFFFF">
-                <a:alpha val="100000"/>
-              </a:srgbClr>
-            </a:solidFill>
-          </p:spPr>
-          <p:txBody>
-            <a:bodyPr/>
-            <a:lstStyle/>
-            <a:p>
-              <a:endParaRPr/>
             </a:p>
           </p:txBody>
         </p:sp>
@@ -8807,7 +9211,7 @@
                 </a:spcAft>
               </a:pPr>
               <a:r>
-                <a:rPr sz="1100" b="0" i="0">
+                <a:rPr lang="en-US" sz="2000" dirty="0">
                   <a:solidFill>
                     <a:srgbClr val="000000">
                       <a:alpha val="100000"/>
@@ -8816,7 +9220,19 @@
                   <a:latin typeface="Arial"/>
                   <a:cs typeface="Arial"/>
                 </a:rPr>
-                <a:t>elevation</a:t>
+                <a:t>E</a:t>
+              </a:r>
+              <a:r>
+                <a:rPr sz="2000" b="0" i="0" dirty="0">
+                  <a:solidFill>
+                    <a:srgbClr val="000000">
+                      <a:alpha val="100000"/>
+                    </a:srgbClr>
+                  </a:solidFill>
+                  <a:latin typeface="Arial"/>
+                  <a:cs typeface="Arial"/>
+                </a:rPr>
+                <a:t>levation</a:t>
               </a:r>
             </a:p>
           </p:txBody>
@@ -9148,7 +9564,7 @@
                 </a:spcAft>
               </a:pPr>
               <a:r>
-                <a:rPr sz="880" b="0" i="0">
+                <a:rPr sz="2000" b="0" i="0">
                   <a:solidFill>
                     <a:srgbClr val="000000">
                       <a:alpha val="100000"/>
@@ -9191,7 +9607,7 @@
                 </a:spcAft>
               </a:pPr>
               <a:r>
-                <a:rPr sz="880" b="0" i="0">
+                <a:rPr sz="2000" b="0" i="0" dirty="0">
                   <a:solidFill>
                     <a:srgbClr val="000000">
                       <a:alpha val="100000"/>
@@ -9234,7 +9650,7 @@
                 </a:spcAft>
               </a:pPr>
               <a:r>
-                <a:rPr sz="880" b="0" i="0">
+                <a:rPr sz="2000" b="0" i="0">
                   <a:solidFill>
                     <a:srgbClr val="000000">
                       <a:alpha val="100000"/>
@@ -9317,2650 +9733,3253 @@
           <a:chExt cx="0" cy="0"/>
         </a:xfrm>
       </p:grpSpPr>
+      <p:sp>
+        <p:nvSpPr>
+          <p:cNvPr id="99" name="tx96">
+            <a:extLst>
+              <a:ext uri="{FF2B5EF4-FFF2-40B4-BE49-F238E27FC236}">
+                <a16:creationId xmlns:a16="http://schemas.microsoft.com/office/drawing/2014/main" id="{FD54E357-DC2A-3A57-2BD3-DE69C8F52C3E}"/>
+              </a:ext>
+            </a:extLst>
+          </p:cNvPr>
+          <p:cNvSpPr/>
+          <p:nvPr/>
+        </p:nvSpPr>
+        <p:spPr>
+          <a:xfrm>
+            <a:off x="7845505" y="810700"/>
+            <a:ext cx="2287139" cy="225785"/>
+          </a:xfrm>
+          <a:prstGeom prst="rect">
+            <a:avLst/>
+          </a:prstGeom>
+          <a:noFill/>
+        </p:spPr>
+        <p:txBody>
+          <a:bodyPr wrap="none" lIns="0" tIns="0" rIns="0" bIns="0" anchor="ctr" anchorCtr="1"/>
+          <a:lstStyle/>
+          <a:p>
+            <a:pPr marL="0" marR="0" indent="0" algn="l">
+              <a:spcBef>
+                <a:spcPts val="0"/>
+              </a:spcBef>
+              <a:spcAft>
+                <a:spcPts val="0"/>
+              </a:spcAft>
+            </a:pPr>
+            <a:r>
+              <a:rPr sz="2000" i="0" dirty="0">
+                <a:solidFill>
+                  <a:srgbClr val="000000">
+                    <a:alpha val="100000"/>
+                  </a:srgbClr>
+                </a:solidFill>
+                <a:latin typeface="Arial"/>
+                <a:cs typeface="Arial"/>
+              </a:rPr>
+              <a:t>LIA </a:t>
+            </a:r>
+            <a:r>
+              <a:rPr lang="en-US" sz="2000" dirty="0">
+                <a:solidFill>
+                  <a:srgbClr val="000000">
+                    <a:alpha val="100000"/>
+                  </a:srgbClr>
+                </a:solidFill>
+                <a:latin typeface="Arial"/>
+                <a:cs typeface="Arial"/>
+              </a:rPr>
+              <a:t>Reference</a:t>
+            </a:r>
+            <a:endParaRPr sz="2000" i="0" dirty="0">
+              <a:solidFill>
+                <a:srgbClr val="000000">
+                  <a:alpha val="100000"/>
+                </a:srgbClr>
+              </a:solidFill>
+              <a:latin typeface="Arial"/>
+              <a:cs typeface="Arial"/>
+            </a:endParaRPr>
+          </a:p>
+        </p:txBody>
+      </p:sp>
+      <p:sp>
+        <p:nvSpPr>
+          <p:cNvPr id="101" name="tx98">
+            <a:extLst>
+              <a:ext uri="{FF2B5EF4-FFF2-40B4-BE49-F238E27FC236}">
+                <a16:creationId xmlns:a16="http://schemas.microsoft.com/office/drawing/2014/main" id="{AAD1E718-6DD2-FE01-F962-EAD1121DF006}"/>
+              </a:ext>
+            </a:extLst>
+          </p:cNvPr>
+          <p:cNvSpPr/>
+          <p:nvPr/>
+        </p:nvSpPr>
+        <p:spPr>
+          <a:xfrm>
+            <a:off x="7979822" y="1484784"/>
+            <a:ext cx="2210751" cy="225785"/>
+          </a:xfrm>
+          <a:prstGeom prst="rect">
+            <a:avLst/>
+          </a:prstGeom>
+          <a:noFill/>
+        </p:spPr>
+        <p:txBody>
+          <a:bodyPr wrap="none" lIns="0" tIns="0" rIns="0" bIns="0" anchor="ctr" anchorCtr="1"/>
+          <a:lstStyle/>
+          <a:p>
+            <a:pPr marL="0" marR="0" indent="0" algn="l">
+              <a:spcBef>
+                <a:spcPts val="0"/>
+              </a:spcBef>
+              <a:spcAft>
+                <a:spcPts val="0"/>
+              </a:spcAft>
+            </a:pPr>
+            <a:r>
+              <a:rPr sz="2000" b="0" i="0" dirty="0">
+                <a:solidFill>
+                  <a:srgbClr val="000000">
+                    <a:alpha val="100000"/>
+                  </a:srgbClr>
+                </a:solidFill>
+                <a:latin typeface="Arial"/>
+                <a:cs typeface="Arial"/>
+              </a:rPr>
+              <a:t>LIA Latrine</a:t>
+            </a:r>
+          </a:p>
+        </p:txBody>
+      </p:sp>
       <p:grpSp>
         <p:nvGrpSpPr>
-          <p:cNvPr id="2" name="Group 1"/>
+          <p:cNvPr id="104" name="Group 103">
+            <a:extLst>
+              <a:ext uri="{FF2B5EF4-FFF2-40B4-BE49-F238E27FC236}">
+                <a16:creationId xmlns:a16="http://schemas.microsoft.com/office/drawing/2014/main" id="{C4A84F92-5A04-722B-5EC8-0CBA0D4437C9}"/>
+              </a:ext>
+            </a:extLst>
+          </p:cNvPr>
           <p:cNvGrpSpPr/>
           <p:nvPr/>
         </p:nvGrpSpPr>
         <p:grpSpPr>
           <a:xfrm>
-            <a:off x="914400" y="914400"/>
-            <a:ext cx="3657600" cy="2743200"/>
-            <a:chOff x="914400" y="914400"/>
-            <a:chExt cx="3657600" cy="2743200"/>
+            <a:off x="1115616" y="1202042"/>
+            <a:ext cx="4924557" cy="3819405"/>
+            <a:chOff x="1115616" y="1202042"/>
+            <a:chExt cx="4924557" cy="3819405"/>
           </a:xfrm>
         </p:grpSpPr>
+        <p:grpSp>
+          <p:nvGrpSpPr>
+            <p:cNvPr id="2" name="Group 1"/>
+            <p:cNvGrpSpPr/>
+            <p:nvPr/>
+          </p:nvGrpSpPr>
+          <p:grpSpPr>
+            <a:xfrm>
+              <a:off x="1115616" y="1202042"/>
+              <a:ext cx="4464496" cy="3819405"/>
+              <a:chOff x="983988" y="1208751"/>
+              <a:chExt cx="1924793" cy="2349815"/>
+            </a:xfrm>
+          </p:grpSpPr>
+          <p:sp>
+            <p:nvSpPr>
+              <p:cNvPr id="5" name="rc5"/>
+              <p:cNvSpPr/>
+              <p:nvPr/>
+            </p:nvSpPr>
+            <p:spPr>
+              <a:xfrm>
+                <a:off x="1465736" y="1208751"/>
+                <a:ext cx="1443045" cy="2048845"/>
+              </a:xfrm>
+              <a:prstGeom prst="rect">
+                <a:avLst/>
+              </a:prstGeom>
+              <a:solidFill>
+                <a:srgbClr val="FFFFFF">
+                  <a:alpha val="100000"/>
+                </a:srgbClr>
+              </a:solidFill>
+            </p:spPr>
+            <p:txBody>
+              <a:bodyPr/>
+              <a:lstStyle/>
+              <a:p>
+                <a:endParaRPr dirty="0"/>
+              </a:p>
+            </p:txBody>
+          </p:sp>
+          <p:sp>
+            <p:nvSpPr>
+              <p:cNvPr id="6" name="pl6"/>
+              <p:cNvSpPr/>
+              <p:nvPr/>
+            </p:nvSpPr>
+            <p:spPr>
+              <a:xfrm>
+                <a:off x="1465736" y="2733490"/>
+                <a:ext cx="1443045" cy="0"/>
+              </a:xfrm>
+              <a:custGeom>
+                <a:avLst/>
+                <a:gdLst/>
+                <a:ahLst/>
+                <a:cxnLst/>
+                <a:rect l="0" t="0" r="0" b="0"/>
+                <a:pathLst>
+                  <a:path w="1443045">
+                    <a:moveTo>
+                      <a:pt x="0" y="0"/>
+                    </a:moveTo>
+                    <a:lnTo>
+                      <a:pt x="1443045" y="0"/>
+                    </a:lnTo>
+                    <a:lnTo>
+                      <a:pt x="1443045" y="0"/>
+                    </a:lnTo>
+                  </a:path>
+                </a:pathLst>
+              </a:custGeom>
+              <a:ln w="6775" cap="flat">
+                <a:solidFill>
+                  <a:srgbClr val="EBEBEB">
+                    <a:alpha val="100000"/>
+                  </a:srgbClr>
+                </a:solidFill>
+                <a:prstDash val="solid"/>
+                <a:round/>
+              </a:ln>
+            </p:spPr>
+            <p:txBody>
+              <a:bodyPr/>
+              <a:lstStyle/>
+              <a:p>
+                <a:endParaRPr/>
+              </a:p>
+            </p:txBody>
+          </p:sp>
+          <p:sp>
+            <p:nvSpPr>
+              <p:cNvPr id="7" name="pl7"/>
+              <p:cNvSpPr/>
+              <p:nvPr/>
+            </p:nvSpPr>
+            <p:spPr>
+              <a:xfrm>
+                <a:off x="1465736" y="2032263"/>
+                <a:ext cx="1443045" cy="0"/>
+              </a:xfrm>
+              <a:custGeom>
+                <a:avLst/>
+                <a:gdLst/>
+                <a:ahLst/>
+                <a:cxnLst/>
+                <a:rect l="0" t="0" r="0" b="0"/>
+                <a:pathLst>
+                  <a:path w="1443045">
+                    <a:moveTo>
+                      <a:pt x="0" y="0"/>
+                    </a:moveTo>
+                    <a:lnTo>
+                      <a:pt x="1443045" y="0"/>
+                    </a:lnTo>
+                    <a:lnTo>
+                      <a:pt x="1443045" y="0"/>
+                    </a:lnTo>
+                  </a:path>
+                </a:pathLst>
+              </a:custGeom>
+              <a:ln w="6775" cap="flat">
+                <a:solidFill>
+                  <a:srgbClr val="EBEBEB">
+                    <a:alpha val="100000"/>
+                  </a:srgbClr>
+                </a:solidFill>
+                <a:prstDash val="solid"/>
+                <a:round/>
+              </a:ln>
+            </p:spPr>
+            <p:txBody>
+              <a:bodyPr/>
+              <a:lstStyle/>
+              <a:p>
+                <a:endParaRPr/>
+              </a:p>
+            </p:txBody>
+          </p:sp>
+          <p:sp>
+            <p:nvSpPr>
+              <p:cNvPr id="8" name="pl8"/>
+              <p:cNvSpPr/>
+              <p:nvPr/>
+            </p:nvSpPr>
+            <p:spPr>
+              <a:xfrm>
+                <a:off x="1465736" y="1331037"/>
+                <a:ext cx="1443045" cy="0"/>
+              </a:xfrm>
+              <a:custGeom>
+                <a:avLst/>
+                <a:gdLst/>
+                <a:ahLst/>
+                <a:cxnLst/>
+                <a:rect l="0" t="0" r="0" b="0"/>
+                <a:pathLst>
+                  <a:path w="1443045">
+                    <a:moveTo>
+                      <a:pt x="0" y="0"/>
+                    </a:moveTo>
+                    <a:lnTo>
+                      <a:pt x="1443045" y="0"/>
+                    </a:lnTo>
+                    <a:lnTo>
+                      <a:pt x="1443045" y="0"/>
+                    </a:lnTo>
+                  </a:path>
+                </a:pathLst>
+              </a:custGeom>
+              <a:ln w="6775" cap="flat">
+                <a:solidFill>
+                  <a:srgbClr val="EBEBEB">
+                    <a:alpha val="100000"/>
+                  </a:srgbClr>
+                </a:solidFill>
+                <a:prstDash val="solid"/>
+                <a:round/>
+              </a:ln>
+            </p:spPr>
+            <p:txBody>
+              <a:bodyPr/>
+              <a:lstStyle/>
+              <a:p>
+                <a:endParaRPr/>
+              </a:p>
+            </p:txBody>
+          </p:sp>
+          <p:sp>
+            <p:nvSpPr>
+              <p:cNvPr id="9" name="pl9"/>
+              <p:cNvSpPr/>
+              <p:nvPr/>
+            </p:nvSpPr>
+            <p:spPr>
+              <a:xfrm>
+                <a:off x="1692970" y="1208751"/>
+                <a:ext cx="0" cy="2048845"/>
+              </a:xfrm>
+              <a:custGeom>
+                <a:avLst/>
+                <a:gdLst/>
+                <a:ahLst/>
+                <a:cxnLst/>
+                <a:rect l="0" t="0" r="0" b="0"/>
+                <a:pathLst>
+                  <a:path h="2048845">
+                    <a:moveTo>
+                      <a:pt x="0" y="2048845"/>
+                    </a:moveTo>
+                    <a:lnTo>
+                      <a:pt x="0" y="0"/>
+                    </a:lnTo>
+                    <a:lnTo>
+                      <a:pt x="0" y="0"/>
+                    </a:lnTo>
+                  </a:path>
+                </a:pathLst>
+              </a:custGeom>
+              <a:ln w="6775" cap="flat">
+                <a:solidFill>
+                  <a:srgbClr val="EBEBEB">
+                    <a:alpha val="100000"/>
+                  </a:srgbClr>
+                </a:solidFill>
+                <a:prstDash val="solid"/>
+                <a:round/>
+              </a:ln>
+            </p:spPr>
+            <p:txBody>
+              <a:bodyPr/>
+              <a:lstStyle/>
+              <a:p>
+                <a:endParaRPr/>
+              </a:p>
+            </p:txBody>
+          </p:sp>
+          <p:sp>
+            <p:nvSpPr>
+              <p:cNvPr id="10" name="pl10"/>
+              <p:cNvSpPr/>
+              <p:nvPr/>
+            </p:nvSpPr>
+            <p:spPr>
+              <a:xfrm>
+                <a:off x="2211161" y="1208751"/>
+                <a:ext cx="0" cy="2048845"/>
+              </a:xfrm>
+              <a:custGeom>
+                <a:avLst/>
+                <a:gdLst/>
+                <a:ahLst/>
+                <a:cxnLst/>
+                <a:rect l="0" t="0" r="0" b="0"/>
+                <a:pathLst>
+                  <a:path h="2048845">
+                    <a:moveTo>
+                      <a:pt x="0" y="2048845"/>
+                    </a:moveTo>
+                    <a:lnTo>
+                      <a:pt x="0" y="0"/>
+                    </a:lnTo>
+                    <a:lnTo>
+                      <a:pt x="0" y="0"/>
+                    </a:lnTo>
+                  </a:path>
+                </a:pathLst>
+              </a:custGeom>
+              <a:ln w="6775" cap="flat">
+                <a:solidFill>
+                  <a:srgbClr val="EBEBEB">
+                    <a:alpha val="100000"/>
+                  </a:srgbClr>
+                </a:solidFill>
+                <a:prstDash val="solid"/>
+                <a:round/>
+              </a:ln>
+            </p:spPr>
+            <p:txBody>
+              <a:bodyPr/>
+              <a:lstStyle/>
+              <a:p>
+                <a:endParaRPr/>
+              </a:p>
+            </p:txBody>
+          </p:sp>
+          <p:sp>
+            <p:nvSpPr>
+              <p:cNvPr id="11" name="pl11"/>
+              <p:cNvSpPr/>
+              <p:nvPr/>
+            </p:nvSpPr>
+            <p:spPr>
+              <a:xfrm>
+                <a:off x="2729352" y="1208751"/>
+                <a:ext cx="0" cy="2048845"/>
+              </a:xfrm>
+              <a:custGeom>
+                <a:avLst/>
+                <a:gdLst/>
+                <a:ahLst/>
+                <a:cxnLst/>
+                <a:rect l="0" t="0" r="0" b="0"/>
+                <a:pathLst>
+                  <a:path h="2048845">
+                    <a:moveTo>
+                      <a:pt x="0" y="2048845"/>
+                    </a:moveTo>
+                    <a:lnTo>
+                      <a:pt x="0" y="0"/>
+                    </a:lnTo>
+                    <a:lnTo>
+                      <a:pt x="0" y="0"/>
+                    </a:lnTo>
+                  </a:path>
+                </a:pathLst>
+              </a:custGeom>
+              <a:ln w="6775" cap="flat">
+                <a:solidFill>
+                  <a:srgbClr val="EBEBEB">
+                    <a:alpha val="100000"/>
+                  </a:srgbClr>
+                </a:solidFill>
+                <a:prstDash val="solid"/>
+                <a:round/>
+              </a:ln>
+            </p:spPr>
+            <p:txBody>
+              <a:bodyPr/>
+              <a:lstStyle/>
+              <a:p>
+                <a:endParaRPr/>
+              </a:p>
+            </p:txBody>
+          </p:sp>
+          <p:sp>
+            <p:nvSpPr>
+              <p:cNvPr id="12" name="pl12"/>
+              <p:cNvSpPr/>
+              <p:nvPr/>
+            </p:nvSpPr>
+            <p:spPr>
+              <a:xfrm>
+                <a:off x="1465736" y="3084103"/>
+                <a:ext cx="1443045" cy="0"/>
+              </a:xfrm>
+              <a:custGeom>
+                <a:avLst/>
+                <a:gdLst/>
+                <a:ahLst/>
+                <a:cxnLst/>
+                <a:rect l="0" t="0" r="0" b="0"/>
+                <a:pathLst>
+                  <a:path w="1443045">
+                    <a:moveTo>
+                      <a:pt x="0" y="0"/>
+                    </a:moveTo>
+                    <a:lnTo>
+                      <a:pt x="1443045" y="0"/>
+                    </a:lnTo>
+                    <a:lnTo>
+                      <a:pt x="1443045" y="0"/>
+                    </a:lnTo>
+                  </a:path>
+                </a:pathLst>
+              </a:custGeom>
+              <a:ln w="13550" cap="flat">
+                <a:solidFill>
+                  <a:srgbClr val="EBEBEB">
+                    <a:alpha val="100000"/>
+                  </a:srgbClr>
+                </a:solidFill>
+                <a:prstDash val="solid"/>
+                <a:round/>
+              </a:ln>
+            </p:spPr>
+            <p:txBody>
+              <a:bodyPr/>
+              <a:lstStyle/>
+              <a:p>
+                <a:endParaRPr/>
+              </a:p>
+            </p:txBody>
+          </p:sp>
+          <p:sp>
+            <p:nvSpPr>
+              <p:cNvPr id="13" name="pl13"/>
+              <p:cNvSpPr/>
+              <p:nvPr/>
+            </p:nvSpPr>
+            <p:spPr>
+              <a:xfrm>
+                <a:off x="1465736" y="2382877"/>
+                <a:ext cx="1443045" cy="0"/>
+              </a:xfrm>
+              <a:custGeom>
+                <a:avLst/>
+                <a:gdLst/>
+                <a:ahLst/>
+                <a:cxnLst/>
+                <a:rect l="0" t="0" r="0" b="0"/>
+                <a:pathLst>
+                  <a:path w="1443045">
+                    <a:moveTo>
+                      <a:pt x="0" y="0"/>
+                    </a:moveTo>
+                    <a:lnTo>
+                      <a:pt x="1443045" y="0"/>
+                    </a:lnTo>
+                    <a:lnTo>
+                      <a:pt x="1443045" y="0"/>
+                    </a:lnTo>
+                  </a:path>
+                </a:pathLst>
+              </a:custGeom>
+              <a:ln w="13550" cap="flat">
+                <a:solidFill>
+                  <a:srgbClr val="EBEBEB">
+                    <a:alpha val="100000"/>
+                  </a:srgbClr>
+                </a:solidFill>
+                <a:prstDash val="solid"/>
+                <a:round/>
+              </a:ln>
+            </p:spPr>
+            <p:txBody>
+              <a:bodyPr/>
+              <a:lstStyle/>
+              <a:p>
+                <a:endParaRPr/>
+              </a:p>
+            </p:txBody>
+          </p:sp>
+          <p:sp>
+            <p:nvSpPr>
+              <p:cNvPr id="14" name="pl14"/>
+              <p:cNvSpPr/>
+              <p:nvPr/>
+            </p:nvSpPr>
+            <p:spPr>
+              <a:xfrm>
+                <a:off x="1465736" y="1681650"/>
+                <a:ext cx="1443045" cy="0"/>
+              </a:xfrm>
+              <a:custGeom>
+                <a:avLst/>
+                <a:gdLst/>
+                <a:ahLst/>
+                <a:cxnLst/>
+                <a:rect l="0" t="0" r="0" b="0"/>
+                <a:pathLst>
+                  <a:path w="1443045">
+                    <a:moveTo>
+                      <a:pt x="0" y="0"/>
+                    </a:moveTo>
+                    <a:lnTo>
+                      <a:pt x="1443045" y="0"/>
+                    </a:lnTo>
+                    <a:lnTo>
+                      <a:pt x="1443045" y="0"/>
+                    </a:lnTo>
+                  </a:path>
+                </a:pathLst>
+              </a:custGeom>
+              <a:ln w="13550" cap="flat">
+                <a:solidFill>
+                  <a:srgbClr val="EBEBEB">
+                    <a:alpha val="100000"/>
+                  </a:srgbClr>
+                </a:solidFill>
+                <a:prstDash val="solid"/>
+                <a:round/>
+              </a:ln>
+            </p:spPr>
+            <p:txBody>
+              <a:bodyPr/>
+              <a:lstStyle/>
+              <a:p>
+                <a:endParaRPr/>
+              </a:p>
+            </p:txBody>
+          </p:sp>
+          <p:sp>
+            <p:nvSpPr>
+              <p:cNvPr id="15" name="pl15"/>
+              <p:cNvSpPr/>
+              <p:nvPr/>
+            </p:nvSpPr>
+            <p:spPr>
+              <a:xfrm>
+                <a:off x="1952066" y="1208751"/>
+                <a:ext cx="0" cy="2048845"/>
+              </a:xfrm>
+              <a:custGeom>
+                <a:avLst/>
+                <a:gdLst/>
+                <a:ahLst/>
+                <a:cxnLst/>
+                <a:rect l="0" t="0" r="0" b="0"/>
+                <a:pathLst>
+                  <a:path h="2048845">
+                    <a:moveTo>
+                      <a:pt x="0" y="2048845"/>
+                    </a:moveTo>
+                    <a:lnTo>
+                      <a:pt x="0" y="0"/>
+                    </a:lnTo>
+                    <a:lnTo>
+                      <a:pt x="0" y="0"/>
+                    </a:lnTo>
+                  </a:path>
+                </a:pathLst>
+              </a:custGeom>
+              <a:ln w="13550" cap="flat">
+                <a:solidFill>
+                  <a:srgbClr val="EBEBEB">
+                    <a:alpha val="100000"/>
+                  </a:srgbClr>
+                </a:solidFill>
+                <a:prstDash val="solid"/>
+                <a:round/>
+              </a:ln>
+            </p:spPr>
+            <p:txBody>
+              <a:bodyPr/>
+              <a:lstStyle/>
+              <a:p>
+                <a:endParaRPr/>
+              </a:p>
+            </p:txBody>
+          </p:sp>
+          <p:sp>
+            <p:nvSpPr>
+              <p:cNvPr id="16" name="pl16"/>
+              <p:cNvSpPr/>
+              <p:nvPr/>
+            </p:nvSpPr>
+            <p:spPr>
+              <a:xfrm>
+                <a:off x="2470256" y="1208751"/>
+                <a:ext cx="0" cy="2048845"/>
+              </a:xfrm>
+              <a:custGeom>
+                <a:avLst/>
+                <a:gdLst/>
+                <a:ahLst/>
+                <a:cxnLst/>
+                <a:rect l="0" t="0" r="0" b="0"/>
+                <a:pathLst>
+                  <a:path h="2048845">
+                    <a:moveTo>
+                      <a:pt x="0" y="2048845"/>
+                    </a:moveTo>
+                    <a:lnTo>
+                      <a:pt x="0" y="0"/>
+                    </a:lnTo>
+                    <a:lnTo>
+                      <a:pt x="0" y="0"/>
+                    </a:lnTo>
+                  </a:path>
+                </a:pathLst>
+              </a:custGeom>
+              <a:ln w="13550" cap="flat">
+                <a:solidFill>
+                  <a:srgbClr val="EBEBEB">
+                    <a:alpha val="100000"/>
+                  </a:srgbClr>
+                </a:solidFill>
+                <a:prstDash val="solid"/>
+                <a:round/>
+              </a:ln>
+            </p:spPr>
+            <p:txBody>
+              <a:bodyPr/>
+              <a:lstStyle/>
+              <a:p>
+                <a:endParaRPr/>
+              </a:p>
+            </p:txBody>
+          </p:sp>
+          <p:sp>
+            <p:nvSpPr>
+              <p:cNvPr id="17" name="pg17"/>
+              <p:cNvSpPr/>
+              <p:nvPr/>
+            </p:nvSpPr>
+            <p:spPr>
+              <a:xfrm>
+                <a:off x="2485366" y="2947692"/>
+                <a:ext cx="85059" cy="216775"/>
+              </a:xfrm>
+              <a:custGeom>
+                <a:avLst/>
+                <a:gdLst/>
+                <a:ahLst/>
+                <a:cxnLst/>
+                <a:rect l="0" t="0" r="0" b="0"/>
+                <a:pathLst>
+                  <a:path w="85059" h="216775">
+                    <a:moveTo>
+                      <a:pt x="0" y="216775"/>
+                    </a:moveTo>
+                    <a:lnTo>
+                      <a:pt x="38809" y="7100"/>
+                    </a:lnTo>
+                    <a:lnTo>
+                      <a:pt x="83946" y="0"/>
+                    </a:lnTo>
+                    <a:lnTo>
+                      <a:pt x="85059" y="3477"/>
+                    </a:lnTo>
+                    <a:close/>
+                  </a:path>
+                </a:pathLst>
+              </a:custGeom>
+              <a:solidFill>
+                <a:srgbClr val="F8766D">
+                  <a:alpha val="10196"/>
+                </a:srgbClr>
+              </a:solidFill>
+              <a:ln w="13550" cap="flat">
+                <a:solidFill>
+                  <a:srgbClr val="008B8B">
+                    <a:alpha val="100000"/>
+                  </a:srgbClr>
+                </a:solidFill>
+                <a:prstDash val="solid"/>
+                <a:round/>
+              </a:ln>
+            </p:spPr>
+            <p:txBody>
+              <a:bodyPr/>
+              <a:lstStyle/>
+              <a:p>
+                <a:endParaRPr/>
+              </a:p>
+            </p:txBody>
+          </p:sp>
+          <p:sp>
+            <p:nvSpPr>
+              <p:cNvPr id="18" name="pg18"/>
+              <p:cNvSpPr/>
+              <p:nvPr/>
+            </p:nvSpPr>
+            <p:spPr>
+              <a:xfrm>
+                <a:off x="1531329" y="1301881"/>
+                <a:ext cx="1089733" cy="1724421"/>
+              </a:xfrm>
+              <a:custGeom>
+                <a:avLst/>
+                <a:gdLst/>
+                <a:ahLst/>
+                <a:cxnLst/>
+                <a:rect l="0" t="0" r="0" b="0"/>
+                <a:pathLst>
+                  <a:path w="1089733" h="1724421">
+                    <a:moveTo>
+                      <a:pt x="1089733" y="1251521"/>
+                    </a:moveTo>
+                    <a:lnTo>
+                      <a:pt x="1040407" y="1626363"/>
+                    </a:lnTo>
+                    <a:lnTo>
+                      <a:pt x="973300" y="1724421"/>
+                    </a:lnTo>
+                    <a:lnTo>
+                      <a:pt x="471951" y="1677459"/>
+                    </a:lnTo>
+                    <a:lnTo>
+                      <a:pt x="84272" y="904263"/>
+                    </a:lnTo>
+                    <a:lnTo>
+                      <a:pt x="0" y="0"/>
+                    </a:lnTo>
+                    <a:close/>
+                  </a:path>
+                </a:pathLst>
+              </a:custGeom>
+              <a:solidFill>
+                <a:srgbClr val="7CAE00">
+                  <a:alpha val="10196"/>
+                </a:srgbClr>
+              </a:solidFill>
+              <a:ln w="13550" cap="flat">
+                <a:solidFill>
+                  <a:srgbClr val="00EEEE">
+                    <a:alpha val="100000"/>
+                  </a:srgbClr>
+                </a:solidFill>
+                <a:prstDash val="solid"/>
+                <a:round/>
+              </a:ln>
+            </p:spPr>
+            <p:txBody>
+              <a:bodyPr/>
+              <a:lstStyle/>
+              <a:p>
+                <a:endParaRPr/>
+              </a:p>
+            </p:txBody>
+          </p:sp>
+          <p:sp>
+            <p:nvSpPr>
+              <p:cNvPr id="19" name="pg19"/>
+              <p:cNvSpPr/>
+              <p:nvPr/>
+            </p:nvSpPr>
+            <p:spPr>
+              <a:xfrm>
+                <a:off x="2551262" y="2227586"/>
+                <a:ext cx="96897" cy="497805"/>
+              </a:xfrm>
+              <a:custGeom>
+                <a:avLst/>
+                <a:gdLst/>
+                <a:ahLst/>
+                <a:cxnLst/>
+                <a:rect l="0" t="0" r="0" b="0"/>
+                <a:pathLst>
+                  <a:path w="96897" h="497805">
+                    <a:moveTo>
+                      <a:pt x="96897" y="176264"/>
+                    </a:moveTo>
+                    <a:lnTo>
+                      <a:pt x="0" y="497805"/>
+                    </a:lnTo>
+                    <a:lnTo>
+                      <a:pt x="77886" y="0"/>
+                    </a:lnTo>
+                    <a:lnTo>
+                      <a:pt x="93536" y="28931"/>
+                    </a:lnTo>
+                    <a:close/>
+                  </a:path>
+                </a:pathLst>
+              </a:custGeom>
+              <a:solidFill>
+                <a:srgbClr val="00BFC4">
+                  <a:alpha val="10196"/>
+                </a:srgbClr>
+              </a:solidFill>
+              <a:ln w="13550" cap="flat">
+                <a:solidFill>
+                  <a:srgbClr val="551A8B">
+                    <a:alpha val="100000"/>
+                  </a:srgbClr>
+                </a:solidFill>
+                <a:prstDash val="solid"/>
+                <a:round/>
+              </a:ln>
+            </p:spPr>
+            <p:txBody>
+              <a:bodyPr/>
+              <a:lstStyle/>
+              <a:p>
+                <a:endParaRPr/>
+              </a:p>
+            </p:txBody>
+          </p:sp>
+          <p:sp>
+            <p:nvSpPr>
+              <p:cNvPr id="20" name="pg20"/>
+              <p:cNvSpPr/>
+              <p:nvPr/>
+            </p:nvSpPr>
+            <p:spPr>
+              <a:xfrm>
+                <a:off x="2390820" y="1654258"/>
+                <a:ext cx="452367" cy="915709"/>
+              </a:xfrm>
+              <a:custGeom>
+                <a:avLst/>
+                <a:gdLst/>
+                <a:ahLst/>
+                <a:cxnLst/>
+                <a:rect l="0" t="0" r="0" b="0"/>
+                <a:pathLst>
+                  <a:path w="452367" h="915709">
+                    <a:moveTo>
+                      <a:pt x="358069" y="625881"/>
+                    </a:moveTo>
+                    <a:lnTo>
+                      <a:pt x="254849" y="915709"/>
+                    </a:lnTo>
+                    <a:lnTo>
+                      <a:pt x="126938" y="768233"/>
+                    </a:lnTo>
+                    <a:lnTo>
+                      <a:pt x="0" y="566034"/>
+                    </a:lnTo>
+                    <a:lnTo>
+                      <a:pt x="294753" y="0"/>
+                    </a:lnTo>
+                    <a:lnTo>
+                      <a:pt x="452367" y="188706"/>
+                    </a:lnTo>
+                    <a:close/>
+                  </a:path>
+                </a:pathLst>
+              </a:custGeom>
+              <a:solidFill>
+                <a:srgbClr val="C77CFF">
+                  <a:alpha val="10196"/>
+                </a:srgbClr>
+              </a:solidFill>
+              <a:ln w="13550" cap="flat">
+                <a:solidFill>
+                  <a:srgbClr val="9B30FF">
+                    <a:alpha val="100000"/>
+                  </a:srgbClr>
+                </a:solidFill>
+                <a:prstDash val="solid"/>
+                <a:round/>
+              </a:ln>
+            </p:spPr>
+            <p:txBody>
+              <a:bodyPr/>
+              <a:lstStyle/>
+              <a:p>
+                <a:endParaRPr/>
+              </a:p>
+            </p:txBody>
+          </p:sp>
+          <p:sp>
+            <p:nvSpPr>
+              <p:cNvPr id="21" name="pt21"/>
+              <p:cNvSpPr/>
+              <p:nvPr/>
+            </p:nvSpPr>
+            <p:spPr>
+              <a:xfrm>
+                <a:off x="2750449" y="2040833"/>
+                <a:ext cx="63202" cy="63202"/>
+              </a:xfrm>
+              <a:prstGeom prst="ellipse">
+                <a:avLst/>
+              </a:prstGeom>
+              <a:solidFill>
+                <a:srgbClr val="9B30FF">
+                  <a:alpha val="100000"/>
+                </a:srgbClr>
+              </a:solidFill>
+              <a:ln w="9000" cap="rnd">
+                <a:solidFill>
+                  <a:srgbClr val="9B30FF">
+                    <a:alpha val="100000"/>
+                  </a:srgbClr>
+                </a:solidFill>
+                <a:prstDash val="solid"/>
+                <a:round/>
+              </a:ln>
+            </p:spPr>
+            <p:txBody>
+              <a:bodyPr/>
+              <a:lstStyle/>
+              <a:p>
+                <a:endParaRPr/>
+              </a:p>
+            </p:txBody>
+          </p:sp>
+          <p:sp>
+            <p:nvSpPr>
+              <p:cNvPr id="22" name="pt22"/>
+              <p:cNvSpPr/>
+              <p:nvPr/>
+            </p:nvSpPr>
+            <p:spPr>
+              <a:xfrm>
+                <a:off x="1835019" y="1852152"/>
+                <a:ext cx="63202" cy="63202"/>
+              </a:xfrm>
+              <a:prstGeom prst="ellipse">
+                <a:avLst/>
+              </a:prstGeom>
+              <a:solidFill>
+                <a:srgbClr val="00EEEE">
+                  <a:alpha val="100000"/>
+                </a:srgbClr>
+              </a:solidFill>
+              <a:ln w="9000" cap="rnd">
+                <a:solidFill>
+                  <a:srgbClr val="00EEEE">
+                    <a:alpha val="100000"/>
+                  </a:srgbClr>
+                </a:solidFill>
+                <a:prstDash val="solid"/>
+                <a:round/>
+              </a:ln>
+            </p:spPr>
+            <p:txBody>
+              <a:bodyPr/>
+              <a:lstStyle/>
+              <a:p>
+                <a:endParaRPr/>
+              </a:p>
+            </p:txBody>
+          </p:sp>
+          <p:sp>
+            <p:nvSpPr>
+              <p:cNvPr id="23" name="pt23"/>
+              <p:cNvSpPr/>
+              <p:nvPr/>
+            </p:nvSpPr>
+            <p:spPr>
+              <a:xfrm>
+                <a:off x="2717288" y="2248539"/>
+                <a:ext cx="63202" cy="63202"/>
+              </a:xfrm>
+              <a:prstGeom prst="ellipse">
+                <a:avLst/>
+              </a:prstGeom>
+              <a:solidFill>
+                <a:srgbClr val="9B30FF">
+                  <a:alpha val="100000"/>
+                </a:srgbClr>
+              </a:solidFill>
+              <a:ln w="9000" cap="rnd">
+                <a:solidFill>
+                  <a:srgbClr val="9B30FF">
+                    <a:alpha val="100000"/>
+                  </a:srgbClr>
+                </a:solidFill>
+                <a:prstDash val="solid"/>
+                <a:round/>
+              </a:ln>
+            </p:spPr>
+            <p:txBody>
+              <a:bodyPr/>
+              <a:lstStyle/>
+              <a:p>
+                <a:endParaRPr/>
+              </a:p>
+            </p:txBody>
+          </p:sp>
+          <p:sp>
+            <p:nvSpPr>
+              <p:cNvPr id="24" name="pt24"/>
+              <p:cNvSpPr/>
+              <p:nvPr/>
+            </p:nvSpPr>
+            <p:spPr>
+              <a:xfrm>
+                <a:off x="2476564" y="2759935"/>
+                <a:ext cx="63202" cy="63202"/>
+              </a:xfrm>
+              <a:prstGeom prst="ellipse">
+                <a:avLst/>
+              </a:prstGeom>
+              <a:solidFill>
+                <a:srgbClr val="00EEEE">
+                  <a:alpha val="100000"/>
+                </a:srgbClr>
+              </a:solidFill>
+              <a:ln w="9000" cap="rnd">
+                <a:solidFill>
+                  <a:srgbClr val="00EEEE">
+                    <a:alpha val="100000"/>
+                  </a:srgbClr>
+                </a:solidFill>
+                <a:prstDash val="solid"/>
+                <a:round/>
+              </a:ln>
+            </p:spPr>
+            <p:txBody>
+              <a:bodyPr/>
+              <a:lstStyle/>
+              <a:p>
+                <a:endParaRPr/>
+              </a:p>
+            </p:txBody>
+          </p:sp>
+          <p:sp>
+            <p:nvSpPr>
+              <p:cNvPr id="25" name="pt25"/>
+              <p:cNvSpPr/>
+              <p:nvPr/>
+            </p:nvSpPr>
+            <p:spPr>
+              <a:xfrm>
+                <a:off x="2359219" y="2188692"/>
+                <a:ext cx="63202" cy="63202"/>
+              </a:xfrm>
+              <a:prstGeom prst="ellipse">
+                <a:avLst/>
+              </a:prstGeom>
+              <a:solidFill>
+                <a:srgbClr val="9B30FF">
+                  <a:alpha val="100000"/>
+                </a:srgbClr>
+              </a:solidFill>
+              <a:ln w="9000" cap="rnd">
+                <a:solidFill>
+                  <a:srgbClr val="9B30FF">
+                    <a:alpha val="100000"/>
+                  </a:srgbClr>
+                </a:solidFill>
+                <a:prstDash val="solid"/>
+                <a:round/>
+              </a:ln>
+            </p:spPr>
+            <p:txBody>
+              <a:bodyPr/>
+              <a:lstStyle/>
+              <a:p>
+                <a:endParaRPr/>
+              </a:p>
+            </p:txBody>
+          </p:sp>
+          <p:sp>
+            <p:nvSpPr>
+              <p:cNvPr id="26" name="pt26"/>
+              <p:cNvSpPr/>
+              <p:nvPr/>
+            </p:nvSpPr>
+            <p:spPr>
+              <a:xfrm>
+                <a:off x="1843887" y="2260779"/>
+                <a:ext cx="63202" cy="63202"/>
+              </a:xfrm>
+              <a:prstGeom prst="ellipse">
+                <a:avLst/>
+              </a:prstGeom>
+              <a:solidFill>
+                <a:srgbClr val="00EEEE">
+                  <a:alpha val="100000"/>
+                </a:srgbClr>
+              </a:solidFill>
+              <a:ln w="9000" cap="rnd">
+                <a:solidFill>
+                  <a:srgbClr val="00EEEE">
+                    <a:alpha val="100000"/>
+                  </a:srgbClr>
+                </a:solidFill>
+                <a:prstDash val="solid"/>
+                <a:round/>
+              </a:ln>
+            </p:spPr>
+            <p:txBody>
+              <a:bodyPr/>
+              <a:lstStyle/>
+              <a:p>
+                <a:endParaRPr/>
+              </a:p>
+            </p:txBody>
+          </p:sp>
+          <p:sp>
+            <p:nvSpPr>
+              <p:cNvPr id="27" name="pt27"/>
+              <p:cNvSpPr/>
+              <p:nvPr/>
+            </p:nvSpPr>
+            <p:spPr>
+              <a:xfrm>
+                <a:off x="2671824" y="1797230"/>
+                <a:ext cx="63202" cy="63202"/>
+              </a:xfrm>
+              <a:prstGeom prst="ellipse">
+                <a:avLst/>
+              </a:prstGeom>
+              <a:solidFill>
+                <a:srgbClr val="9B30FF">
+                  <a:alpha val="100000"/>
+                </a:srgbClr>
+              </a:solidFill>
+              <a:ln w="9000" cap="rnd">
+                <a:solidFill>
+                  <a:srgbClr val="9B30FF">
+                    <a:alpha val="100000"/>
+                  </a:srgbClr>
+                </a:solidFill>
+                <a:prstDash val="solid"/>
+                <a:round/>
+              </a:ln>
+            </p:spPr>
+            <p:txBody>
+              <a:bodyPr/>
+              <a:lstStyle/>
+              <a:p>
+                <a:endParaRPr/>
+              </a:p>
+            </p:txBody>
+          </p:sp>
+          <p:sp>
+            <p:nvSpPr>
+              <p:cNvPr id="28" name="pt28"/>
+              <p:cNvSpPr/>
+              <p:nvPr/>
+            </p:nvSpPr>
+            <p:spPr>
+              <a:xfrm>
+                <a:off x="1499727" y="1270279"/>
+                <a:ext cx="63202" cy="63202"/>
+              </a:xfrm>
+              <a:prstGeom prst="ellipse">
+                <a:avLst/>
+              </a:prstGeom>
+              <a:solidFill>
+                <a:srgbClr val="00EEEE">
+                  <a:alpha val="100000"/>
+                </a:srgbClr>
+              </a:solidFill>
+              <a:ln w="9000" cap="rnd">
+                <a:solidFill>
+                  <a:srgbClr val="00EEEE">
+                    <a:alpha val="100000"/>
+                  </a:srgbClr>
+                </a:solidFill>
+                <a:prstDash val="solid"/>
+                <a:round/>
+              </a:ln>
+            </p:spPr>
+            <p:txBody>
+              <a:bodyPr/>
+              <a:lstStyle/>
+              <a:p>
+                <a:endParaRPr/>
+              </a:p>
+            </p:txBody>
+          </p:sp>
+          <p:sp>
+            <p:nvSpPr>
+              <p:cNvPr id="29" name="pt29"/>
+              <p:cNvSpPr/>
+              <p:nvPr/>
+            </p:nvSpPr>
+            <p:spPr>
+              <a:xfrm>
+                <a:off x="2538205" y="2302075"/>
+                <a:ext cx="63202" cy="63202"/>
+              </a:xfrm>
+              <a:prstGeom prst="ellipse">
+                <a:avLst/>
+              </a:prstGeom>
+              <a:solidFill>
+                <a:srgbClr val="9B30FF">
+                  <a:alpha val="100000"/>
+                </a:srgbClr>
+              </a:solidFill>
+              <a:ln w="9000" cap="rnd">
+                <a:solidFill>
+                  <a:srgbClr val="9B30FF">
+                    <a:alpha val="100000"/>
+                  </a:srgbClr>
+                </a:solidFill>
+                <a:prstDash val="solid"/>
+                <a:round/>
+              </a:ln>
+            </p:spPr>
+            <p:txBody>
+              <a:bodyPr/>
+              <a:lstStyle/>
+              <a:p>
+                <a:endParaRPr/>
+              </a:p>
+            </p:txBody>
+          </p:sp>
+          <p:sp>
+            <p:nvSpPr>
+              <p:cNvPr id="30" name="pt30"/>
+              <p:cNvSpPr/>
+              <p:nvPr/>
+            </p:nvSpPr>
+            <p:spPr>
+              <a:xfrm>
+                <a:off x="2402460" y="2815663"/>
+                <a:ext cx="63202" cy="63202"/>
+              </a:xfrm>
+              <a:prstGeom prst="ellipse">
+                <a:avLst/>
+              </a:prstGeom>
+              <a:solidFill>
+                <a:srgbClr val="00EEEE">
+                  <a:alpha val="100000"/>
+                </a:srgbClr>
+              </a:solidFill>
+              <a:ln w="9000" cap="rnd">
+                <a:solidFill>
+                  <a:srgbClr val="00EEEE">
+                    <a:alpha val="100000"/>
+                  </a:srgbClr>
+                </a:solidFill>
+                <a:prstDash val="solid"/>
+                <a:round/>
+              </a:ln>
+            </p:spPr>
+            <p:txBody>
+              <a:bodyPr/>
+              <a:lstStyle/>
+              <a:p>
+                <a:endParaRPr/>
+              </a:p>
+            </p:txBody>
+          </p:sp>
+          <p:sp>
+            <p:nvSpPr>
+              <p:cNvPr id="31" name="pt31"/>
+              <p:cNvSpPr/>
+              <p:nvPr/>
+            </p:nvSpPr>
+            <p:spPr>
+              <a:xfrm>
+                <a:off x="2717180" y="2042914"/>
+                <a:ext cx="63202" cy="63202"/>
+              </a:xfrm>
+              <a:prstGeom prst="ellipse">
+                <a:avLst/>
+              </a:prstGeom>
+              <a:solidFill>
+                <a:srgbClr val="9B30FF">
+                  <a:alpha val="100000"/>
+                </a:srgbClr>
+              </a:solidFill>
+              <a:ln w="9000" cap="rnd">
+                <a:solidFill>
+                  <a:srgbClr val="9B30FF">
+                    <a:alpha val="100000"/>
+                  </a:srgbClr>
+                </a:solidFill>
+                <a:prstDash val="solid"/>
+                <a:round/>
+              </a:ln>
+            </p:spPr>
+            <p:txBody>
+              <a:bodyPr/>
+              <a:lstStyle/>
+              <a:p>
+                <a:endParaRPr/>
+              </a:p>
+            </p:txBody>
+          </p:sp>
+          <p:sp>
+            <p:nvSpPr>
+              <p:cNvPr id="32" name="pt32"/>
+              <p:cNvSpPr/>
+              <p:nvPr/>
+            </p:nvSpPr>
+            <p:spPr>
+              <a:xfrm>
+                <a:off x="2270982" y="2893918"/>
+                <a:ext cx="63202" cy="63202"/>
+              </a:xfrm>
+              <a:prstGeom prst="ellipse">
+                <a:avLst/>
+              </a:prstGeom>
+              <a:solidFill>
+                <a:srgbClr val="00EEEE">
+                  <a:alpha val="100000"/>
+                </a:srgbClr>
+              </a:solidFill>
+              <a:ln w="9000" cap="rnd">
+                <a:solidFill>
+                  <a:srgbClr val="00EEEE">
+                    <a:alpha val="100000"/>
+                  </a:srgbClr>
+                </a:solidFill>
+                <a:prstDash val="solid"/>
+                <a:round/>
+              </a:ln>
+            </p:spPr>
+            <p:txBody>
+              <a:bodyPr/>
+              <a:lstStyle/>
+              <a:p>
+                <a:endParaRPr/>
+              </a:p>
+            </p:txBody>
+          </p:sp>
+          <p:sp>
+            <p:nvSpPr>
+              <p:cNvPr id="33" name="pt33"/>
+              <p:cNvSpPr/>
+              <p:nvPr/>
+            </p:nvSpPr>
+            <p:spPr>
+              <a:xfrm>
+                <a:off x="2794573" y="1876374"/>
+                <a:ext cx="63202" cy="63202"/>
+              </a:xfrm>
+              <a:prstGeom prst="ellipse">
+                <a:avLst/>
+              </a:prstGeom>
+              <a:solidFill>
+                <a:srgbClr val="9B30FF">
+                  <a:alpha val="100000"/>
+                </a:srgbClr>
+              </a:solidFill>
+              <a:ln w="9000" cap="rnd">
+                <a:solidFill>
+                  <a:srgbClr val="9B30FF">
+                    <a:alpha val="100000"/>
+                  </a:srgbClr>
+                </a:solidFill>
+                <a:prstDash val="solid"/>
+                <a:round/>
+              </a:ln>
+            </p:spPr>
+            <p:txBody>
+              <a:bodyPr/>
+              <a:lstStyle/>
+              <a:p>
+                <a:endParaRPr/>
+              </a:p>
+            </p:txBody>
+          </p:sp>
+          <p:sp>
+            <p:nvSpPr>
+              <p:cNvPr id="34" name="pt34"/>
+              <p:cNvSpPr/>
+              <p:nvPr/>
+            </p:nvSpPr>
+            <p:spPr>
+              <a:xfrm>
+                <a:off x="1971678" y="2947739"/>
+                <a:ext cx="63202" cy="63202"/>
+              </a:xfrm>
+              <a:prstGeom prst="ellipse">
+                <a:avLst/>
+              </a:prstGeom>
+              <a:solidFill>
+                <a:srgbClr val="00EEEE">
+                  <a:alpha val="100000"/>
+                </a:srgbClr>
+              </a:solidFill>
+              <a:ln w="9000" cap="rnd">
+                <a:solidFill>
+                  <a:srgbClr val="00EEEE">
+                    <a:alpha val="100000"/>
+                  </a:srgbClr>
+                </a:solidFill>
+                <a:prstDash val="solid"/>
+                <a:round/>
+              </a:ln>
+            </p:spPr>
+            <p:txBody>
+              <a:bodyPr/>
+              <a:lstStyle/>
+              <a:p>
+                <a:endParaRPr/>
+              </a:p>
+            </p:txBody>
+          </p:sp>
+          <p:sp>
+            <p:nvSpPr>
+              <p:cNvPr id="35" name="pt35"/>
+              <p:cNvSpPr/>
+              <p:nvPr/>
+            </p:nvSpPr>
+            <p:spPr>
+              <a:xfrm>
+                <a:off x="2674797" y="2222481"/>
+                <a:ext cx="63202" cy="63202"/>
+              </a:xfrm>
+              <a:prstGeom prst="ellipse">
+                <a:avLst/>
+              </a:prstGeom>
+              <a:solidFill>
+                <a:srgbClr val="9B30FF">
+                  <a:alpha val="100000"/>
+                </a:srgbClr>
+              </a:solidFill>
+              <a:ln w="9000" cap="rnd">
+                <a:solidFill>
+                  <a:srgbClr val="9B30FF">
+                    <a:alpha val="100000"/>
+                  </a:srgbClr>
+                </a:solidFill>
+                <a:prstDash val="solid"/>
+                <a:round/>
+              </a:ln>
+            </p:spPr>
+            <p:txBody>
+              <a:bodyPr/>
+              <a:lstStyle/>
+              <a:p>
+                <a:endParaRPr/>
+              </a:p>
+            </p:txBody>
+          </p:sp>
+          <p:sp>
+            <p:nvSpPr>
+              <p:cNvPr id="36" name="pt36"/>
+              <p:cNvSpPr/>
+              <p:nvPr/>
+            </p:nvSpPr>
+            <p:spPr>
+              <a:xfrm>
+                <a:off x="2538824" y="2919568"/>
+                <a:ext cx="63202" cy="63202"/>
+              </a:xfrm>
+              <a:prstGeom prst="ellipse">
+                <a:avLst/>
+              </a:prstGeom>
+              <a:solidFill>
+                <a:srgbClr val="008B8B">
+                  <a:alpha val="100000"/>
+                </a:srgbClr>
+              </a:solidFill>
+              <a:ln w="9000" cap="rnd">
+                <a:solidFill>
+                  <a:srgbClr val="008B8B">
+                    <a:alpha val="100000"/>
+                  </a:srgbClr>
+                </a:solidFill>
+                <a:prstDash val="solid"/>
+                <a:round/>
+              </a:ln>
+            </p:spPr>
+            <p:txBody>
+              <a:bodyPr/>
+              <a:lstStyle/>
+              <a:p>
+                <a:endParaRPr/>
+              </a:p>
+            </p:txBody>
+          </p:sp>
+          <p:sp>
+            <p:nvSpPr>
+              <p:cNvPr id="37" name="pt37"/>
+              <p:cNvSpPr/>
+              <p:nvPr/>
+            </p:nvSpPr>
+            <p:spPr>
+              <a:xfrm>
+                <a:off x="2616558" y="2372249"/>
+                <a:ext cx="63202" cy="63202"/>
+              </a:xfrm>
+              <a:prstGeom prst="ellipse">
+                <a:avLst/>
+              </a:prstGeom>
+              <a:solidFill>
+                <a:srgbClr val="551A8B">
+                  <a:alpha val="100000"/>
+                </a:srgbClr>
+              </a:solidFill>
+              <a:ln w="9000" cap="rnd">
+                <a:solidFill>
+                  <a:srgbClr val="551A8B">
+                    <a:alpha val="100000"/>
+                  </a:srgbClr>
+                </a:solidFill>
+                <a:prstDash val="solid"/>
+                <a:round/>
+              </a:ln>
+            </p:spPr>
+            <p:txBody>
+              <a:bodyPr/>
+              <a:lstStyle/>
+              <a:p>
+                <a:endParaRPr/>
+              </a:p>
+            </p:txBody>
+          </p:sp>
+          <p:sp>
+            <p:nvSpPr>
+              <p:cNvPr id="38" name="pt38"/>
+              <p:cNvSpPr/>
+              <p:nvPr/>
+            </p:nvSpPr>
+            <p:spPr>
+              <a:xfrm>
+                <a:off x="2464085" y="2698761"/>
+                <a:ext cx="63202" cy="63202"/>
+              </a:xfrm>
+              <a:prstGeom prst="ellipse">
+                <a:avLst/>
+              </a:prstGeom>
+              <a:solidFill>
+                <a:srgbClr val="00EEEE">
+                  <a:alpha val="100000"/>
+                </a:srgbClr>
+              </a:solidFill>
+              <a:ln w="9000" cap="rnd">
+                <a:solidFill>
+                  <a:srgbClr val="00EEEE">
+                    <a:alpha val="100000"/>
+                  </a:srgbClr>
+                </a:solidFill>
+                <a:prstDash val="solid"/>
+                <a:round/>
+              </a:ln>
+            </p:spPr>
+            <p:txBody>
+              <a:bodyPr/>
+              <a:lstStyle/>
+              <a:p>
+                <a:endParaRPr/>
+              </a:p>
+            </p:txBody>
+          </p:sp>
+          <p:sp>
+            <p:nvSpPr>
+              <p:cNvPr id="39" name="pt39"/>
+              <p:cNvSpPr/>
+              <p:nvPr/>
+            </p:nvSpPr>
+            <p:spPr>
+              <a:xfrm>
+                <a:off x="2594021" y="1958082"/>
+                <a:ext cx="63202" cy="63202"/>
+              </a:xfrm>
+              <a:prstGeom prst="ellipse">
+                <a:avLst/>
+              </a:prstGeom>
+              <a:solidFill>
+                <a:srgbClr val="9B30FF">
+                  <a:alpha val="100000"/>
+                </a:srgbClr>
+              </a:solidFill>
+              <a:ln w="9000" cap="rnd">
+                <a:solidFill>
+                  <a:srgbClr val="9B30FF">
+                    <a:alpha val="100000"/>
+                  </a:srgbClr>
+                </a:solidFill>
+                <a:prstDash val="solid"/>
+                <a:round/>
+              </a:ln>
+            </p:spPr>
+            <p:txBody>
+              <a:bodyPr/>
+              <a:lstStyle/>
+              <a:p>
+                <a:endParaRPr/>
+              </a:p>
+            </p:txBody>
+          </p:sp>
+          <p:sp>
+            <p:nvSpPr>
+              <p:cNvPr id="40" name="pt40"/>
+              <p:cNvSpPr/>
+              <p:nvPr/>
+            </p:nvSpPr>
+            <p:spPr>
+              <a:xfrm>
+                <a:off x="1731401" y="1985040"/>
+                <a:ext cx="63202" cy="63202"/>
+              </a:xfrm>
+              <a:prstGeom prst="ellipse">
+                <a:avLst/>
+              </a:prstGeom>
+              <a:solidFill>
+                <a:srgbClr val="00EEEE">
+                  <a:alpha val="100000"/>
+                </a:srgbClr>
+              </a:solidFill>
+              <a:ln w="9000" cap="rnd">
+                <a:solidFill>
+                  <a:srgbClr val="00EEEE">
+                    <a:alpha val="100000"/>
+                  </a:srgbClr>
+                </a:solidFill>
+                <a:prstDash val="solid"/>
+                <a:round/>
+              </a:ln>
+            </p:spPr>
+            <p:txBody>
+              <a:bodyPr/>
+              <a:lstStyle/>
+              <a:p>
+                <a:endParaRPr/>
+              </a:p>
+            </p:txBody>
+          </p:sp>
+          <p:sp>
+            <p:nvSpPr>
+              <p:cNvPr id="41" name="pt41"/>
+              <p:cNvSpPr/>
+              <p:nvPr/>
+            </p:nvSpPr>
+            <p:spPr>
+              <a:xfrm>
+                <a:off x="2768373" y="1823591"/>
+                <a:ext cx="63202" cy="63202"/>
+              </a:xfrm>
+              <a:prstGeom prst="ellipse">
+                <a:avLst/>
+              </a:prstGeom>
+              <a:solidFill>
+                <a:srgbClr val="9B30FF">
+                  <a:alpha val="100000"/>
+                </a:srgbClr>
+              </a:solidFill>
+              <a:ln w="9000" cap="rnd">
+                <a:solidFill>
+                  <a:srgbClr val="9B30FF">
+                    <a:alpha val="100000"/>
+                  </a:srgbClr>
+                </a:solidFill>
+                <a:prstDash val="solid"/>
+                <a:round/>
+              </a:ln>
+            </p:spPr>
+            <p:txBody>
+              <a:bodyPr/>
+              <a:lstStyle/>
+              <a:p>
+                <a:endParaRPr/>
+              </a:p>
+            </p:txBody>
+          </p:sp>
+          <p:sp>
+            <p:nvSpPr>
+              <p:cNvPr id="42" name="pt42"/>
+              <p:cNvSpPr/>
+              <p:nvPr/>
+            </p:nvSpPr>
+            <p:spPr>
+              <a:xfrm>
+                <a:off x="2285171" y="2893803"/>
+                <a:ext cx="63202" cy="63202"/>
+              </a:xfrm>
+              <a:prstGeom prst="ellipse">
+                <a:avLst/>
+              </a:prstGeom>
+              <a:solidFill>
+                <a:srgbClr val="00EEEE">
+                  <a:alpha val="100000"/>
+                </a:srgbClr>
+              </a:solidFill>
+              <a:ln w="9000" cap="rnd">
+                <a:solidFill>
+                  <a:srgbClr val="00EEEE">
+                    <a:alpha val="100000"/>
+                  </a:srgbClr>
+                </a:solidFill>
+                <a:prstDash val="solid"/>
+                <a:round/>
+              </a:ln>
+            </p:spPr>
+            <p:txBody>
+              <a:bodyPr/>
+              <a:lstStyle/>
+              <a:p>
+                <a:endParaRPr/>
+              </a:p>
+            </p:txBody>
+          </p:sp>
+          <p:sp>
+            <p:nvSpPr>
+              <p:cNvPr id="43" name="pt43"/>
+              <p:cNvSpPr/>
+              <p:nvPr/>
+            </p:nvSpPr>
+            <p:spPr>
+              <a:xfrm>
+                <a:off x="2608090" y="2468721"/>
+                <a:ext cx="63202" cy="63202"/>
+              </a:xfrm>
+              <a:prstGeom prst="ellipse">
+                <a:avLst/>
+              </a:prstGeom>
+              <a:solidFill>
+                <a:srgbClr val="9B30FF">
+                  <a:alpha val="100000"/>
+                </a:srgbClr>
+              </a:solidFill>
+              <a:ln w="9000" cap="rnd">
+                <a:solidFill>
+                  <a:srgbClr val="9B30FF">
+                    <a:alpha val="100000"/>
+                  </a:srgbClr>
+                </a:solidFill>
+                <a:prstDash val="solid"/>
+                <a:round/>
+              </a:ln>
+            </p:spPr>
+            <p:txBody>
+              <a:bodyPr/>
+              <a:lstStyle/>
+              <a:p>
+                <a:endParaRPr/>
+              </a:p>
+            </p:txBody>
+          </p:sp>
+          <p:sp>
+            <p:nvSpPr>
+              <p:cNvPr id="44" name="pt44"/>
+              <p:cNvSpPr/>
+              <p:nvPr/>
+            </p:nvSpPr>
+            <p:spPr>
+              <a:xfrm>
+                <a:off x="2257425" y="2338344"/>
+                <a:ext cx="63202" cy="63202"/>
+              </a:xfrm>
+              <a:prstGeom prst="ellipse">
+                <a:avLst/>
+              </a:prstGeom>
+              <a:solidFill>
+                <a:srgbClr val="00EEEE">
+                  <a:alpha val="100000"/>
+                </a:srgbClr>
+              </a:solidFill>
+              <a:ln w="9000" cap="rnd">
+                <a:solidFill>
+                  <a:srgbClr val="00EEEE">
+                    <a:alpha val="100000"/>
+                  </a:srgbClr>
+                </a:solidFill>
+                <a:prstDash val="solid"/>
+                <a:round/>
+              </a:ln>
+            </p:spPr>
+            <p:txBody>
+              <a:bodyPr/>
+              <a:lstStyle/>
+              <a:p>
+                <a:endParaRPr/>
+              </a:p>
+            </p:txBody>
+          </p:sp>
+          <p:sp>
+            <p:nvSpPr>
+              <p:cNvPr id="45" name="pt45"/>
+              <p:cNvSpPr/>
+              <p:nvPr/>
+            </p:nvSpPr>
+            <p:spPr>
+              <a:xfrm>
+                <a:off x="2653973" y="1622657"/>
+                <a:ext cx="63202" cy="63202"/>
+              </a:xfrm>
+              <a:prstGeom prst="ellipse">
+                <a:avLst/>
+              </a:prstGeom>
+              <a:solidFill>
+                <a:srgbClr val="9B30FF">
+                  <a:alpha val="100000"/>
+                </a:srgbClr>
+              </a:solidFill>
+              <a:ln w="9000" cap="rnd">
+                <a:solidFill>
+                  <a:srgbClr val="9B30FF">
+                    <a:alpha val="100000"/>
+                  </a:srgbClr>
+                </a:solidFill>
+                <a:prstDash val="solid"/>
+                <a:round/>
+              </a:ln>
+            </p:spPr>
+            <p:txBody>
+              <a:bodyPr/>
+              <a:lstStyle/>
+              <a:p>
+                <a:endParaRPr/>
+              </a:p>
+            </p:txBody>
+          </p:sp>
+          <p:sp>
+            <p:nvSpPr>
+              <p:cNvPr id="46" name="pt46"/>
+              <p:cNvSpPr/>
+              <p:nvPr/>
+            </p:nvSpPr>
+            <p:spPr>
+              <a:xfrm>
+                <a:off x="1584000" y="2174543"/>
+                <a:ext cx="63202" cy="63202"/>
+              </a:xfrm>
+              <a:prstGeom prst="ellipse">
+                <a:avLst/>
+              </a:prstGeom>
+              <a:solidFill>
+                <a:srgbClr val="00EEEE">
+                  <a:alpha val="100000"/>
+                </a:srgbClr>
+              </a:solidFill>
+              <a:ln w="9000" cap="rnd">
+                <a:solidFill>
+                  <a:srgbClr val="00EEEE">
+                    <a:alpha val="100000"/>
+                  </a:srgbClr>
+                </a:solidFill>
+                <a:prstDash val="solid"/>
+                <a:round/>
+              </a:ln>
+            </p:spPr>
+            <p:txBody>
+              <a:bodyPr/>
+              <a:lstStyle/>
+              <a:p>
+                <a:endParaRPr/>
+              </a:p>
+            </p:txBody>
+          </p:sp>
+          <p:sp>
+            <p:nvSpPr>
+              <p:cNvPr id="47" name="pt47"/>
+              <p:cNvSpPr/>
+              <p:nvPr/>
+            </p:nvSpPr>
+            <p:spPr>
+              <a:xfrm>
+                <a:off x="2793011" y="1846470"/>
+                <a:ext cx="63202" cy="63202"/>
+              </a:xfrm>
+              <a:prstGeom prst="ellipse">
+                <a:avLst/>
+              </a:prstGeom>
+              <a:solidFill>
+                <a:srgbClr val="9B30FF">
+                  <a:alpha val="100000"/>
+                </a:srgbClr>
+              </a:solidFill>
+              <a:ln w="9000" cap="rnd">
+                <a:solidFill>
+                  <a:srgbClr val="9B30FF">
+                    <a:alpha val="100000"/>
+                  </a:srgbClr>
+                </a:solidFill>
+                <a:prstDash val="solid"/>
+                <a:round/>
+              </a:ln>
+            </p:spPr>
+            <p:txBody>
+              <a:bodyPr/>
+              <a:lstStyle/>
+              <a:p>
+                <a:endParaRPr/>
+              </a:p>
+            </p:txBody>
+          </p:sp>
+          <p:sp>
+            <p:nvSpPr>
+              <p:cNvPr id="48" name="pt48"/>
+              <p:cNvSpPr/>
+              <p:nvPr/>
+            </p:nvSpPr>
+            <p:spPr>
+              <a:xfrm>
+                <a:off x="2458168" y="2744477"/>
+                <a:ext cx="63202" cy="63202"/>
+              </a:xfrm>
+              <a:prstGeom prst="ellipse">
+                <a:avLst/>
+              </a:prstGeom>
+              <a:solidFill>
+                <a:srgbClr val="00EEEE">
+                  <a:alpha val="100000"/>
+                </a:srgbClr>
+              </a:solidFill>
+              <a:ln w="9000" cap="rnd">
+                <a:solidFill>
+                  <a:srgbClr val="00EEEE">
+                    <a:alpha val="100000"/>
+                  </a:srgbClr>
+                </a:solidFill>
+                <a:prstDash val="solid"/>
+                <a:round/>
+              </a:ln>
+            </p:spPr>
+            <p:txBody>
+              <a:bodyPr/>
+              <a:lstStyle/>
+              <a:p>
+                <a:endParaRPr/>
+              </a:p>
+            </p:txBody>
+          </p:sp>
+          <p:sp>
+            <p:nvSpPr>
+              <p:cNvPr id="49" name="pt49"/>
+              <p:cNvSpPr/>
+              <p:nvPr/>
+            </p:nvSpPr>
+            <p:spPr>
+              <a:xfrm>
+                <a:off x="2614068" y="2538367"/>
+                <a:ext cx="63202" cy="63202"/>
+              </a:xfrm>
+              <a:prstGeom prst="ellipse">
+                <a:avLst/>
+              </a:prstGeom>
+              <a:solidFill>
+                <a:srgbClr val="9B30FF">
+                  <a:alpha val="100000"/>
+                </a:srgbClr>
+              </a:solidFill>
+              <a:ln w="9000" cap="rnd">
+                <a:solidFill>
+                  <a:srgbClr val="9B30FF">
+                    <a:alpha val="100000"/>
+                  </a:srgbClr>
+                </a:solidFill>
+                <a:prstDash val="solid"/>
+                <a:round/>
+              </a:ln>
+            </p:spPr>
+            <p:txBody>
+              <a:bodyPr/>
+              <a:lstStyle/>
+              <a:p>
+                <a:endParaRPr/>
+              </a:p>
+            </p:txBody>
+          </p:sp>
+          <p:sp>
+            <p:nvSpPr>
+              <p:cNvPr id="50" name="pt50"/>
+              <p:cNvSpPr/>
+              <p:nvPr/>
+            </p:nvSpPr>
+            <p:spPr>
+              <a:xfrm>
+                <a:off x="2453764" y="3132866"/>
+                <a:ext cx="63202" cy="63202"/>
+              </a:xfrm>
+              <a:prstGeom prst="ellipse">
+                <a:avLst/>
+              </a:prstGeom>
+              <a:solidFill>
+                <a:srgbClr val="008B8B">
+                  <a:alpha val="100000"/>
+                </a:srgbClr>
+              </a:solidFill>
+              <a:ln w="9000" cap="rnd">
+                <a:solidFill>
+                  <a:srgbClr val="008B8B">
+                    <a:alpha val="100000"/>
+                  </a:srgbClr>
+                </a:solidFill>
+                <a:prstDash val="solid"/>
+                <a:round/>
+              </a:ln>
+            </p:spPr>
+            <p:txBody>
+              <a:bodyPr/>
+              <a:lstStyle/>
+              <a:p>
+                <a:endParaRPr/>
+              </a:p>
+            </p:txBody>
+          </p:sp>
+          <p:sp>
+            <p:nvSpPr>
+              <p:cNvPr id="51" name="pt51"/>
+              <p:cNvSpPr/>
+              <p:nvPr/>
+            </p:nvSpPr>
+            <p:spPr>
+              <a:xfrm>
+                <a:off x="2519660" y="2693790"/>
+                <a:ext cx="63202" cy="63202"/>
+              </a:xfrm>
+              <a:prstGeom prst="ellipse">
+                <a:avLst/>
+              </a:prstGeom>
+              <a:solidFill>
+                <a:srgbClr val="551A8B">
+                  <a:alpha val="100000"/>
+                </a:srgbClr>
+              </a:solidFill>
+              <a:ln w="9000" cap="rnd">
+                <a:solidFill>
+                  <a:srgbClr val="551A8B">
+                    <a:alpha val="100000"/>
+                  </a:srgbClr>
+                </a:solidFill>
+                <a:prstDash val="solid"/>
+                <a:round/>
+              </a:ln>
+            </p:spPr>
+            <p:txBody>
+              <a:bodyPr/>
+              <a:lstStyle/>
+              <a:p>
+                <a:endParaRPr/>
+              </a:p>
+            </p:txBody>
+          </p:sp>
+          <p:sp>
+            <p:nvSpPr>
+              <p:cNvPr id="52" name="pt52"/>
+              <p:cNvSpPr/>
+              <p:nvPr/>
+            </p:nvSpPr>
+            <p:spPr>
+              <a:xfrm>
+                <a:off x="2537711" y="2916091"/>
+                <a:ext cx="63202" cy="63202"/>
+              </a:xfrm>
+              <a:prstGeom prst="ellipse">
+                <a:avLst/>
+              </a:prstGeom>
+              <a:solidFill>
+                <a:srgbClr val="008B8B">
+                  <a:alpha val="100000"/>
+                </a:srgbClr>
+              </a:solidFill>
+              <a:ln w="9000" cap="rnd">
+                <a:solidFill>
+                  <a:srgbClr val="008B8B">
+                    <a:alpha val="100000"/>
+                  </a:srgbClr>
+                </a:solidFill>
+                <a:prstDash val="solid"/>
+                <a:round/>
+              </a:ln>
+            </p:spPr>
+            <p:txBody>
+              <a:bodyPr/>
+              <a:lstStyle/>
+              <a:p>
+                <a:endParaRPr/>
+              </a:p>
+            </p:txBody>
+          </p:sp>
+          <p:sp>
+            <p:nvSpPr>
+              <p:cNvPr id="53" name="pt53"/>
+              <p:cNvSpPr/>
+              <p:nvPr/>
+            </p:nvSpPr>
+            <p:spPr>
+              <a:xfrm>
+                <a:off x="2613197" y="2224916"/>
+                <a:ext cx="63202" cy="63202"/>
+              </a:xfrm>
+              <a:prstGeom prst="ellipse">
+                <a:avLst/>
+              </a:prstGeom>
+              <a:solidFill>
+                <a:srgbClr val="551A8B">
+                  <a:alpha val="100000"/>
+                </a:srgbClr>
+              </a:solidFill>
+              <a:ln w="9000" cap="rnd">
+                <a:solidFill>
+                  <a:srgbClr val="551A8B">
+                    <a:alpha val="100000"/>
+                  </a:srgbClr>
+                </a:solidFill>
+                <a:prstDash val="solid"/>
+                <a:round/>
+              </a:ln>
+            </p:spPr>
+            <p:txBody>
+              <a:bodyPr/>
+              <a:lstStyle/>
+              <a:p>
+                <a:endParaRPr/>
+              </a:p>
+            </p:txBody>
+          </p:sp>
+          <p:sp>
+            <p:nvSpPr>
+              <p:cNvPr id="54" name="pt54"/>
+              <p:cNvSpPr/>
+              <p:nvPr/>
+            </p:nvSpPr>
+            <p:spPr>
+              <a:xfrm>
+                <a:off x="2352192" y="2767052"/>
+                <a:ext cx="63202" cy="63202"/>
+              </a:xfrm>
+              <a:prstGeom prst="ellipse">
+                <a:avLst/>
+              </a:prstGeom>
+              <a:solidFill>
+                <a:srgbClr val="00EEEE">
+                  <a:alpha val="100000"/>
+                </a:srgbClr>
+              </a:solidFill>
+              <a:ln w="9000" cap="rnd">
+                <a:solidFill>
+                  <a:srgbClr val="00EEEE">
+                    <a:alpha val="100000"/>
+                  </a:srgbClr>
+                </a:solidFill>
+                <a:prstDash val="solid"/>
+                <a:round/>
+              </a:ln>
+            </p:spPr>
+            <p:txBody>
+              <a:bodyPr/>
+              <a:lstStyle/>
+              <a:p>
+                <a:endParaRPr/>
+              </a:p>
+            </p:txBody>
+          </p:sp>
+          <p:sp>
+            <p:nvSpPr>
+              <p:cNvPr id="55" name="pt55"/>
+              <p:cNvSpPr/>
+              <p:nvPr/>
+            </p:nvSpPr>
+            <p:spPr>
+              <a:xfrm>
+                <a:off x="2729223" y="1949962"/>
+                <a:ext cx="63202" cy="63202"/>
+              </a:xfrm>
+              <a:prstGeom prst="ellipse">
+                <a:avLst/>
+              </a:prstGeom>
+              <a:solidFill>
+                <a:srgbClr val="9B30FF">
+                  <a:alpha val="100000"/>
+                </a:srgbClr>
+              </a:solidFill>
+              <a:ln w="9000" cap="rnd">
+                <a:solidFill>
+                  <a:srgbClr val="9B30FF">
+                    <a:alpha val="100000"/>
+                  </a:srgbClr>
+                </a:solidFill>
+                <a:prstDash val="solid"/>
+                <a:round/>
+              </a:ln>
+            </p:spPr>
+            <p:txBody>
+              <a:bodyPr/>
+              <a:lstStyle/>
+              <a:p>
+                <a:endParaRPr/>
+              </a:p>
+            </p:txBody>
+          </p:sp>
+          <p:sp>
+            <p:nvSpPr>
+              <p:cNvPr id="56" name="pt56"/>
+              <p:cNvSpPr/>
+              <p:nvPr/>
+            </p:nvSpPr>
+            <p:spPr>
+              <a:xfrm>
+                <a:off x="2492574" y="2923191"/>
+                <a:ext cx="63202" cy="63202"/>
+              </a:xfrm>
+              <a:prstGeom prst="ellipse">
+                <a:avLst/>
+              </a:prstGeom>
+              <a:solidFill>
+                <a:srgbClr val="008B8B">
+                  <a:alpha val="100000"/>
+                </a:srgbClr>
+              </a:solidFill>
+              <a:ln w="9000" cap="rnd">
+                <a:solidFill>
+                  <a:srgbClr val="008B8B">
+                    <a:alpha val="100000"/>
+                  </a:srgbClr>
+                </a:solidFill>
+                <a:prstDash val="solid"/>
+                <a:round/>
+              </a:ln>
+            </p:spPr>
+            <p:txBody>
+              <a:bodyPr/>
+              <a:lstStyle/>
+              <a:p>
+                <a:endParaRPr/>
+              </a:p>
+            </p:txBody>
+          </p:sp>
+          <p:sp>
+            <p:nvSpPr>
+              <p:cNvPr id="57" name="pt57"/>
+              <p:cNvSpPr/>
+              <p:nvPr/>
+            </p:nvSpPr>
+            <p:spPr>
+              <a:xfrm>
+                <a:off x="2597546" y="2195985"/>
+                <a:ext cx="63202" cy="63202"/>
+              </a:xfrm>
+              <a:prstGeom prst="ellipse">
+                <a:avLst/>
+              </a:prstGeom>
+              <a:solidFill>
+                <a:srgbClr val="551A8B">
+                  <a:alpha val="100000"/>
+                </a:srgbClr>
+              </a:solidFill>
+              <a:ln w="9000" cap="rnd">
+                <a:solidFill>
+                  <a:srgbClr val="551A8B">
+                    <a:alpha val="100000"/>
+                  </a:srgbClr>
+                </a:solidFill>
+                <a:prstDash val="solid"/>
+                <a:round/>
+              </a:ln>
+            </p:spPr>
+            <p:txBody>
+              <a:bodyPr/>
+              <a:lstStyle/>
+              <a:p>
+                <a:endParaRPr/>
+              </a:p>
+            </p:txBody>
+          </p:sp>
+          <p:sp>
+            <p:nvSpPr>
+              <p:cNvPr id="58" name="pt58"/>
+              <p:cNvSpPr/>
+              <p:nvPr/>
+            </p:nvSpPr>
+            <p:spPr>
+              <a:xfrm>
+                <a:off x="2540134" y="2896643"/>
+                <a:ext cx="63202" cy="63202"/>
+              </a:xfrm>
+              <a:prstGeom prst="ellipse">
+                <a:avLst/>
+              </a:prstGeom>
+              <a:solidFill>
+                <a:srgbClr val="00EEEE">
+                  <a:alpha val="100000"/>
+                </a:srgbClr>
+              </a:solidFill>
+              <a:ln w="9000" cap="rnd">
+                <a:solidFill>
+                  <a:srgbClr val="00EEEE">
+                    <a:alpha val="100000"/>
+                  </a:srgbClr>
+                </a:solidFill>
+                <a:prstDash val="solid"/>
+                <a:round/>
+              </a:ln>
+            </p:spPr>
+            <p:txBody>
+              <a:bodyPr/>
+              <a:lstStyle/>
+              <a:p>
+                <a:endParaRPr/>
+              </a:p>
+            </p:txBody>
+          </p:sp>
+          <p:sp>
+            <p:nvSpPr>
+              <p:cNvPr id="59" name="pt59"/>
+              <p:cNvSpPr/>
+              <p:nvPr/>
+            </p:nvSpPr>
+            <p:spPr>
+              <a:xfrm>
+                <a:off x="2744093" y="1886625"/>
+                <a:ext cx="63202" cy="63202"/>
+              </a:xfrm>
+              <a:prstGeom prst="ellipse">
+                <a:avLst/>
+              </a:prstGeom>
+              <a:solidFill>
+                <a:srgbClr val="9B30FF">
+                  <a:alpha val="100000"/>
+                </a:srgbClr>
+              </a:solidFill>
+              <a:ln w="9000" cap="rnd">
+                <a:solidFill>
+                  <a:srgbClr val="9B30FF">
+                    <a:alpha val="100000"/>
+                  </a:srgbClr>
+                </a:solidFill>
+                <a:prstDash val="solid"/>
+                <a:round/>
+              </a:ln>
+            </p:spPr>
+            <p:txBody>
+              <a:bodyPr/>
+              <a:lstStyle/>
+              <a:p>
+                <a:endParaRPr/>
+              </a:p>
+            </p:txBody>
+          </p:sp>
+          <p:sp>
+            <p:nvSpPr>
+              <p:cNvPr id="60" name="pt60"/>
+              <p:cNvSpPr/>
+              <p:nvPr/>
+            </p:nvSpPr>
+            <p:spPr>
+              <a:xfrm>
+                <a:off x="2378419" y="2654990"/>
+                <a:ext cx="63202" cy="63202"/>
+              </a:xfrm>
+              <a:prstGeom prst="ellipse">
+                <a:avLst/>
+              </a:prstGeom>
+              <a:solidFill>
+                <a:srgbClr val="00EEEE">
+                  <a:alpha val="100000"/>
+                </a:srgbClr>
+              </a:solidFill>
+              <a:ln w="9000" cap="rnd">
+                <a:solidFill>
+                  <a:srgbClr val="00EEEE">
+                    <a:alpha val="100000"/>
+                  </a:srgbClr>
+                </a:solidFill>
+                <a:prstDash val="solid"/>
+                <a:round/>
+              </a:ln>
+            </p:spPr>
+            <p:txBody>
+              <a:bodyPr/>
+              <a:lstStyle/>
+              <a:p>
+                <a:endParaRPr/>
+              </a:p>
+            </p:txBody>
+          </p:sp>
+          <p:sp>
+            <p:nvSpPr>
+              <p:cNvPr id="61" name="pt61"/>
+              <p:cNvSpPr/>
+              <p:nvPr/>
+            </p:nvSpPr>
+            <p:spPr>
+              <a:xfrm>
+                <a:off x="2633451" y="2001913"/>
+                <a:ext cx="63202" cy="63202"/>
+              </a:xfrm>
+              <a:prstGeom prst="ellipse">
+                <a:avLst/>
+              </a:prstGeom>
+              <a:solidFill>
+                <a:srgbClr val="9B30FF">
+                  <a:alpha val="100000"/>
+                </a:srgbClr>
+              </a:solidFill>
+              <a:ln w="9000" cap="rnd">
+                <a:solidFill>
+                  <a:srgbClr val="9B30FF">
+                    <a:alpha val="100000"/>
+                  </a:srgbClr>
+                </a:solidFill>
+                <a:prstDash val="solid"/>
+                <a:round/>
+              </a:ln>
+            </p:spPr>
+            <p:txBody>
+              <a:bodyPr/>
+              <a:lstStyle/>
+              <a:p>
+                <a:endParaRPr/>
+              </a:p>
+            </p:txBody>
+          </p:sp>
+          <p:sp>
+            <p:nvSpPr>
+              <p:cNvPr id="62" name="pt62"/>
+              <p:cNvSpPr/>
+              <p:nvPr/>
+            </p:nvSpPr>
+            <p:spPr>
+              <a:xfrm>
+                <a:off x="2589461" y="2521801"/>
+                <a:ext cx="63202" cy="63202"/>
+              </a:xfrm>
+              <a:prstGeom prst="ellipse">
+                <a:avLst/>
+              </a:prstGeom>
+              <a:solidFill>
+                <a:srgbClr val="00EEEE">
+                  <a:alpha val="100000"/>
+                </a:srgbClr>
+              </a:solidFill>
+              <a:ln w="9000" cap="rnd">
+                <a:solidFill>
+                  <a:srgbClr val="00EEEE">
+                    <a:alpha val="100000"/>
+                  </a:srgbClr>
+                </a:solidFill>
+                <a:prstDash val="solid"/>
+                <a:round/>
+              </a:ln>
+            </p:spPr>
+            <p:txBody>
+              <a:bodyPr/>
+              <a:lstStyle/>
+              <a:p>
+                <a:endParaRPr/>
+              </a:p>
+            </p:txBody>
+          </p:sp>
+          <p:sp>
+            <p:nvSpPr>
+              <p:cNvPr id="63" name="pt63"/>
+              <p:cNvSpPr/>
+              <p:nvPr/>
+            </p:nvSpPr>
+            <p:spPr>
+              <a:xfrm>
+                <a:off x="2486157" y="2390891"/>
+                <a:ext cx="63202" cy="63202"/>
+              </a:xfrm>
+              <a:prstGeom prst="ellipse">
+                <a:avLst/>
+              </a:prstGeom>
+              <a:solidFill>
+                <a:srgbClr val="9B30FF">
+                  <a:alpha val="100000"/>
+                </a:srgbClr>
+              </a:solidFill>
+              <a:ln w="9000" cap="rnd">
+                <a:solidFill>
+                  <a:srgbClr val="9B30FF">
+                    <a:alpha val="100000"/>
+                  </a:srgbClr>
+                </a:solidFill>
+                <a:prstDash val="solid"/>
+                <a:round/>
+              </a:ln>
+            </p:spPr>
+            <p:txBody>
+              <a:bodyPr/>
+              <a:lstStyle/>
+              <a:p>
+                <a:endParaRPr/>
+              </a:p>
+            </p:txBody>
+          </p:sp>
+          <p:sp>
+            <p:nvSpPr>
+              <p:cNvPr id="64" name="pt64"/>
+              <p:cNvSpPr/>
+              <p:nvPr/>
+            </p:nvSpPr>
+            <p:spPr>
+              <a:xfrm>
+                <a:off x="1734923" y="2291609"/>
+                <a:ext cx="63202" cy="63202"/>
+              </a:xfrm>
+              <a:prstGeom prst="ellipse">
+                <a:avLst/>
+              </a:prstGeom>
+              <a:solidFill>
+                <a:srgbClr val="00EEEE">
+                  <a:alpha val="100000"/>
+                </a:srgbClr>
+              </a:solidFill>
+              <a:ln w="9000" cap="rnd">
+                <a:solidFill>
+                  <a:srgbClr val="00EEEE">
+                    <a:alpha val="100000"/>
+                  </a:srgbClr>
+                </a:solidFill>
+                <a:prstDash val="solid"/>
+                <a:round/>
+              </a:ln>
+            </p:spPr>
+            <p:txBody>
+              <a:bodyPr/>
+              <a:lstStyle/>
+              <a:p>
+                <a:endParaRPr/>
+              </a:p>
+            </p:txBody>
+          </p:sp>
+          <p:sp>
+            <p:nvSpPr>
+              <p:cNvPr id="65" name="pt65"/>
+              <p:cNvSpPr/>
+              <p:nvPr/>
+            </p:nvSpPr>
+            <p:spPr>
+              <a:xfrm>
+                <a:off x="2811587" y="1811363"/>
+                <a:ext cx="63202" cy="63202"/>
+              </a:xfrm>
+              <a:prstGeom prst="ellipse">
+                <a:avLst/>
+              </a:prstGeom>
+              <a:solidFill>
+                <a:srgbClr val="9B30FF">
+                  <a:alpha val="100000"/>
+                </a:srgbClr>
+              </a:solidFill>
+              <a:ln w="9000" cap="rnd">
+                <a:solidFill>
+                  <a:srgbClr val="9B30FF">
+                    <a:alpha val="100000"/>
+                  </a:srgbClr>
+                </a:solidFill>
+                <a:prstDash val="solid"/>
+                <a:round/>
+              </a:ln>
+            </p:spPr>
+            <p:txBody>
+              <a:bodyPr/>
+              <a:lstStyle/>
+              <a:p>
+                <a:endParaRPr/>
+              </a:p>
+            </p:txBody>
+          </p:sp>
+          <p:sp>
+            <p:nvSpPr>
+              <p:cNvPr id="66" name="pt66"/>
+              <p:cNvSpPr/>
+              <p:nvPr/>
+            </p:nvSpPr>
+            <p:spPr>
+              <a:xfrm>
+                <a:off x="2473027" y="2994701"/>
+                <a:ext cx="63202" cy="63202"/>
+              </a:xfrm>
+              <a:prstGeom prst="ellipse">
+                <a:avLst/>
+              </a:prstGeom>
+              <a:solidFill>
+                <a:srgbClr val="00EEEE">
+                  <a:alpha val="100000"/>
+                </a:srgbClr>
+              </a:solidFill>
+              <a:ln w="9000" cap="rnd">
+                <a:solidFill>
+                  <a:srgbClr val="00EEEE">
+                    <a:alpha val="100000"/>
+                  </a:srgbClr>
+                </a:solidFill>
+                <a:prstDash val="solid"/>
+                <a:round/>
+              </a:ln>
+            </p:spPr>
+            <p:txBody>
+              <a:bodyPr/>
+              <a:lstStyle/>
+              <a:p>
+                <a:endParaRPr/>
+              </a:p>
+            </p:txBody>
+          </p:sp>
+          <p:sp>
+            <p:nvSpPr>
+              <p:cNvPr id="67" name="rc67"/>
+              <p:cNvSpPr/>
+              <p:nvPr/>
+            </p:nvSpPr>
+            <p:spPr>
+              <a:xfrm>
+                <a:off x="1465736" y="1208751"/>
+                <a:ext cx="1443045" cy="2048845"/>
+              </a:xfrm>
+              <a:prstGeom prst="rect">
+                <a:avLst/>
+              </a:prstGeom>
+              <a:noFill/>
+              <a:ln w="13550" cap="rnd">
+                <a:solidFill>
+                  <a:srgbClr val="333333">
+                    <a:alpha val="100000"/>
+                  </a:srgbClr>
+                </a:solidFill>
+                <a:prstDash val="solid"/>
+                <a:round/>
+              </a:ln>
+            </p:spPr>
+            <p:txBody>
+              <a:bodyPr/>
+              <a:lstStyle/>
+              <a:p>
+                <a:endParaRPr/>
+              </a:p>
+            </p:txBody>
+          </p:sp>
+          <p:sp>
+            <p:nvSpPr>
+              <p:cNvPr id="68" name="tx68"/>
+              <p:cNvSpPr/>
+              <p:nvPr/>
+            </p:nvSpPr>
+            <p:spPr>
+              <a:xfrm>
+                <a:off x="1148262" y="3044098"/>
+                <a:ext cx="254843" cy="80010"/>
+              </a:xfrm>
+              <a:prstGeom prst="rect">
+                <a:avLst/>
+              </a:prstGeom>
+              <a:noFill/>
+            </p:spPr>
+            <p:txBody>
+              <a:bodyPr wrap="none" lIns="0" tIns="0" rIns="0" bIns="0" anchor="ctr" anchorCtr="1"/>
+              <a:lstStyle/>
+              <a:p>
+                <a:pPr marL="0" marR="0" indent="0" algn="l">
+                  <a:spcBef>
+                    <a:spcPts val="0"/>
+                  </a:spcBef>
+                  <a:spcAft>
+                    <a:spcPts val="0"/>
+                  </a:spcAft>
+                </a:pPr>
+                <a:r>
+                  <a:rPr sz="2000" b="0" i="0">
+                    <a:solidFill>
+                      <a:srgbClr val="4D4D4D">
+                        <a:alpha val="100000"/>
+                      </a:srgbClr>
+                    </a:solidFill>
+                    <a:latin typeface="Arial"/>
+                    <a:cs typeface="Arial"/>
+                  </a:rPr>
+                  <a:t>-0.05</a:t>
+                </a:r>
+              </a:p>
+            </p:txBody>
+          </p:sp>
+          <p:sp>
+            <p:nvSpPr>
+              <p:cNvPr id="69" name="tx69"/>
+              <p:cNvSpPr/>
+              <p:nvPr/>
+            </p:nvSpPr>
+            <p:spPr>
+              <a:xfrm>
+                <a:off x="1185478" y="2342872"/>
+                <a:ext cx="217627" cy="80010"/>
+              </a:xfrm>
+              <a:prstGeom prst="rect">
+                <a:avLst/>
+              </a:prstGeom>
+              <a:noFill/>
+            </p:spPr>
+            <p:txBody>
+              <a:bodyPr wrap="none" lIns="0" tIns="0" rIns="0" bIns="0" anchor="ctr" anchorCtr="1"/>
+              <a:lstStyle/>
+              <a:p>
+                <a:pPr marL="0" marR="0" indent="0" algn="l">
+                  <a:spcBef>
+                    <a:spcPts val="0"/>
+                  </a:spcBef>
+                  <a:spcAft>
+                    <a:spcPts val="0"/>
+                  </a:spcAft>
+                </a:pPr>
+                <a:r>
+                  <a:rPr sz="2000" b="0" i="0">
+                    <a:solidFill>
+                      <a:srgbClr val="4D4D4D">
+                        <a:alpha val="100000"/>
+                      </a:srgbClr>
+                    </a:solidFill>
+                    <a:latin typeface="Arial"/>
+                    <a:cs typeface="Arial"/>
+                  </a:rPr>
+                  <a:t>0.00</a:t>
+                </a:r>
+              </a:p>
+            </p:txBody>
+          </p:sp>
+          <p:sp>
+            <p:nvSpPr>
+              <p:cNvPr id="70" name="tx70"/>
+              <p:cNvSpPr/>
+              <p:nvPr/>
+            </p:nvSpPr>
+            <p:spPr>
+              <a:xfrm>
+                <a:off x="1185478" y="1641645"/>
+                <a:ext cx="217627" cy="80010"/>
+              </a:xfrm>
+              <a:prstGeom prst="rect">
+                <a:avLst/>
+              </a:prstGeom>
+              <a:noFill/>
+            </p:spPr>
+            <p:txBody>
+              <a:bodyPr wrap="none" lIns="0" tIns="0" rIns="0" bIns="0" anchor="ctr" anchorCtr="1"/>
+              <a:lstStyle/>
+              <a:p>
+                <a:pPr marL="0" marR="0" indent="0" algn="l">
+                  <a:spcBef>
+                    <a:spcPts val="0"/>
+                  </a:spcBef>
+                  <a:spcAft>
+                    <a:spcPts val="0"/>
+                  </a:spcAft>
+                </a:pPr>
+                <a:r>
+                  <a:rPr sz="2000" b="0" i="0" dirty="0">
+                    <a:solidFill>
+                      <a:srgbClr val="4D4D4D">
+                        <a:alpha val="100000"/>
+                      </a:srgbClr>
+                    </a:solidFill>
+                    <a:latin typeface="Arial"/>
+                    <a:cs typeface="Arial"/>
+                  </a:rPr>
+                  <a:t>0.05</a:t>
+                </a:r>
+              </a:p>
+            </p:txBody>
+          </p:sp>
+          <p:sp>
+            <p:nvSpPr>
+              <p:cNvPr id="71" name="pl71"/>
+              <p:cNvSpPr/>
+              <p:nvPr/>
+            </p:nvSpPr>
+            <p:spPr>
+              <a:xfrm>
+                <a:off x="1430941" y="3084103"/>
+                <a:ext cx="34794" cy="0"/>
+              </a:xfrm>
+              <a:custGeom>
+                <a:avLst/>
+                <a:gdLst/>
+                <a:ahLst/>
+                <a:cxnLst/>
+                <a:rect l="0" t="0" r="0" b="0"/>
+                <a:pathLst>
+                  <a:path w="34794">
+                    <a:moveTo>
+                      <a:pt x="0" y="0"/>
+                    </a:moveTo>
+                    <a:lnTo>
+                      <a:pt x="34794" y="0"/>
+                    </a:lnTo>
+                  </a:path>
+                </a:pathLst>
+              </a:custGeom>
+              <a:ln w="13550" cap="flat">
+                <a:solidFill>
+                  <a:srgbClr val="333333">
+                    <a:alpha val="100000"/>
+                  </a:srgbClr>
+                </a:solidFill>
+                <a:prstDash val="solid"/>
+                <a:round/>
+              </a:ln>
+            </p:spPr>
+            <p:txBody>
+              <a:bodyPr/>
+              <a:lstStyle/>
+              <a:p>
+                <a:endParaRPr/>
+              </a:p>
+            </p:txBody>
+          </p:sp>
+          <p:sp>
+            <p:nvSpPr>
+              <p:cNvPr id="72" name="pl72"/>
+              <p:cNvSpPr/>
+              <p:nvPr/>
+            </p:nvSpPr>
+            <p:spPr>
+              <a:xfrm>
+                <a:off x="1430941" y="2382877"/>
+                <a:ext cx="34794" cy="0"/>
+              </a:xfrm>
+              <a:custGeom>
+                <a:avLst/>
+                <a:gdLst/>
+                <a:ahLst/>
+                <a:cxnLst/>
+                <a:rect l="0" t="0" r="0" b="0"/>
+                <a:pathLst>
+                  <a:path w="34794">
+                    <a:moveTo>
+                      <a:pt x="0" y="0"/>
+                    </a:moveTo>
+                    <a:lnTo>
+                      <a:pt x="34794" y="0"/>
+                    </a:lnTo>
+                  </a:path>
+                </a:pathLst>
+              </a:custGeom>
+              <a:ln w="13550" cap="flat">
+                <a:solidFill>
+                  <a:srgbClr val="333333">
+                    <a:alpha val="100000"/>
+                  </a:srgbClr>
+                </a:solidFill>
+                <a:prstDash val="solid"/>
+                <a:round/>
+              </a:ln>
+            </p:spPr>
+            <p:txBody>
+              <a:bodyPr/>
+              <a:lstStyle/>
+              <a:p>
+                <a:endParaRPr/>
+              </a:p>
+            </p:txBody>
+          </p:sp>
+          <p:sp>
+            <p:nvSpPr>
+              <p:cNvPr id="73" name="pl73"/>
+              <p:cNvSpPr/>
+              <p:nvPr/>
+            </p:nvSpPr>
+            <p:spPr>
+              <a:xfrm>
+                <a:off x="1430941" y="1681650"/>
+                <a:ext cx="34794" cy="0"/>
+              </a:xfrm>
+              <a:custGeom>
+                <a:avLst/>
+                <a:gdLst/>
+                <a:ahLst/>
+                <a:cxnLst/>
+                <a:rect l="0" t="0" r="0" b="0"/>
+                <a:pathLst>
+                  <a:path w="34794">
+                    <a:moveTo>
+                      <a:pt x="0" y="0"/>
+                    </a:moveTo>
+                    <a:lnTo>
+                      <a:pt x="34794" y="0"/>
+                    </a:lnTo>
+                  </a:path>
+                </a:pathLst>
+              </a:custGeom>
+              <a:ln w="13550" cap="flat">
+                <a:solidFill>
+                  <a:srgbClr val="333333">
+                    <a:alpha val="100000"/>
+                  </a:srgbClr>
+                </a:solidFill>
+                <a:prstDash val="solid"/>
+                <a:round/>
+              </a:ln>
+            </p:spPr>
+            <p:txBody>
+              <a:bodyPr/>
+              <a:lstStyle/>
+              <a:p>
+                <a:endParaRPr/>
+              </a:p>
+            </p:txBody>
+          </p:sp>
+          <p:sp>
+            <p:nvSpPr>
+              <p:cNvPr id="74" name="pl74"/>
+              <p:cNvSpPr/>
+              <p:nvPr/>
+            </p:nvSpPr>
+            <p:spPr>
+              <a:xfrm>
+                <a:off x="1952066" y="3257597"/>
+                <a:ext cx="0" cy="34794"/>
+              </a:xfrm>
+              <a:custGeom>
+                <a:avLst/>
+                <a:gdLst/>
+                <a:ahLst/>
+                <a:cxnLst/>
+                <a:rect l="0" t="0" r="0" b="0"/>
+                <a:pathLst>
+                  <a:path h="34794">
+                    <a:moveTo>
+                      <a:pt x="0" y="34794"/>
+                    </a:moveTo>
+                    <a:lnTo>
+                      <a:pt x="0" y="0"/>
+                    </a:lnTo>
+                  </a:path>
+                </a:pathLst>
+              </a:custGeom>
+              <a:ln w="13550" cap="flat">
+                <a:solidFill>
+                  <a:srgbClr val="333333">
+                    <a:alpha val="100000"/>
+                  </a:srgbClr>
+                </a:solidFill>
+                <a:prstDash val="solid"/>
+                <a:round/>
+              </a:ln>
+            </p:spPr>
+            <p:txBody>
+              <a:bodyPr/>
+              <a:lstStyle/>
+              <a:p>
+                <a:endParaRPr/>
+              </a:p>
+            </p:txBody>
+          </p:sp>
+          <p:sp>
+            <p:nvSpPr>
+              <p:cNvPr id="75" name="pl75"/>
+              <p:cNvSpPr/>
+              <p:nvPr/>
+            </p:nvSpPr>
+            <p:spPr>
+              <a:xfrm>
+                <a:off x="2470256" y="3257597"/>
+                <a:ext cx="0" cy="34794"/>
+              </a:xfrm>
+              <a:custGeom>
+                <a:avLst/>
+                <a:gdLst/>
+                <a:ahLst/>
+                <a:cxnLst/>
+                <a:rect l="0" t="0" r="0" b="0"/>
+                <a:pathLst>
+                  <a:path h="34794">
+                    <a:moveTo>
+                      <a:pt x="0" y="34794"/>
+                    </a:moveTo>
+                    <a:lnTo>
+                      <a:pt x="0" y="0"/>
+                    </a:lnTo>
+                  </a:path>
+                </a:pathLst>
+              </a:custGeom>
+              <a:ln w="13550" cap="flat">
+                <a:solidFill>
+                  <a:srgbClr val="333333">
+                    <a:alpha val="100000"/>
+                  </a:srgbClr>
+                </a:solidFill>
+                <a:prstDash val="solid"/>
+                <a:round/>
+              </a:ln>
+            </p:spPr>
+            <p:txBody>
+              <a:bodyPr/>
+              <a:lstStyle/>
+              <a:p>
+                <a:endParaRPr/>
+              </a:p>
+            </p:txBody>
+          </p:sp>
+          <p:sp>
+            <p:nvSpPr>
+              <p:cNvPr id="76" name="tx76"/>
+              <p:cNvSpPr/>
+              <p:nvPr/>
+            </p:nvSpPr>
+            <p:spPr>
+              <a:xfrm>
+                <a:off x="1855734" y="3320227"/>
+                <a:ext cx="192664" cy="80010"/>
+              </a:xfrm>
+              <a:prstGeom prst="rect">
+                <a:avLst/>
+              </a:prstGeom>
+              <a:noFill/>
+            </p:spPr>
+            <p:txBody>
+              <a:bodyPr wrap="none" lIns="0" tIns="0" rIns="0" bIns="0" anchor="ctr" anchorCtr="1"/>
+              <a:lstStyle/>
+              <a:p>
+                <a:pPr marL="0" marR="0" indent="0" algn="l">
+                  <a:spcBef>
+                    <a:spcPts val="0"/>
+                  </a:spcBef>
+                  <a:spcAft>
+                    <a:spcPts val="0"/>
+                  </a:spcAft>
+                </a:pPr>
+                <a:r>
+                  <a:rPr sz="2000" b="0" i="0">
+                    <a:solidFill>
+                      <a:srgbClr val="4D4D4D">
+                        <a:alpha val="100000"/>
+                      </a:srgbClr>
+                    </a:solidFill>
+                    <a:latin typeface="Arial"/>
+                    <a:cs typeface="Arial"/>
+                  </a:rPr>
+                  <a:t>-0.1</a:t>
+                </a:r>
+              </a:p>
+            </p:txBody>
+          </p:sp>
+          <p:sp>
+            <p:nvSpPr>
+              <p:cNvPr id="77" name="tx77"/>
+              <p:cNvSpPr/>
+              <p:nvPr/>
+            </p:nvSpPr>
+            <p:spPr>
+              <a:xfrm>
+                <a:off x="2392532" y="3320227"/>
+                <a:ext cx="155448" cy="80010"/>
+              </a:xfrm>
+              <a:prstGeom prst="rect">
+                <a:avLst/>
+              </a:prstGeom>
+              <a:noFill/>
+            </p:spPr>
+            <p:txBody>
+              <a:bodyPr wrap="none" lIns="0" tIns="0" rIns="0" bIns="0" anchor="ctr" anchorCtr="1"/>
+              <a:lstStyle/>
+              <a:p>
+                <a:pPr marL="0" marR="0" indent="0" algn="l">
+                  <a:spcBef>
+                    <a:spcPts val="0"/>
+                  </a:spcBef>
+                  <a:spcAft>
+                    <a:spcPts val="0"/>
+                  </a:spcAft>
+                </a:pPr>
+                <a:r>
+                  <a:rPr sz="2000" b="0" i="0">
+                    <a:solidFill>
+                      <a:srgbClr val="4D4D4D">
+                        <a:alpha val="100000"/>
+                      </a:srgbClr>
+                    </a:solidFill>
+                    <a:latin typeface="Arial"/>
+                    <a:cs typeface="Arial"/>
+                  </a:rPr>
+                  <a:t>0.0</a:t>
+                </a:r>
+              </a:p>
+            </p:txBody>
+          </p:sp>
+          <p:sp>
+            <p:nvSpPr>
+              <p:cNvPr id="78" name="tx78"/>
+              <p:cNvSpPr/>
+              <p:nvPr/>
+            </p:nvSpPr>
+            <p:spPr>
+              <a:xfrm>
+                <a:off x="1950337" y="3458531"/>
+                <a:ext cx="473842" cy="100035"/>
+              </a:xfrm>
+              <a:prstGeom prst="rect">
+                <a:avLst/>
+              </a:prstGeom>
+              <a:noFill/>
+            </p:spPr>
+            <p:txBody>
+              <a:bodyPr wrap="none" lIns="0" tIns="0" rIns="0" bIns="0" anchor="ctr" anchorCtr="1"/>
+              <a:lstStyle/>
+              <a:p>
+                <a:pPr marL="0" marR="0" indent="0" algn="l">
+                  <a:spcBef>
+                    <a:spcPts val="0"/>
+                  </a:spcBef>
+                  <a:spcAft>
+                    <a:spcPts val="0"/>
+                  </a:spcAft>
+                </a:pPr>
+                <a:r>
+                  <a:rPr sz="2400" b="1" i="0">
+                    <a:solidFill>
+                      <a:srgbClr val="000000">
+                        <a:alpha val="100000"/>
+                      </a:srgbClr>
+                    </a:solidFill>
+                    <a:latin typeface="Arial"/>
+                    <a:cs typeface="Arial"/>
+                  </a:rPr>
+                  <a:t>PCoA 1</a:t>
+                </a:r>
+              </a:p>
+            </p:txBody>
+          </p:sp>
+          <p:sp>
+            <p:nvSpPr>
+              <p:cNvPr id="79" name="tx79"/>
+              <p:cNvSpPr/>
+              <p:nvPr/>
+            </p:nvSpPr>
+            <p:spPr>
+              <a:xfrm rot="-5400000">
+                <a:off x="797085" y="2183156"/>
+                <a:ext cx="473842" cy="100035"/>
+              </a:xfrm>
+              <a:prstGeom prst="rect">
+                <a:avLst/>
+              </a:prstGeom>
+              <a:noFill/>
+            </p:spPr>
+            <p:txBody>
+              <a:bodyPr wrap="none" lIns="0" tIns="0" rIns="0" bIns="0" anchor="ctr" anchorCtr="1"/>
+              <a:lstStyle/>
+              <a:p>
+                <a:pPr marL="0" marR="0" indent="0" algn="l">
+                  <a:spcBef>
+                    <a:spcPts val="0"/>
+                  </a:spcBef>
+                  <a:spcAft>
+                    <a:spcPts val="0"/>
+                  </a:spcAft>
+                </a:pPr>
+                <a:r>
+                  <a:rPr sz="2400" b="1" i="0" dirty="0">
+                    <a:solidFill>
+                      <a:srgbClr val="000000">
+                        <a:alpha val="100000"/>
+                      </a:srgbClr>
+                    </a:solidFill>
+                    <a:latin typeface="Arial"/>
+                    <a:cs typeface="Arial"/>
+                  </a:rPr>
+                  <a:t>PCoA 2</a:t>
+                </a:r>
+              </a:p>
+            </p:txBody>
+          </p:sp>
+        </p:grpSp>
         <p:sp>
           <p:nvSpPr>
-            <p:cNvPr id="3" name="rc3"/>
+            <p:cNvPr id="100" name="tx97">
+              <a:extLst>
+                <a:ext uri="{FF2B5EF4-FFF2-40B4-BE49-F238E27FC236}">
+                  <a16:creationId xmlns:a16="http://schemas.microsoft.com/office/drawing/2014/main" id="{0BC7470D-A812-3F6A-6580-4EB779E17535}"/>
+                </a:ext>
+              </a:extLst>
+            </p:cNvPr>
             <p:cNvSpPr/>
             <p:nvPr/>
           </p:nvSpPr>
           <p:spPr>
             <a:xfrm>
-              <a:off x="914400" y="914400"/>
-              <a:ext cx="3657600" cy="2743200"/>
-            </a:xfrm>
-            <a:prstGeom prst="rect">
-              <a:avLst/>
-            </a:prstGeom>
-            <a:solidFill>
-              <a:srgbClr val="FFFFFF">
-                <a:alpha val="100000"/>
-              </a:srgbClr>
-            </a:solidFill>
-            <a:ln w="9525" cap="rnd">
-              <a:solidFill>
-                <a:srgbClr val="FFFFFF">
-                  <a:alpha val="100000"/>
-                </a:srgbClr>
-              </a:solidFill>
-              <a:prstDash val="solid"/>
-              <a:round/>
-            </a:ln>
-          </p:spPr>
-          <p:txBody>
-            <a:bodyPr/>
-            <a:lstStyle/>
-            <a:p>
-              <a:endParaRPr/>
-            </a:p>
-          </p:txBody>
-        </p:sp>
-        <p:sp>
-          <p:nvSpPr>
-            <p:cNvPr id="4" name="rc4"/>
-            <p:cNvSpPr/>
-            <p:nvPr/>
-          </p:nvSpPr>
-          <p:spPr>
-            <a:xfrm>
-              <a:off x="914400" y="914400"/>
-              <a:ext cx="3657600" cy="2743200"/>
-            </a:xfrm>
-            <a:prstGeom prst="rect">
-              <a:avLst/>
-            </a:prstGeom>
-            <a:solidFill>
-              <a:srgbClr val="FFFFFF">
-                <a:alpha val="100000"/>
-              </a:srgbClr>
-            </a:solidFill>
-            <a:ln w="13550" cap="rnd">
-              <a:solidFill>
-                <a:srgbClr val="FFFFFF">
-                  <a:alpha val="100000"/>
-                </a:srgbClr>
-              </a:solidFill>
-              <a:prstDash val="solid"/>
-              <a:round/>
-            </a:ln>
-          </p:spPr>
-          <p:txBody>
-            <a:bodyPr/>
-            <a:lstStyle/>
-            <a:p>
-              <a:endParaRPr/>
-            </a:p>
-          </p:txBody>
-        </p:sp>
-        <p:sp>
-          <p:nvSpPr>
-            <p:cNvPr id="5" name="rc5"/>
-            <p:cNvSpPr/>
-            <p:nvPr/>
-          </p:nvSpPr>
-          <p:spPr>
-            <a:xfrm>
-              <a:off x="1465736" y="1208751"/>
-              <a:ext cx="1443045" cy="2048845"/>
-            </a:xfrm>
-            <a:prstGeom prst="rect">
-              <a:avLst/>
-            </a:prstGeom>
-            <a:solidFill>
-              <a:srgbClr val="FFFFFF">
-                <a:alpha val="100000"/>
-              </a:srgbClr>
-            </a:solidFill>
-          </p:spPr>
-          <p:txBody>
-            <a:bodyPr/>
-            <a:lstStyle/>
-            <a:p>
-              <a:endParaRPr/>
-            </a:p>
-          </p:txBody>
-        </p:sp>
-        <p:sp>
-          <p:nvSpPr>
-            <p:cNvPr id="6" name="pl6"/>
-            <p:cNvSpPr/>
-            <p:nvPr/>
-          </p:nvSpPr>
-          <p:spPr>
-            <a:xfrm>
-              <a:off x="1465736" y="2733490"/>
-              <a:ext cx="1443045" cy="0"/>
-            </a:xfrm>
-            <a:custGeom>
-              <a:avLst/>
-              <a:gdLst/>
-              <a:ahLst/>
-              <a:cxnLst/>
-              <a:rect l="0" t="0" r="0" b="0"/>
-              <a:pathLst>
-                <a:path w="1443045">
-                  <a:moveTo>
-                    <a:pt x="0" y="0"/>
-                  </a:moveTo>
-                  <a:lnTo>
-                    <a:pt x="1443045" y="0"/>
-                  </a:lnTo>
-                  <a:lnTo>
-                    <a:pt x="1443045" y="0"/>
-                  </a:lnTo>
-                </a:path>
-              </a:pathLst>
-            </a:custGeom>
-            <a:ln w="6775" cap="flat">
-              <a:solidFill>
-                <a:srgbClr val="EBEBEB">
-                  <a:alpha val="100000"/>
-                </a:srgbClr>
-              </a:solidFill>
-              <a:prstDash val="solid"/>
-              <a:round/>
-            </a:ln>
-          </p:spPr>
-          <p:txBody>
-            <a:bodyPr/>
-            <a:lstStyle/>
-            <a:p>
-              <a:endParaRPr/>
-            </a:p>
-          </p:txBody>
-        </p:sp>
-        <p:sp>
-          <p:nvSpPr>
-            <p:cNvPr id="7" name="pl7"/>
-            <p:cNvSpPr/>
-            <p:nvPr/>
-          </p:nvSpPr>
-          <p:spPr>
-            <a:xfrm>
-              <a:off x="1465736" y="2032263"/>
-              <a:ext cx="1443045" cy="0"/>
-            </a:xfrm>
-            <a:custGeom>
-              <a:avLst/>
-              <a:gdLst/>
-              <a:ahLst/>
-              <a:cxnLst/>
-              <a:rect l="0" t="0" r="0" b="0"/>
-              <a:pathLst>
-                <a:path w="1443045">
-                  <a:moveTo>
-                    <a:pt x="0" y="0"/>
-                  </a:moveTo>
-                  <a:lnTo>
-                    <a:pt x="1443045" y="0"/>
-                  </a:lnTo>
-                  <a:lnTo>
-                    <a:pt x="1443045" y="0"/>
-                  </a:lnTo>
-                </a:path>
-              </a:pathLst>
-            </a:custGeom>
-            <a:ln w="6775" cap="flat">
-              <a:solidFill>
-                <a:srgbClr val="EBEBEB">
-                  <a:alpha val="100000"/>
-                </a:srgbClr>
-              </a:solidFill>
-              <a:prstDash val="solid"/>
-              <a:round/>
-            </a:ln>
-          </p:spPr>
-          <p:txBody>
-            <a:bodyPr/>
-            <a:lstStyle/>
-            <a:p>
-              <a:endParaRPr/>
-            </a:p>
-          </p:txBody>
-        </p:sp>
-        <p:sp>
-          <p:nvSpPr>
-            <p:cNvPr id="8" name="pl8"/>
-            <p:cNvSpPr/>
-            <p:nvPr/>
-          </p:nvSpPr>
-          <p:spPr>
-            <a:xfrm>
-              <a:off x="1465736" y="1331037"/>
-              <a:ext cx="1443045" cy="0"/>
-            </a:xfrm>
-            <a:custGeom>
-              <a:avLst/>
-              <a:gdLst/>
-              <a:ahLst/>
-              <a:cxnLst/>
-              <a:rect l="0" t="0" r="0" b="0"/>
-              <a:pathLst>
-                <a:path w="1443045">
-                  <a:moveTo>
-                    <a:pt x="0" y="0"/>
-                  </a:moveTo>
-                  <a:lnTo>
-                    <a:pt x="1443045" y="0"/>
-                  </a:lnTo>
-                  <a:lnTo>
-                    <a:pt x="1443045" y="0"/>
-                  </a:lnTo>
-                </a:path>
-              </a:pathLst>
-            </a:custGeom>
-            <a:ln w="6775" cap="flat">
-              <a:solidFill>
-                <a:srgbClr val="EBEBEB">
-                  <a:alpha val="100000"/>
-                </a:srgbClr>
-              </a:solidFill>
-              <a:prstDash val="solid"/>
-              <a:round/>
-            </a:ln>
-          </p:spPr>
-          <p:txBody>
-            <a:bodyPr/>
-            <a:lstStyle/>
-            <a:p>
-              <a:endParaRPr/>
-            </a:p>
-          </p:txBody>
-        </p:sp>
-        <p:sp>
-          <p:nvSpPr>
-            <p:cNvPr id="9" name="pl9"/>
-            <p:cNvSpPr/>
-            <p:nvPr/>
-          </p:nvSpPr>
-          <p:spPr>
-            <a:xfrm>
-              <a:off x="1692970" y="1208751"/>
-              <a:ext cx="0" cy="2048845"/>
-            </a:xfrm>
-            <a:custGeom>
-              <a:avLst/>
-              <a:gdLst/>
-              <a:ahLst/>
-              <a:cxnLst/>
-              <a:rect l="0" t="0" r="0" b="0"/>
-              <a:pathLst>
-                <a:path h="2048845">
-                  <a:moveTo>
-                    <a:pt x="0" y="2048845"/>
-                  </a:moveTo>
-                  <a:lnTo>
-                    <a:pt x="0" y="0"/>
-                  </a:lnTo>
-                  <a:lnTo>
-                    <a:pt x="0" y="0"/>
-                  </a:lnTo>
-                </a:path>
-              </a:pathLst>
-            </a:custGeom>
-            <a:ln w="6775" cap="flat">
-              <a:solidFill>
-                <a:srgbClr val="EBEBEB">
-                  <a:alpha val="100000"/>
-                </a:srgbClr>
-              </a:solidFill>
-              <a:prstDash val="solid"/>
-              <a:round/>
-            </a:ln>
-          </p:spPr>
-          <p:txBody>
-            <a:bodyPr/>
-            <a:lstStyle/>
-            <a:p>
-              <a:endParaRPr/>
-            </a:p>
-          </p:txBody>
-        </p:sp>
-        <p:sp>
-          <p:nvSpPr>
-            <p:cNvPr id="10" name="pl10"/>
-            <p:cNvSpPr/>
-            <p:nvPr/>
-          </p:nvSpPr>
-          <p:spPr>
-            <a:xfrm>
-              <a:off x="2211161" y="1208751"/>
-              <a:ext cx="0" cy="2048845"/>
-            </a:xfrm>
-            <a:custGeom>
-              <a:avLst/>
-              <a:gdLst/>
-              <a:ahLst/>
-              <a:cxnLst/>
-              <a:rect l="0" t="0" r="0" b="0"/>
-              <a:pathLst>
-                <a:path h="2048845">
-                  <a:moveTo>
-                    <a:pt x="0" y="2048845"/>
-                  </a:moveTo>
-                  <a:lnTo>
-                    <a:pt x="0" y="0"/>
-                  </a:lnTo>
-                  <a:lnTo>
-                    <a:pt x="0" y="0"/>
-                  </a:lnTo>
-                </a:path>
-              </a:pathLst>
-            </a:custGeom>
-            <a:ln w="6775" cap="flat">
-              <a:solidFill>
-                <a:srgbClr val="EBEBEB">
-                  <a:alpha val="100000"/>
-                </a:srgbClr>
-              </a:solidFill>
-              <a:prstDash val="solid"/>
-              <a:round/>
-            </a:ln>
-          </p:spPr>
-          <p:txBody>
-            <a:bodyPr/>
-            <a:lstStyle/>
-            <a:p>
-              <a:endParaRPr/>
-            </a:p>
-          </p:txBody>
-        </p:sp>
-        <p:sp>
-          <p:nvSpPr>
-            <p:cNvPr id="11" name="pl11"/>
-            <p:cNvSpPr/>
-            <p:nvPr/>
-          </p:nvSpPr>
-          <p:spPr>
-            <a:xfrm>
-              <a:off x="2729352" y="1208751"/>
-              <a:ext cx="0" cy="2048845"/>
-            </a:xfrm>
-            <a:custGeom>
-              <a:avLst/>
-              <a:gdLst/>
-              <a:ahLst/>
-              <a:cxnLst/>
-              <a:rect l="0" t="0" r="0" b="0"/>
-              <a:pathLst>
-                <a:path h="2048845">
-                  <a:moveTo>
-                    <a:pt x="0" y="2048845"/>
-                  </a:moveTo>
-                  <a:lnTo>
-                    <a:pt x="0" y="0"/>
-                  </a:lnTo>
-                  <a:lnTo>
-                    <a:pt x="0" y="0"/>
-                  </a:lnTo>
-                </a:path>
-              </a:pathLst>
-            </a:custGeom>
-            <a:ln w="6775" cap="flat">
-              <a:solidFill>
-                <a:srgbClr val="EBEBEB">
-                  <a:alpha val="100000"/>
-                </a:srgbClr>
-              </a:solidFill>
-              <a:prstDash val="solid"/>
-              <a:round/>
-            </a:ln>
-          </p:spPr>
-          <p:txBody>
-            <a:bodyPr/>
-            <a:lstStyle/>
-            <a:p>
-              <a:endParaRPr/>
-            </a:p>
-          </p:txBody>
-        </p:sp>
-        <p:sp>
-          <p:nvSpPr>
-            <p:cNvPr id="12" name="pl12"/>
-            <p:cNvSpPr/>
-            <p:nvPr/>
-          </p:nvSpPr>
-          <p:spPr>
-            <a:xfrm>
-              <a:off x="1465736" y="3084103"/>
-              <a:ext cx="1443045" cy="0"/>
-            </a:xfrm>
-            <a:custGeom>
-              <a:avLst/>
-              <a:gdLst/>
-              <a:ahLst/>
-              <a:cxnLst/>
-              <a:rect l="0" t="0" r="0" b="0"/>
-              <a:pathLst>
-                <a:path w="1443045">
-                  <a:moveTo>
-                    <a:pt x="0" y="0"/>
-                  </a:moveTo>
-                  <a:lnTo>
-                    <a:pt x="1443045" y="0"/>
-                  </a:lnTo>
-                  <a:lnTo>
-                    <a:pt x="1443045" y="0"/>
-                  </a:lnTo>
-                </a:path>
-              </a:pathLst>
-            </a:custGeom>
-            <a:ln w="13550" cap="flat">
-              <a:solidFill>
-                <a:srgbClr val="EBEBEB">
-                  <a:alpha val="100000"/>
-                </a:srgbClr>
-              </a:solidFill>
-              <a:prstDash val="solid"/>
-              <a:round/>
-            </a:ln>
-          </p:spPr>
-          <p:txBody>
-            <a:bodyPr/>
-            <a:lstStyle/>
-            <a:p>
-              <a:endParaRPr/>
-            </a:p>
-          </p:txBody>
-        </p:sp>
-        <p:sp>
-          <p:nvSpPr>
-            <p:cNvPr id="13" name="pl13"/>
-            <p:cNvSpPr/>
-            <p:nvPr/>
-          </p:nvSpPr>
-          <p:spPr>
-            <a:xfrm>
-              <a:off x="1465736" y="2382877"/>
-              <a:ext cx="1443045" cy="0"/>
-            </a:xfrm>
-            <a:custGeom>
-              <a:avLst/>
-              <a:gdLst/>
-              <a:ahLst/>
-              <a:cxnLst/>
-              <a:rect l="0" t="0" r="0" b="0"/>
-              <a:pathLst>
-                <a:path w="1443045">
-                  <a:moveTo>
-                    <a:pt x="0" y="0"/>
-                  </a:moveTo>
-                  <a:lnTo>
-                    <a:pt x="1443045" y="0"/>
-                  </a:lnTo>
-                  <a:lnTo>
-                    <a:pt x="1443045" y="0"/>
-                  </a:lnTo>
-                </a:path>
-              </a:pathLst>
-            </a:custGeom>
-            <a:ln w="13550" cap="flat">
-              <a:solidFill>
-                <a:srgbClr val="EBEBEB">
-                  <a:alpha val="100000"/>
-                </a:srgbClr>
-              </a:solidFill>
-              <a:prstDash val="solid"/>
-              <a:round/>
-            </a:ln>
-          </p:spPr>
-          <p:txBody>
-            <a:bodyPr/>
-            <a:lstStyle/>
-            <a:p>
-              <a:endParaRPr/>
-            </a:p>
-          </p:txBody>
-        </p:sp>
-        <p:sp>
-          <p:nvSpPr>
-            <p:cNvPr id="14" name="pl14"/>
-            <p:cNvSpPr/>
-            <p:nvPr/>
-          </p:nvSpPr>
-          <p:spPr>
-            <a:xfrm>
-              <a:off x="1465736" y="1681650"/>
-              <a:ext cx="1443045" cy="0"/>
-            </a:xfrm>
-            <a:custGeom>
-              <a:avLst/>
-              <a:gdLst/>
-              <a:ahLst/>
-              <a:cxnLst/>
-              <a:rect l="0" t="0" r="0" b="0"/>
-              <a:pathLst>
-                <a:path w="1443045">
-                  <a:moveTo>
-                    <a:pt x="0" y="0"/>
-                  </a:moveTo>
-                  <a:lnTo>
-                    <a:pt x="1443045" y="0"/>
-                  </a:lnTo>
-                  <a:lnTo>
-                    <a:pt x="1443045" y="0"/>
-                  </a:lnTo>
-                </a:path>
-              </a:pathLst>
-            </a:custGeom>
-            <a:ln w="13550" cap="flat">
-              <a:solidFill>
-                <a:srgbClr val="EBEBEB">
-                  <a:alpha val="100000"/>
-                </a:srgbClr>
-              </a:solidFill>
-              <a:prstDash val="solid"/>
-              <a:round/>
-            </a:ln>
-          </p:spPr>
-          <p:txBody>
-            <a:bodyPr/>
-            <a:lstStyle/>
-            <a:p>
-              <a:endParaRPr/>
-            </a:p>
-          </p:txBody>
-        </p:sp>
-        <p:sp>
-          <p:nvSpPr>
-            <p:cNvPr id="15" name="pl15"/>
-            <p:cNvSpPr/>
-            <p:nvPr/>
-          </p:nvSpPr>
-          <p:spPr>
-            <a:xfrm>
-              <a:off x="1952066" y="1208751"/>
-              <a:ext cx="0" cy="2048845"/>
-            </a:xfrm>
-            <a:custGeom>
-              <a:avLst/>
-              <a:gdLst/>
-              <a:ahLst/>
-              <a:cxnLst/>
-              <a:rect l="0" t="0" r="0" b="0"/>
-              <a:pathLst>
-                <a:path h="2048845">
-                  <a:moveTo>
-                    <a:pt x="0" y="2048845"/>
-                  </a:moveTo>
-                  <a:lnTo>
-                    <a:pt x="0" y="0"/>
-                  </a:lnTo>
-                  <a:lnTo>
-                    <a:pt x="0" y="0"/>
-                  </a:lnTo>
-                </a:path>
-              </a:pathLst>
-            </a:custGeom>
-            <a:ln w="13550" cap="flat">
-              <a:solidFill>
-                <a:srgbClr val="EBEBEB">
-                  <a:alpha val="100000"/>
-                </a:srgbClr>
-              </a:solidFill>
-              <a:prstDash val="solid"/>
-              <a:round/>
-            </a:ln>
-          </p:spPr>
-          <p:txBody>
-            <a:bodyPr/>
-            <a:lstStyle/>
-            <a:p>
-              <a:endParaRPr/>
-            </a:p>
-          </p:txBody>
-        </p:sp>
-        <p:sp>
-          <p:nvSpPr>
-            <p:cNvPr id="16" name="pl16"/>
-            <p:cNvSpPr/>
-            <p:nvPr/>
-          </p:nvSpPr>
-          <p:spPr>
-            <a:xfrm>
-              <a:off x="2470256" y="1208751"/>
-              <a:ext cx="0" cy="2048845"/>
-            </a:xfrm>
-            <a:custGeom>
-              <a:avLst/>
-              <a:gdLst/>
-              <a:ahLst/>
-              <a:cxnLst/>
-              <a:rect l="0" t="0" r="0" b="0"/>
-              <a:pathLst>
-                <a:path h="2048845">
-                  <a:moveTo>
-                    <a:pt x="0" y="2048845"/>
-                  </a:moveTo>
-                  <a:lnTo>
-                    <a:pt x="0" y="0"/>
-                  </a:lnTo>
-                  <a:lnTo>
-                    <a:pt x="0" y="0"/>
-                  </a:lnTo>
-                </a:path>
-              </a:pathLst>
-            </a:custGeom>
-            <a:ln w="13550" cap="flat">
-              <a:solidFill>
-                <a:srgbClr val="EBEBEB">
-                  <a:alpha val="100000"/>
-                </a:srgbClr>
-              </a:solidFill>
-              <a:prstDash val="solid"/>
-              <a:round/>
-            </a:ln>
-          </p:spPr>
-          <p:txBody>
-            <a:bodyPr/>
-            <a:lstStyle/>
-            <a:p>
-              <a:endParaRPr/>
-            </a:p>
-          </p:txBody>
-        </p:sp>
-        <p:sp>
-          <p:nvSpPr>
-            <p:cNvPr id="17" name="pg17"/>
-            <p:cNvSpPr/>
-            <p:nvPr/>
-          </p:nvSpPr>
-          <p:spPr>
-            <a:xfrm>
-              <a:off x="2485366" y="2947692"/>
-              <a:ext cx="85059" cy="216775"/>
-            </a:xfrm>
-            <a:custGeom>
-              <a:avLst/>
-              <a:gdLst/>
-              <a:ahLst/>
-              <a:cxnLst/>
-              <a:rect l="0" t="0" r="0" b="0"/>
-              <a:pathLst>
-                <a:path w="85059" h="216775">
-                  <a:moveTo>
-                    <a:pt x="0" y="216775"/>
-                  </a:moveTo>
-                  <a:lnTo>
-                    <a:pt x="38809" y="7100"/>
-                  </a:lnTo>
-                  <a:lnTo>
-                    <a:pt x="83946" y="0"/>
-                  </a:lnTo>
-                  <a:lnTo>
-                    <a:pt x="85059" y="3477"/>
-                  </a:lnTo>
-                  <a:close/>
-                </a:path>
-              </a:pathLst>
-            </a:custGeom>
-            <a:solidFill>
-              <a:srgbClr val="F8766D">
-                <a:alpha val="10196"/>
-              </a:srgbClr>
-            </a:solidFill>
-            <a:ln w="13550" cap="flat">
-              <a:solidFill>
-                <a:srgbClr val="008B8B">
-                  <a:alpha val="100000"/>
-                </a:srgbClr>
-              </a:solidFill>
-              <a:prstDash val="solid"/>
-              <a:round/>
-            </a:ln>
-          </p:spPr>
-          <p:txBody>
-            <a:bodyPr/>
-            <a:lstStyle/>
-            <a:p>
-              <a:endParaRPr/>
-            </a:p>
-          </p:txBody>
-        </p:sp>
-        <p:sp>
-          <p:nvSpPr>
-            <p:cNvPr id="18" name="pg18"/>
-            <p:cNvSpPr/>
-            <p:nvPr/>
-          </p:nvSpPr>
-          <p:spPr>
-            <a:xfrm>
-              <a:off x="1531329" y="1301881"/>
-              <a:ext cx="1089733" cy="1724421"/>
-            </a:xfrm>
-            <a:custGeom>
-              <a:avLst/>
-              <a:gdLst/>
-              <a:ahLst/>
-              <a:cxnLst/>
-              <a:rect l="0" t="0" r="0" b="0"/>
-              <a:pathLst>
-                <a:path w="1089733" h="1724421">
-                  <a:moveTo>
-                    <a:pt x="1089733" y="1251521"/>
-                  </a:moveTo>
-                  <a:lnTo>
-                    <a:pt x="1040407" y="1626363"/>
-                  </a:lnTo>
-                  <a:lnTo>
-                    <a:pt x="973300" y="1724421"/>
-                  </a:lnTo>
-                  <a:lnTo>
-                    <a:pt x="471951" y="1677459"/>
-                  </a:lnTo>
-                  <a:lnTo>
-                    <a:pt x="84272" y="904263"/>
-                  </a:lnTo>
-                  <a:lnTo>
-                    <a:pt x="0" y="0"/>
-                  </a:lnTo>
-                  <a:close/>
-                </a:path>
-              </a:pathLst>
-            </a:custGeom>
-            <a:solidFill>
-              <a:srgbClr val="7CAE00">
-                <a:alpha val="10196"/>
-              </a:srgbClr>
-            </a:solidFill>
-            <a:ln w="13550" cap="flat">
-              <a:solidFill>
-                <a:srgbClr val="00EEEE">
-                  <a:alpha val="100000"/>
-                </a:srgbClr>
-              </a:solidFill>
-              <a:prstDash val="solid"/>
-              <a:round/>
-            </a:ln>
-          </p:spPr>
-          <p:txBody>
-            <a:bodyPr/>
-            <a:lstStyle/>
-            <a:p>
-              <a:endParaRPr/>
-            </a:p>
-          </p:txBody>
-        </p:sp>
-        <p:sp>
-          <p:nvSpPr>
-            <p:cNvPr id="19" name="pg19"/>
-            <p:cNvSpPr/>
-            <p:nvPr/>
-          </p:nvSpPr>
-          <p:spPr>
-            <a:xfrm>
-              <a:off x="2551262" y="2227586"/>
-              <a:ext cx="96897" cy="497805"/>
-            </a:xfrm>
-            <a:custGeom>
-              <a:avLst/>
-              <a:gdLst/>
-              <a:ahLst/>
-              <a:cxnLst/>
-              <a:rect l="0" t="0" r="0" b="0"/>
-              <a:pathLst>
-                <a:path w="96897" h="497805">
-                  <a:moveTo>
-                    <a:pt x="96897" y="176264"/>
-                  </a:moveTo>
-                  <a:lnTo>
-                    <a:pt x="0" y="497805"/>
-                  </a:lnTo>
-                  <a:lnTo>
-                    <a:pt x="77886" y="0"/>
-                  </a:lnTo>
-                  <a:lnTo>
-                    <a:pt x="93536" y="28931"/>
-                  </a:lnTo>
-                  <a:close/>
-                </a:path>
-              </a:pathLst>
-            </a:custGeom>
-            <a:solidFill>
-              <a:srgbClr val="00BFC4">
-                <a:alpha val="10196"/>
-              </a:srgbClr>
-            </a:solidFill>
-            <a:ln w="13550" cap="flat">
-              <a:solidFill>
-                <a:srgbClr val="551A8B">
-                  <a:alpha val="100000"/>
-                </a:srgbClr>
-              </a:solidFill>
-              <a:prstDash val="solid"/>
-              <a:round/>
-            </a:ln>
-          </p:spPr>
-          <p:txBody>
-            <a:bodyPr/>
-            <a:lstStyle/>
-            <a:p>
-              <a:endParaRPr/>
-            </a:p>
-          </p:txBody>
-        </p:sp>
-        <p:sp>
-          <p:nvSpPr>
-            <p:cNvPr id="20" name="pg20"/>
-            <p:cNvSpPr/>
-            <p:nvPr/>
-          </p:nvSpPr>
-          <p:spPr>
-            <a:xfrm>
-              <a:off x="2390820" y="1654258"/>
-              <a:ext cx="452367" cy="915709"/>
-            </a:xfrm>
-            <a:custGeom>
-              <a:avLst/>
-              <a:gdLst/>
-              <a:ahLst/>
-              <a:cxnLst/>
-              <a:rect l="0" t="0" r="0" b="0"/>
-              <a:pathLst>
-                <a:path w="452367" h="915709">
-                  <a:moveTo>
-                    <a:pt x="358069" y="625881"/>
-                  </a:moveTo>
-                  <a:lnTo>
-                    <a:pt x="254849" y="915709"/>
-                  </a:lnTo>
-                  <a:lnTo>
-                    <a:pt x="126938" y="768233"/>
-                  </a:lnTo>
-                  <a:lnTo>
-                    <a:pt x="0" y="566034"/>
-                  </a:lnTo>
-                  <a:lnTo>
-                    <a:pt x="294753" y="0"/>
-                  </a:lnTo>
-                  <a:lnTo>
-                    <a:pt x="452367" y="188706"/>
-                  </a:lnTo>
-                  <a:close/>
-                </a:path>
-              </a:pathLst>
-            </a:custGeom>
-            <a:solidFill>
-              <a:srgbClr val="C77CFF">
-                <a:alpha val="10196"/>
-              </a:srgbClr>
-            </a:solidFill>
-            <a:ln w="13550" cap="flat">
-              <a:solidFill>
-                <a:srgbClr val="9B30FF">
-                  <a:alpha val="100000"/>
-                </a:srgbClr>
-              </a:solidFill>
-              <a:prstDash val="solid"/>
-              <a:round/>
-            </a:ln>
-          </p:spPr>
-          <p:txBody>
-            <a:bodyPr/>
-            <a:lstStyle/>
-            <a:p>
-              <a:endParaRPr/>
-            </a:p>
-          </p:txBody>
-        </p:sp>
-        <p:sp>
-          <p:nvSpPr>
-            <p:cNvPr id="21" name="pt21"/>
-            <p:cNvSpPr/>
-            <p:nvPr/>
-          </p:nvSpPr>
-          <p:spPr>
-            <a:xfrm>
-              <a:off x="2750449" y="2040833"/>
-              <a:ext cx="63202" cy="63202"/>
-            </a:xfrm>
-            <a:prstGeom prst="ellipse">
-              <a:avLst/>
-            </a:prstGeom>
-            <a:solidFill>
-              <a:srgbClr val="9B30FF">
-                <a:alpha val="100000"/>
-              </a:srgbClr>
-            </a:solidFill>
-            <a:ln w="9000" cap="rnd">
-              <a:solidFill>
-                <a:srgbClr val="9B30FF">
-                  <a:alpha val="100000"/>
-                </a:srgbClr>
-              </a:solidFill>
-              <a:prstDash val="solid"/>
-              <a:round/>
-            </a:ln>
-          </p:spPr>
-          <p:txBody>
-            <a:bodyPr/>
-            <a:lstStyle/>
-            <a:p>
-              <a:endParaRPr/>
-            </a:p>
-          </p:txBody>
-        </p:sp>
-        <p:sp>
-          <p:nvSpPr>
-            <p:cNvPr id="22" name="pt22"/>
-            <p:cNvSpPr/>
-            <p:nvPr/>
-          </p:nvSpPr>
-          <p:spPr>
-            <a:xfrm>
-              <a:off x="1835019" y="1852152"/>
-              <a:ext cx="63202" cy="63202"/>
-            </a:xfrm>
-            <a:prstGeom prst="ellipse">
-              <a:avLst/>
-            </a:prstGeom>
-            <a:solidFill>
-              <a:srgbClr val="00EEEE">
-                <a:alpha val="100000"/>
-              </a:srgbClr>
-            </a:solidFill>
-            <a:ln w="9000" cap="rnd">
-              <a:solidFill>
-                <a:srgbClr val="00EEEE">
-                  <a:alpha val="100000"/>
-                </a:srgbClr>
-              </a:solidFill>
-              <a:prstDash val="solid"/>
-              <a:round/>
-            </a:ln>
-          </p:spPr>
-          <p:txBody>
-            <a:bodyPr/>
-            <a:lstStyle/>
-            <a:p>
-              <a:endParaRPr/>
-            </a:p>
-          </p:txBody>
-        </p:sp>
-        <p:sp>
-          <p:nvSpPr>
-            <p:cNvPr id="23" name="pt23"/>
-            <p:cNvSpPr/>
-            <p:nvPr/>
-          </p:nvSpPr>
-          <p:spPr>
-            <a:xfrm>
-              <a:off x="2717288" y="2248539"/>
-              <a:ext cx="63202" cy="63202"/>
-            </a:xfrm>
-            <a:prstGeom prst="ellipse">
-              <a:avLst/>
-            </a:prstGeom>
-            <a:solidFill>
-              <a:srgbClr val="9B30FF">
-                <a:alpha val="100000"/>
-              </a:srgbClr>
-            </a:solidFill>
-            <a:ln w="9000" cap="rnd">
-              <a:solidFill>
-                <a:srgbClr val="9B30FF">
-                  <a:alpha val="100000"/>
-                </a:srgbClr>
-              </a:solidFill>
-              <a:prstDash val="solid"/>
-              <a:round/>
-            </a:ln>
-          </p:spPr>
-          <p:txBody>
-            <a:bodyPr/>
-            <a:lstStyle/>
-            <a:p>
-              <a:endParaRPr/>
-            </a:p>
-          </p:txBody>
-        </p:sp>
-        <p:sp>
-          <p:nvSpPr>
-            <p:cNvPr id="24" name="pt24"/>
-            <p:cNvSpPr/>
-            <p:nvPr/>
-          </p:nvSpPr>
-          <p:spPr>
-            <a:xfrm>
-              <a:off x="2476564" y="2759935"/>
-              <a:ext cx="63202" cy="63202"/>
-            </a:xfrm>
-            <a:prstGeom prst="ellipse">
-              <a:avLst/>
-            </a:prstGeom>
-            <a:solidFill>
-              <a:srgbClr val="00EEEE">
-                <a:alpha val="100000"/>
-              </a:srgbClr>
-            </a:solidFill>
-            <a:ln w="9000" cap="rnd">
-              <a:solidFill>
-                <a:srgbClr val="00EEEE">
-                  <a:alpha val="100000"/>
-                </a:srgbClr>
-              </a:solidFill>
-              <a:prstDash val="solid"/>
-              <a:round/>
-            </a:ln>
-          </p:spPr>
-          <p:txBody>
-            <a:bodyPr/>
-            <a:lstStyle/>
-            <a:p>
-              <a:endParaRPr/>
-            </a:p>
-          </p:txBody>
-        </p:sp>
-        <p:sp>
-          <p:nvSpPr>
-            <p:cNvPr id="25" name="pt25"/>
-            <p:cNvSpPr/>
-            <p:nvPr/>
-          </p:nvSpPr>
-          <p:spPr>
-            <a:xfrm>
-              <a:off x="2359219" y="2188692"/>
-              <a:ext cx="63202" cy="63202"/>
-            </a:xfrm>
-            <a:prstGeom prst="ellipse">
-              <a:avLst/>
-            </a:prstGeom>
-            <a:solidFill>
-              <a:srgbClr val="9B30FF">
-                <a:alpha val="100000"/>
-              </a:srgbClr>
-            </a:solidFill>
-            <a:ln w="9000" cap="rnd">
-              <a:solidFill>
-                <a:srgbClr val="9B30FF">
-                  <a:alpha val="100000"/>
-                </a:srgbClr>
-              </a:solidFill>
-              <a:prstDash val="solid"/>
-              <a:round/>
-            </a:ln>
-          </p:spPr>
-          <p:txBody>
-            <a:bodyPr/>
-            <a:lstStyle/>
-            <a:p>
-              <a:endParaRPr/>
-            </a:p>
-          </p:txBody>
-        </p:sp>
-        <p:sp>
-          <p:nvSpPr>
-            <p:cNvPr id="26" name="pt26"/>
-            <p:cNvSpPr/>
-            <p:nvPr/>
-          </p:nvSpPr>
-          <p:spPr>
-            <a:xfrm>
-              <a:off x="1843887" y="2260779"/>
-              <a:ext cx="63202" cy="63202"/>
-            </a:xfrm>
-            <a:prstGeom prst="ellipse">
-              <a:avLst/>
-            </a:prstGeom>
-            <a:solidFill>
-              <a:srgbClr val="00EEEE">
-                <a:alpha val="100000"/>
-              </a:srgbClr>
-            </a:solidFill>
-            <a:ln w="9000" cap="rnd">
-              <a:solidFill>
-                <a:srgbClr val="00EEEE">
-                  <a:alpha val="100000"/>
-                </a:srgbClr>
-              </a:solidFill>
-              <a:prstDash val="solid"/>
-              <a:round/>
-            </a:ln>
-          </p:spPr>
-          <p:txBody>
-            <a:bodyPr/>
-            <a:lstStyle/>
-            <a:p>
-              <a:endParaRPr/>
-            </a:p>
-          </p:txBody>
-        </p:sp>
-        <p:sp>
-          <p:nvSpPr>
-            <p:cNvPr id="27" name="pt27"/>
-            <p:cNvSpPr/>
-            <p:nvPr/>
-          </p:nvSpPr>
-          <p:spPr>
-            <a:xfrm>
-              <a:off x="2671824" y="1797230"/>
-              <a:ext cx="63202" cy="63202"/>
-            </a:xfrm>
-            <a:prstGeom prst="ellipse">
-              <a:avLst/>
-            </a:prstGeom>
-            <a:solidFill>
-              <a:srgbClr val="9B30FF">
-                <a:alpha val="100000"/>
-              </a:srgbClr>
-            </a:solidFill>
-            <a:ln w="9000" cap="rnd">
-              <a:solidFill>
-                <a:srgbClr val="9B30FF">
-                  <a:alpha val="100000"/>
-                </a:srgbClr>
-              </a:solidFill>
-              <a:prstDash val="solid"/>
-              <a:round/>
-            </a:ln>
-          </p:spPr>
-          <p:txBody>
-            <a:bodyPr/>
-            <a:lstStyle/>
-            <a:p>
-              <a:endParaRPr/>
-            </a:p>
-          </p:txBody>
-        </p:sp>
-        <p:sp>
-          <p:nvSpPr>
-            <p:cNvPr id="28" name="pt28"/>
-            <p:cNvSpPr/>
-            <p:nvPr/>
-          </p:nvSpPr>
-          <p:spPr>
-            <a:xfrm>
-              <a:off x="1499727" y="1270279"/>
-              <a:ext cx="63202" cy="63202"/>
-            </a:xfrm>
-            <a:prstGeom prst="ellipse">
-              <a:avLst/>
-            </a:prstGeom>
-            <a:solidFill>
-              <a:srgbClr val="00EEEE">
-                <a:alpha val="100000"/>
-              </a:srgbClr>
-            </a:solidFill>
-            <a:ln w="9000" cap="rnd">
-              <a:solidFill>
-                <a:srgbClr val="00EEEE">
-                  <a:alpha val="100000"/>
-                </a:srgbClr>
-              </a:solidFill>
-              <a:prstDash val="solid"/>
-              <a:round/>
-            </a:ln>
-          </p:spPr>
-          <p:txBody>
-            <a:bodyPr/>
-            <a:lstStyle/>
-            <a:p>
-              <a:endParaRPr/>
-            </a:p>
-          </p:txBody>
-        </p:sp>
-        <p:sp>
-          <p:nvSpPr>
-            <p:cNvPr id="29" name="pt29"/>
-            <p:cNvSpPr/>
-            <p:nvPr/>
-          </p:nvSpPr>
-          <p:spPr>
-            <a:xfrm>
-              <a:off x="2538205" y="2302075"/>
-              <a:ext cx="63202" cy="63202"/>
-            </a:xfrm>
-            <a:prstGeom prst="ellipse">
-              <a:avLst/>
-            </a:prstGeom>
-            <a:solidFill>
-              <a:srgbClr val="9B30FF">
-                <a:alpha val="100000"/>
-              </a:srgbClr>
-            </a:solidFill>
-            <a:ln w="9000" cap="rnd">
-              <a:solidFill>
-                <a:srgbClr val="9B30FF">
-                  <a:alpha val="100000"/>
-                </a:srgbClr>
-              </a:solidFill>
-              <a:prstDash val="solid"/>
-              <a:round/>
-            </a:ln>
-          </p:spPr>
-          <p:txBody>
-            <a:bodyPr/>
-            <a:lstStyle/>
-            <a:p>
-              <a:endParaRPr/>
-            </a:p>
-          </p:txBody>
-        </p:sp>
-        <p:sp>
-          <p:nvSpPr>
-            <p:cNvPr id="30" name="pt30"/>
-            <p:cNvSpPr/>
-            <p:nvPr/>
-          </p:nvSpPr>
-          <p:spPr>
-            <a:xfrm>
-              <a:off x="2402460" y="2815663"/>
-              <a:ext cx="63202" cy="63202"/>
-            </a:xfrm>
-            <a:prstGeom prst="ellipse">
-              <a:avLst/>
-            </a:prstGeom>
-            <a:solidFill>
-              <a:srgbClr val="00EEEE">
-                <a:alpha val="100000"/>
-              </a:srgbClr>
-            </a:solidFill>
-            <a:ln w="9000" cap="rnd">
-              <a:solidFill>
-                <a:srgbClr val="00EEEE">
-                  <a:alpha val="100000"/>
-                </a:srgbClr>
-              </a:solidFill>
-              <a:prstDash val="solid"/>
-              <a:round/>
-            </a:ln>
-          </p:spPr>
-          <p:txBody>
-            <a:bodyPr/>
-            <a:lstStyle/>
-            <a:p>
-              <a:endParaRPr/>
-            </a:p>
-          </p:txBody>
-        </p:sp>
-        <p:sp>
-          <p:nvSpPr>
-            <p:cNvPr id="31" name="pt31"/>
-            <p:cNvSpPr/>
-            <p:nvPr/>
-          </p:nvSpPr>
-          <p:spPr>
-            <a:xfrm>
-              <a:off x="2717180" y="2042914"/>
-              <a:ext cx="63202" cy="63202"/>
-            </a:xfrm>
-            <a:prstGeom prst="ellipse">
-              <a:avLst/>
-            </a:prstGeom>
-            <a:solidFill>
-              <a:srgbClr val="9B30FF">
-                <a:alpha val="100000"/>
-              </a:srgbClr>
-            </a:solidFill>
-            <a:ln w="9000" cap="rnd">
-              <a:solidFill>
-                <a:srgbClr val="9B30FF">
-                  <a:alpha val="100000"/>
-                </a:srgbClr>
-              </a:solidFill>
-              <a:prstDash val="solid"/>
-              <a:round/>
-            </a:ln>
-          </p:spPr>
-          <p:txBody>
-            <a:bodyPr/>
-            <a:lstStyle/>
-            <a:p>
-              <a:endParaRPr/>
-            </a:p>
-          </p:txBody>
-        </p:sp>
-        <p:sp>
-          <p:nvSpPr>
-            <p:cNvPr id="32" name="pt32"/>
-            <p:cNvSpPr/>
-            <p:nvPr/>
-          </p:nvSpPr>
-          <p:spPr>
-            <a:xfrm>
-              <a:off x="2270982" y="2893918"/>
-              <a:ext cx="63202" cy="63202"/>
-            </a:xfrm>
-            <a:prstGeom prst="ellipse">
-              <a:avLst/>
-            </a:prstGeom>
-            <a:solidFill>
-              <a:srgbClr val="00EEEE">
-                <a:alpha val="100000"/>
-              </a:srgbClr>
-            </a:solidFill>
-            <a:ln w="9000" cap="rnd">
-              <a:solidFill>
-                <a:srgbClr val="00EEEE">
-                  <a:alpha val="100000"/>
-                </a:srgbClr>
-              </a:solidFill>
-              <a:prstDash val="solid"/>
-              <a:round/>
-            </a:ln>
-          </p:spPr>
-          <p:txBody>
-            <a:bodyPr/>
-            <a:lstStyle/>
-            <a:p>
-              <a:endParaRPr/>
-            </a:p>
-          </p:txBody>
-        </p:sp>
-        <p:sp>
-          <p:nvSpPr>
-            <p:cNvPr id="33" name="pt33"/>
-            <p:cNvSpPr/>
-            <p:nvPr/>
-          </p:nvSpPr>
-          <p:spPr>
-            <a:xfrm>
-              <a:off x="2794573" y="1876374"/>
-              <a:ext cx="63202" cy="63202"/>
-            </a:xfrm>
-            <a:prstGeom prst="ellipse">
-              <a:avLst/>
-            </a:prstGeom>
-            <a:solidFill>
-              <a:srgbClr val="9B30FF">
-                <a:alpha val="100000"/>
-              </a:srgbClr>
-            </a:solidFill>
-            <a:ln w="9000" cap="rnd">
-              <a:solidFill>
-                <a:srgbClr val="9B30FF">
-                  <a:alpha val="100000"/>
-                </a:srgbClr>
-              </a:solidFill>
-              <a:prstDash val="solid"/>
-              <a:round/>
-            </a:ln>
-          </p:spPr>
-          <p:txBody>
-            <a:bodyPr/>
-            <a:lstStyle/>
-            <a:p>
-              <a:endParaRPr/>
-            </a:p>
-          </p:txBody>
-        </p:sp>
-        <p:sp>
-          <p:nvSpPr>
-            <p:cNvPr id="34" name="pt34"/>
-            <p:cNvSpPr/>
-            <p:nvPr/>
-          </p:nvSpPr>
-          <p:spPr>
-            <a:xfrm>
-              <a:off x="1971678" y="2947739"/>
-              <a:ext cx="63202" cy="63202"/>
-            </a:xfrm>
-            <a:prstGeom prst="ellipse">
-              <a:avLst/>
-            </a:prstGeom>
-            <a:solidFill>
-              <a:srgbClr val="00EEEE">
-                <a:alpha val="100000"/>
-              </a:srgbClr>
-            </a:solidFill>
-            <a:ln w="9000" cap="rnd">
-              <a:solidFill>
-                <a:srgbClr val="00EEEE">
-                  <a:alpha val="100000"/>
-                </a:srgbClr>
-              </a:solidFill>
-              <a:prstDash val="solid"/>
-              <a:round/>
-            </a:ln>
-          </p:spPr>
-          <p:txBody>
-            <a:bodyPr/>
-            <a:lstStyle/>
-            <a:p>
-              <a:endParaRPr/>
-            </a:p>
-          </p:txBody>
-        </p:sp>
-        <p:sp>
-          <p:nvSpPr>
-            <p:cNvPr id="35" name="pt35"/>
-            <p:cNvSpPr/>
-            <p:nvPr/>
-          </p:nvSpPr>
-          <p:spPr>
-            <a:xfrm>
-              <a:off x="2674797" y="2222481"/>
-              <a:ext cx="63202" cy="63202"/>
-            </a:xfrm>
-            <a:prstGeom prst="ellipse">
-              <a:avLst/>
-            </a:prstGeom>
-            <a:solidFill>
-              <a:srgbClr val="9B30FF">
-                <a:alpha val="100000"/>
-              </a:srgbClr>
-            </a:solidFill>
-            <a:ln w="9000" cap="rnd">
-              <a:solidFill>
-                <a:srgbClr val="9B30FF">
-                  <a:alpha val="100000"/>
-                </a:srgbClr>
-              </a:solidFill>
-              <a:prstDash val="solid"/>
-              <a:round/>
-            </a:ln>
-          </p:spPr>
-          <p:txBody>
-            <a:bodyPr/>
-            <a:lstStyle/>
-            <a:p>
-              <a:endParaRPr/>
-            </a:p>
-          </p:txBody>
-        </p:sp>
-        <p:sp>
-          <p:nvSpPr>
-            <p:cNvPr id="36" name="pt36"/>
-            <p:cNvSpPr/>
-            <p:nvPr/>
-          </p:nvSpPr>
-          <p:spPr>
-            <a:xfrm>
-              <a:off x="2538824" y="2919568"/>
-              <a:ext cx="63202" cy="63202"/>
-            </a:xfrm>
-            <a:prstGeom prst="ellipse">
-              <a:avLst/>
-            </a:prstGeom>
-            <a:solidFill>
-              <a:srgbClr val="008B8B">
-                <a:alpha val="100000"/>
-              </a:srgbClr>
-            </a:solidFill>
-            <a:ln w="9000" cap="rnd">
-              <a:solidFill>
-                <a:srgbClr val="008B8B">
-                  <a:alpha val="100000"/>
-                </a:srgbClr>
-              </a:solidFill>
-              <a:prstDash val="solid"/>
-              <a:round/>
-            </a:ln>
-          </p:spPr>
-          <p:txBody>
-            <a:bodyPr/>
-            <a:lstStyle/>
-            <a:p>
-              <a:endParaRPr/>
-            </a:p>
-          </p:txBody>
-        </p:sp>
-        <p:sp>
-          <p:nvSpPr>
-            <p:cNvPr id="37" name="pt37"/>
-            <p:cNvSpPr/>
-            <p:nvPr/>
-          </p:nvSpPr>
-          <p:spPr>
-            <a:xfrm>
-              <a:off x="2616558" y="2372249"/>
-              <a:ext cx="63202" cy="63202"/>
-            </a:xfrm>
-            <a:prstGeom prst="ellipse">
-              <a:avLst/>
-            </a:prstGeom>
-            <a:solidFill>
-              <a:srgbClr val="551A8B">
-                <a:alpha val="100000"/>
-              </a:srgbClr>
-            </a:solidFill>
-            <a:ln w="9000" cap="rnd">
-              <a:solidFill>
-                <a:srgbClr val="551A8B">
-                  <a:alpha val="100000"/>
-                </a:srgbClr>
-              </a:solidFill>
-              <a:prstDash val="solid"/>
-              <a:round/>
-            </a:ln>
-          </p:spPr>
-          <p:txBody>
-            <a:bodyPr/>
-            <a:lstStyle/>
-            <a:p>
-              <a:endParaRPr/>
-            </a:p>
-          </p:txBody>
-        </p:sp>
-        <p:sp>
-          <p:nvSpPr>
-            <p:cNvPr id="38" name="pt38"/>
-            <p:cNvSpPr/>
-            <p:nvPr/>
-          </p:nvSpPr>
-          <p:spPr>
-            <a:xfrm>
-              <a:off x="2464085" y="2698761"/>
-              <a:ext cx="63202" cy="63202"/>
-            </a:xfrm>
-            <a:prstGeom prst="ellipse">
-              <a:avLst/>
-            </a:prstGeom>
-            <a:solidFill>
-              <a:srgbClr val="00EEEE">
-                <a:alpha val="100000"/>
-              </a:srgbClr>
-            </a:solidFill>
-            <a:ln w="9000" cap="rnd">
-              <a:solidFill>
-                <a:srgbClr val="00EEEE">
-                  <a:alpha val="100000"/>
-                </a:srgbClr>
-              </a:solidFill>
-              <a:prstDash val="solid"/>
-              <a:round/>
-            </a:ln>
-          </p:spPr>
-          <p:txBody>
-            <a:bodyPr/>
-            <a:lstStyle/>
-            <a:p>
-              <a:endParaRPr/>
-            </a:p>
-          </p:txBody>
-        </p:sp>
-        <p:sp>
-          <p:nvSpPr>
-            <p:cNvPr id="39" name="pt39"/>
-            <p:cNvSpPr/>
-            <p:nvPr/>
-          </p:nvSpPr>
-          <p:spPr>
-            <a:xfrm>
-              <a:off x="2594021" y="1958082"/>
-              <a:ext cx="63202" cy="63202"/>
-            </a:xfrm>
-            <a:prstGeom prst="ellipse">
-              <a:avLst/>
-            </a:prstGeom>
-            <a:solidFill>
-              <a:srgbClr val="9B30FF">
-                <a:alpha val="100000"/>
-              </a:srgbClr>
-            </a:solidFill>
-            <a:ln w="9000" cap="rnd">
-              <a:solidFill>
-                <a:srgbClr val="9B30FF">
-                  <a:alpha val="100000"/>
-                </a:srgbClr>
-              </a:solidFill>
-              <a:prstDash val="solid"/>
-              <a:round/>
-            </a:ln>
-          </p:spPr>
-          <p:txBody>
-            <a:bodyPr/>
-            <a:lstStyle/>
-            <a:p>
-              <a:endParaRPr/>
-            </a:p>
-          </p:txBody>
-        </p:sp>
-        <p:sp>
-          <p:nvSpPr>
-            <p:cNvPr id="40" name="pt40"/>
-            <p:cNvSpPr/>
-            <p:nvPr/>
-          </p:nvSpPr>
-          <p:spPr>
-            <a:xfrm>
-              <a:off x="1731401" y="1985040"/>
-              <a:ext cx="63202" cy="63202"/>
-            </a:xfrm>
-            <a:prstGeom prst="ellipse">
-              <a:avLst/>
-            </a:prstGeom>
-            <a:solidFill>
-              <a:srgbClr val="00EEEE">
-                <a:alpha val="100000"/>
-              </a:srgbClr>
-            </a:solidFill>
-            <a:ln w="9000" cap="rnd">
-              <a:solidFill>
-                <a:srgbClr val="00EEEE">
-                  <a:alpha val="100000"/>
-                </a:srgbClr>
-              </a:solidFill>
-              <a:prstDash val="solid"/>
-              <a:round/>
-            </a:ln>
-          </p:spPr>
-          <p:txBody>
-            <a:bodyPr/>
-            <a:lstStyle/>
-            <a:p>
-              <a:endParaRPr/>
-            </a:p>
-          </p:txBody>
-        </p:sp>
-        <p:sp>
-          <p:nvSpPr>
-            <p:cNvPr id="41" name="pt41"/>
-            <p:cNvSpPr/>
-            <p:nvPr/>
-          </p:nvSpPr>
-          <p:spPr>
-            <a:xfrm>
-              <a:off x="2768373" y="1823591"/>
-              <a:ext cx="63202" cy="63202"/>
-            </a:xfrm>
-            <a:prstGeom prst="ellipse">
-              <a:avLst/>
-            </a:prstGeom>
-            <a:solidFill>
-              <a:srgbClr val="9B30FF">
-                <a:alpha val="100000"/>
-              </a:srgbClr>
-            </a:solidFill>
-            <a:ln w="9000" cap="rnd">
-              <a:solidFill>
-                <a:srgbClr val="9B30FF">
-                  <a:alpha val="100000"/>
-                </a:srgbClr>
-              </a:solidFill>
-              <a:prstDash val="solid"/>
-              <a:round/>
-            </a:ln>
-          </p:spPr>
-          <p:txBody>
-            <a:bodyPr/>
-            <a:lstStyle/>
-            <a:p>
-              <a:endParaRPr/>
-            </a:p>
-          </p:txBody>
-        </p:sp>
-        <p:sp>
-          <p:nvSpPr>
-            <p:cNvPr id="42" name="pt42"/>
-            <p:cNvSpPr/>
-            <p:nvPr/>
-          </p:nvSpPr>
-          <p:spPr>
-            <a:xfrm>
-              <a:off x="2285171" y="2893803"/>
-              <a:ext cx="63202" cy="63202"/>
-            </a:xfrm>
-            <a:prstGeom prst="ellipse">
-              <a:avLst/>
-            </a:prstGeom>
-            <a:solidFill>
-              <a:srgbClr val="00EEEE">
-                <a:alpha val="100000"/>
-              </a:srgbClr>
-            </a:solidFill>
-            <a:ln w="9000" cap="rnd">
-              <a:solidFill>
-                <a:srgbClr val="00EEEE">
-                  <a:alpha val="100000"/>
-                </a:srgbClr>
-              </a:solidFill>
-              <a:prstDash val="solid"/>
-              <a:round/>
-            </a:ln>
-          </p:spPr>
-          <p:txBody>
-            <a:bodyPr/>
-            <a:lstStyle/>
-            <a:p>
-              <a:endParaRPr/>
-            </a:p>
-          </p:txBody>
-        </p:sp>
-        <p:sp>
-          <p:nvSpPr>
-            <p:cNvPr id="43" name="pt43"/>
-            <p:cNvSpPr/>
-            <p:nvPr/>
-          </p:nvSpPr>
-          <p:spPr>
-            <a:xfrm>
-              <a:off x="2608090" y="2468721"/>
-              <a:ext cx="63202" cy="63202"/>
-            </a:xfrm>
-            <a:prstGeom prst="ellipse">
-              <a:avLst/>
-            </a:prstGeom>
-            <a:solidFill>
-              <a:srgbClr val="9B30FF">
-                <a:alpha val="100000"/>
-              </a:srgbClr>
-            </a:solidFill>
-            <a:ln w="9000" cap="rnd">
-              <a:solidFill>
-                <a:srgbClr val="9B30FF">
-                  <a:alpha val="100000"/>
-                </a:srgbClr>
-              </a:solidFill>
-              <a:prstDash val="solid"/>
-              <a:round/>
-            </a:ln>
-          </p:spPr>
-          <p:txBody>
-            <a:bodyPr/>
-            <a:lstStyle/>
-            <a:p>
-              <a:endParaRPr/>
-            </a:p>
-          </p:txBody>
-        </p:sp>
-        <p:sp>
-          <p:nvSpPr>
-            <p:cNvPr id="44" name="pt44"/>
-            <p:cNvSpPr/>
-            <p:nvPr/>
-          </p:nvSpPr>
-          <p:spPr>
-            <a:xfrm>
-              <a:off x="2257425" y="2338344"/>
-              <a:ext cx="63202" cy="63202"/>
-            </a:xfrm>
-            <a:prstGeom prst="ellipse">
-              <a:avLst/>
-            </a:prstGeom>
-            <a:solidFill>
-              <a:srgbClr val="00EEEE">
-                <a:alpha val="100000"/>
-              </a:srgbClr>
-            </a:solidFill>
-            <a:ln w="9000" cap="rnd">
-              <a:solidFill>
-                <a:srgbClr val="00EEEE">
-                  <a:alpha val="100000"/>
-                </a:srgbClr>
-              </a:solidFill>
-              <a:prstDash val="solid"/>
-              <a:round/>
-            </a:ln>
-          </p:spPr>
-          <p:txBody>
-            <a:bodyPr/>
-            <a:lstStyle/>
-            <a:p>
-              <a:endParaRPr/>
-            </a:p>
-          </p:txBody>
-        </p:sp>
-        <p:sp>
-          <p:nvSpPr>
-            <p:cNvPr id="45" name="pt45"/>
-            <p:cNvSpPr/>
-            <p:nvPr/>
-          </p:nvSpPr>
-          <p:spPr>
-            <a:xfrm>
-              <a:off x="2653973" y="1622657"/>
-              <a:ext cx="63202" cy="63202"/>
-            </a:xfrm>
-            <a:prstGeom prst="ellipse">
-              <a:avLst/>
-            </a:prstGeom>
-            <a:solidFill>
-              <a:srgbClr val="9B30FF">
-                <a:alpha val="100000"/>
-              </a:srgbClr>
-            </a:solidFill>
-            <a:ln w="9000" cap="rnd">
-              <a:solidFill>
-                <a:srgbClr val="9B30FF">
-                  <a:alpha val="100000"/>
-                </a:srgbClr>
-              </a:solidFill>
-              <a:prstDash val="solid"/>
-              <a:round/>
-            </a:ln>
-          </p:spPr>
-          <p:txBody>
-            <a:bodyPr/>
-            <a:lstStyle/>
-            <a:p>
-              <a:endParaRPr/>
-            </a:p>
-          </p:txBody>
-        </p:sp>
-        <p:sp>
-          <p:nvSpPr>
-            <p:cNvPr id="46" name="pt46"/>
-            <p:cNvSpPr/>
-            <p:nvPr/>
-          </p:nvSpPr>
-          <p:spPr>
-            <a:xfrm>
-              <a:off x="1584000" y="2174543"/>
-              <a:ext cx="63202" cy="63202"/>
-            </a:xfrm>
-            <a:prstGeom prst="ellipse">
-              <a:avLst/>
-            </a:prstGeom>
-            <a:solidFill>
-              <a:srgbClr val="00EEEE">
-                <a:alpha val="100000"/>
-              </a:srgbClr>
-            </a:solidFill>
-            <a:ln w="9000" cap="rnd">
-              <a:solidFill>
-                <a:srgbClr val="00EEEE">
-                  <a:alpha val="100000"/>
-                </a:srgbClr>
-              </a:solidFill>
-              <a:prstDash val="solid"/>
-              <a:round/>
-            </a:ln>
-          </p:spPr>
-          <p:txBody>
-            <a:bodyPr/>
-            <a:lstStyle/>
-            <a:p>
-              <a:endParaRPr/>
-            </a:p>
-          </p:txBody>
-        </p:sp>
-        <p:sp>
-          <p:nvSpPr>
-            <p:cNvPr id="47" name="pt47"/>
-            <p:cNvSpPr/>
-            <p:nvPr/>
-          </p:nvSpPr>
-          <p:spPr>
-            <a:xfrm>
-              <a:off x="2793011" y="1846470"/>
-              <a:ext cx="63202" cy="63202"/>
-            </a:xfrm>
-            <a:prstGeom prst="ellipse">
-              <a:avLst/>
-            </a:prstGeom>
-            <a:solidFill>
-              <a:srgbClr val="9B30FF">
-                <a:alpha val="100000"/>
-              </a:srgbClr>
-            </a:solidFill>
-            <a:ln w="9000" cap="rnd">
-              <a:solidFill>
-                <a:srgbClr val="9B30FF">
-                  <a:alpha val="100000"/>
-                </a:srgbClr>
-              </a:solidFill>
-              <a:prstDash val="solid"/>
-              <a:round/>
-            </a:ln>
-          </p:spPr>
-          <p:txBody>
-            <a:bodyPr/>
-            <a:lstStyle/>
-            <a:p>
-              <a:endParaRPr/>
-            </a:p>
-          </p:txBody>
-        </p:sp>
-        <p:sp>
-          <p:nvSpPr>
-            <p:cNvPr id="48" name="pt48"/>
-            <p:cNvSpPr/>
-            <p:nvPr/>
-          </p:nvSpPr>
-          <p:spPr>
-            <a:xfrm>
-              <a:off x="2458168" y="2744477"/>
-              <a:ext cx="63202" cy="63202"/>
-            </a:xfrm>
-            <a:prstGeom prst="ellipse">
-              <a:avLst/>
-            </a:prstGeom>
-            <a:solidFill>
-              <a:srgbClr val="00EEEE">
-                <a:alpha val="100000"/>
-              </a:srgbClr>
-            </a:solidFill>
-            <a:ln w="9000" cap="rnd">
-              <a:solidFill>
-                <a:srgbClr val="00EEEE">
-                  <a:alpha val="100000"/>
-                </a:srgbClr>
-              </a:solidFill>
-              <a:prstDash val="solid"/>
-              <a:round/>
-            </a:ln>
-          </p:spPr>
-          <p:txBody>
-            <a:bodyPr/>
-            <a:lstStyle/>
-            <a:p>
-              <a:endParaRPr/>
-            </a:p>
-          </p:txBody>
-        </p:sp>
-        <p:sp>
-          <p:nvSpPr>
-            <p:cNvPr id="49" name="pt49"/>
-            <p:cNvSpPr/>
-            <p:nvPr/>
-          </p:nvSpPr>
-          <p:spPr>
-            <a:xfrm>
-              <a:off x="2614068" y="2538367"/>
-              <a:ext cx="63202" cy="63202"/>
-            </a:xfrm>
-            <a:prstGeom prst="ellipse">
-              <a:avLst/>
-            </a:prstGeom>
-            <a:solidFill>
-              <a:srgbClr val="9B30FF">
-                <a:alpha val="100000"/>
-              </a:srgbClr>
-            </a:solidFill>
-            <a:ln w="9000" cap="rnd">
-              <a:solidFill>
-                <a:srgbClr val="9B30FF">
-                  <a:alpha val="100000"/>
-                </a:srgbClr>
-              </a:solidFill>
-              <a:prstDash val="solid"/>
-              <a:round/>
-            </a:ln>
-          </p:spPr>
-          <p:txBody>
-            <a:bodyPr/>
-            <a:lstStyle/>
-            <a:p>
-              <a:endParaRPr/>
-            </a:p>
-          </p:txBody>
-        </p:sp>
-        <p:sp>
-          <p:nvSpPr>
-            <p:cNvPr id="50" name="pt50"/>
-            <p:cNvSpPr/>
-            <p:nvPr/>
-          </p:nvSpPr>
-          <p:spPr>
-            <a:xfrm>
-              <a:off x="2453764" y="3132866"/>
-              <a:ext cx="63202" cy="63202"/>
-            </a:xfrm>
-            <a:prstGeom prst="ellipse">
-              <a:avLst/>
-            </a:prstGeom>
-            <a:solidFill>
-              <a:srgbClr val="008B8B">
-                <a:alpha val="100000"/>
-              </a:srgbClr>
-            </a:solidFill>
-            <a:ln w="9000" cap="rnd">
-              <a:solidFill>
-                <a:srgbClr val="008B8B">
-                  <a:alpha val="100000"/>
-                </a:srgbClr>
-              </a:solidFill>
-              <a:prstDash val="solid"/>
-              <a:round/>
-            </a:ln>
-          </p:spPr>
-          <p:txBody>
-            <a:bodyPr/>
-            <a:lstStyle/>
-            <a:p>
-              <a:endParaRPr/>
-            </a:p>
-          </p:txBody>
-        </p:sp>
-        <p:sp>
-          <p:nvSpPr>
-            <p:cNvPr id="51" name="pt51"/>
-            <p:cNvSpPr/>
-            <p:nvPr/>
-          </p:nvSpPr>
-          <p:spPr>
-            <a:xfrm>
-              <a:off x="2519660" y="2693790"/>
-              <a:ext cx="63202" cy="63202"/>
-            </a:xfrm>
-            <a:prstGeom prst="ellipse">
-              <a:avLst/>
-            </a:prstGeom>
-            <a:solidFill>
-              <a:srgbClr val="551A8B">
-                <a:alpha val="100000"/>
-              </a:srgbClr>
-            </a:solidFill>
-            <a:ln w="9000" cap="rnd">
-              <a:solidFill>
-                <a:srgbClr val="551A8B">
-                  <a:alpha val="100000"/>
-                </a:srgbClr>
-              </a:solidFill>
-              <a:prstDash val="solid"/>
-              <a:round/>
-            </a:ln>
-          </p:spPr>
-          <p:txBody>
-            <a:bodyPr/>
-            <a:lstStyle/>
-            <a:p>
-              <a:endParaRPr/>
-            </a:p>
-          </p:txBody>
-        </p:sp>
-        <p:sp>
-          <p:nvSpPr>
-            <p:cNvPr id="52" name="pt52"/>
-            <p:cNvSpPr/>
-            <p:nvPr/>
-          </p:nvSpPr>
-          <p:spPr>
-            <a:xfrm>
-              <a:off x="2537711" y="2916091"/>
-              <a:ext cx="63202" cy="63202"/>
-            </a:xfrm>
-            <a:prstGeom prst="ellipse">
-              <a:avLst/>
-            </a:prstGeom>
-            <a:solidFill>
-              <a:srgbClr val="008B8B">
-                <a:alpha val="100000"/>
-              </a:srgbClr>
-            </a:solidFill>
-            <a:ln w="9000" cap="rnd">
-              <a:solidFill>
-                <a:srgbClr val="008B8B">
-                  <a:alpha val="100000"/>
-                </a:srgbClr>
-              </a:solidFill>
-              <a:prstDash val="solid"/>
-              <a:round/>
-            </a:ln>
-          </p:spPr>
-          <p:txBody>
-            <a:bodyPr/>
-            <a:lstStyle/>
-            <a:p>
-              <a:endParaRPr/>
-            </a:p>
-          </p:txBody>
-        </p:sp>
-        <p:sp>
-          <p:nvSpPr>
-            <p:cNvPr id="53" name="pt53"/>
-            <p:cNvSpPr/>
-            <p:nvPr/>
-          </p:nvSpPr>
-          <p:spPr>
-            <a:xfrm>
-              <a:off x="2613197" y="2224916"/>
-              <a:ext cx="63202" cy="63202"/>
-            </a:xfrm>
-            <a:prstGeom prst="ellipse">
-              <a:avLst/>
-            </a:prstGeom>
-            <a:solidFill>
-              <a:srgbClr val="551A8B">
-                <a:alpha val="100000"/>
-              </a:srgbClr>
-            </a:solidFill>
-            <a:ln w="9000" cap="rnd">
-              <a:solidFill>
-                <a:srgbClr val="551A8B">
-                  <a:alpha val="100000"/>
-                </a:srgbClr>
-              </a:solidFill>
-              <a:prstDash val="solid"/>
-              <a:round/>
-            </a:ln>
-          </p:spPr>
-          <p:txBody>
-            <a:bodyPr/>
-            <a:lstStyle/>
-            <a:p>
-              <a:endParaRPr/>
-            </a:p>
-          </p:txBody>
-        </p:sp>
-        <p:sp>
-          <p:nvSpPr>
-            <p:cNvPr id="54" name="pt54"/>
-            <p:cNvSpPr/>
-            <p:nvPr/>
-          </p:nvSpPr>
-          <p:spPr>
-            <a:xfrm>
-              <a:off x="2352192" y="2767052"/>
-              <a:ext cx="63202" cy="63202"/>
-            </a:xfrm>
-            <a:prstGeom prst="ellipse">
-              <a:avLst/>
-            </a:prstGeom>
-            <a:solidFill>
-              <a:srgbClr val="00EEEE">
-                <a:alpha val="100000"/>
-              </a:srgbClr>
-            </a:solidFill>
-            <a:ln w="9000" cap="rnd">
-              <a:solidFill>
-                <a:srgbClr val="00EEEE">
-                  <a:alpha val="100000"/>
-                </a:srgbClr>
-              </a:solidFill>
-              <a:prstDash val="solid"/>
-              <a:round/>
-            </a:ln>
-          </p:spPr>
-          <p:txBody>
-            <a:bodyPr/>
-            <a:lstStyle/>
-            <a:p>
-              <a:endParaRPr/>
-            </a:p>
-          </p:txBody>
-        </p:sp>
-        <p:sp>
-          <p:nvSpPr>
-            <p:cNvPr id="55" name="pt55"/>
-            <p:cNvSpPr/>
-            <p:nvPr/>
-          </p:nvSpPr>
-          <p:spPr>
-            <a:xfrm>
-              <a:off x="2729223" y="1949962"/>
-              <a:ext cx="63202" cy="63202"/>
-            </a:xfrm>
-            <a:prstGeom prst="ellipse">
-              <a:avLst/>
-            </a:prstGeom>
-            <a:solidFill>
-              <a:srgbClr val="9B30FF">
-                <a:alpha val="100000"/>
-              </a:srgbClr>
-            </a:solidFill>
-            <a:ln w="9000" cap="rnd">
-              <a:solidFill>
-                <a:srgbClr val="9B30FF">
-                  <a:alpha val="100000"/>
-                </a:srgbClr>
-              </a:solidFill>
-              <a:prstDash val="solid"/>
-              <a:round/>
-            </a:ln>
-          </p:spPr>
-          <p:txBody>
-            <a:bodyPr/>
-            <a:lstStyle/>
-            <a:p>
-              <a:endParaRPr/>
-            </a:p>
-          </p:txBody>
-        </p:sp>
-        <p:sp>
-          <p:nvSpPr>
-            <p:cNvPr id="56" name="pt56"/>
-            <p:cNvSpPr/>
-            <p:nvPr/>
-          </p:nvSpPr>
-          <p:spPr>
-            <a:xfrm>
-              <a:off x="2492574" y="2923191"/>
-              <a:ext cx="63202" cy="63202"/>
-            </a:xfrm>
-            <a:prstGeom prst="ellipse">
-              <a:avLst/>
-            </a:prstGeom>
-            <a:solidFill>
-              <a:srgbClr val="008B8B">
-                <a:alpha val="100000"/>
-              </a:srgbClr>
-            </a:solidFill>
-            <a:ln w="9000" cap="rnd">
-              <a:solidFill>
-                <a:srgbClr val="008B8B">
-                  <a:alpha val="100000"/>
-                </a:srgbClr>
-              </a:solidFill>
-              <a:prstDash val="solid"/>
-              <a:round/>
-            </a:ln>
-          </p:spPr>
-          <p:txBody>
-            <a:bodyPr/>
-            <a:lstStyle/>
-            <a:p>
-              <a:endParaRPr/>
-            </a:p>
-          </p:txBody>
-        </p:sp>
-        <p:sp>
-          <p:nvSpPr>
-            <p:cNvPr id="57" name="pt57"/>
-            <p:cNvSpPr/>
-            <p:nvPr/>
-          </p:nvSpPr>
-          <p:spPr>
-            <a:xfrm>
-              <a:off x="2597546" y="2195985"/>
-              <a:ext cx="63202" cy="63202"/>
-            </a:xfrm>
-            <a:prstGeom prst="ellipse">
-              <a:avLst/>
-            </a:prstGeom>
-            <a:solidFill>
-              <a:srgbClr val="551A8B">
-                <a:alpha val="100000"/>
-              </a:srgbClr>
-            </a:solidFill>
-            <a:ln w="9000" cap="rnd">
-              <a:solidFill>
-                <a:srgbClr val="551A8B">
-                  <a:alpha val="100000"/>
-                </a:srgbClr>
-              </a:solidFill>
-              <a:prstDash val="solid"/>
-              <a:round/>
-            </a:ln>
-          </p:spPr>
-          <p:txBody>
-            <a:bodyPr/>
-            <a:lstStyle/>
-            <a:p>
-              <a:endParaRPr/>
-            </a:p>
-          </p:txBody>
-        </p:sp>
-        <p:sp>
-          <p:nvSpPr>
-            <p:cNvPr id="58" name="pt58"/>
-            <p:cNvSpPr/>
-            <p:nvPr/>
-          </p:nvSpPr>
-          <p:spPr>
-            <a:xfrm>
-              <a:off x="2540134" y="2896643"/>
-              <a:ext cx="63202" cy="63202"/>
-            </a:xfrm>
-            <a:prstGeom prst="ellipse">
-              <a:avLst/>
-            </a:prstGeom>
-            <a:solidFill>
-              <a:srgbClr val="00EEEE">
-                <a:alpha val="100000"/>
-              </a:srgbClr>
-            </a:solidFill>
-            <a:ln w="9000" cap="rnd">
-              <a:solidFill>
-                <a:srgbClr val="00EEEE">
-                  <a:alpha val="100000"/>
-                </a:srgbClr>
-              </a:solidFill>
-              <a:prstDash val="solid"/>
-              <a:round/>
-            </a:ln>
-          </p:spPr>
-          <p:txBody>
-            <a:bodyPr/>
-            <a:lstStyle/>
-            <a:p>
-              <a:endParaRPr/>
-            </a:p>
-          </p:txBody>
-        </p:sp>
-        <p:sp>
-          <p:nvSpPr>
-            <p:cNvPr id="59" name="pt59"/>
-            <p:cNvSpPr/>
-            <p:nvPr/>
-          </p:nvSpPr>
-          <p:spPr>
-            <a:xfrm>
-              <a:off x="2744093" y="1886625"/>
-              <a:ext cx="63202" cy="63202"/>
-            </a:xfrm>
-            <a:prstGeom prst="ellipse">
-              <a:avLst/>
-            </a:prstGeom>
-            <a:solidFill>
-              <a:srgbClr val="9B30FF">
-                <a:alpha val="100000"/>
-              </a:srgbClr>
-            </a:solidFill>
-            <a:ln w="9000" cap="rnd">
-              <a:solidFill>
-                <a:srgbClr val="9B30FF">
-                  <a:alpha val="100000"/>
-                </a:srgbClr>
-              </a:solidFill>
-              <a:prstDash val="solid"/>
-              <a:round/>
-            </a:ln>
-          </p:spPr>
-          <p:txBody>
-            <a:bodyPr/>
-            <a:lstStyle/>
-            <a:p>
-              <a:endParaRPr/>
-            </a:p>
-          </p:txBody>
-        </p:sp>
-        <p:sp>
-          <p:nvSpPr>
-            <p:cNvPr id="60" name="pt60"/>
-            <p:cNvSpPr/>
-            <p:nvPr/>
-          </p:nvSpPr>
-          <p:spPr>
-            <a:xfrm>
-              <a:off x="2378419" y="2654990"/>
-              <a:ext cx="63202" cy="63202"/>
-            </a:xfrm>
-            <a:prstGeom prst="ellipse">
-              <a:avLst/>
-            </a:prstGeom>
-            <a:solidFill>
-              <a:srgbClr val="00EEEE">
-                <a:alpha val="100000"/>
-              </a:srgbClr>
-            </a:solidFill>
-            <a:ln w="9000" cap="rnd">
-              <a:solidFill>
-                <a:srgbClr val="00EEEE">
-                  <a:alpha val="100000"/>
-                </a:srgbClr>
-              </a:solidFill>
-              <a:prstDash val="solid"/>
-              <a:round/>
-            </a:ln>
-          </p:spPr>
-          <p:txBody>
-            <a:bodyPr/>
-            <a:lstStyle/>
-            <a:p>
-              <a:endParaRPr/>
-            </a:p>
-          </p:txBody>
-        </p:sp>
-        <p:sp>
-          <p:nvSpPr>
-            <p:cNvPr id="61" name="pt61"/>
-            <p:cNvSpPr/>
-            <p:nvPr/>
-          </p:nvSpPr>
-          <p:spPr>
-            <a:xfrm>
-              <a:off x="2633451" y="2001913"/>
-              <a:ext cx="63202" cy="63202"/>
-            </a:xfrm>
-            <a:prstGeom prst="ellipse">
-              <a:avLst/>
-            </a:prstGeom>
-            <a:solidFill>
-              <a:srgbClr val="9B30FF">
-                <a:alpha val="100000"/>
-              </a:srgbClr>
-            </a:solidFill>
-            <a:ln w="9000" cap="rnd">
-              <a:solidFill>
-                <a:srgbClr val="9B30FF">
-                  <a:alpha val="100000"/>
-                </a:srgbClr>
-              </a:solidFill>
-              <a:prstDash val="solid"/>
-              <a:round/>
-            </a:ln>
-          </p:spPr>
-          <p:txBody>
-            <a:bodyPr/>
-            <a:lstStyle/>
-            <a:p>
-              <a:endParaRPr/>
-            </a:p>
-          </p:txBody>
-        </p:sp>
-        <p:sp>
-          <p:nvSpPr>
-            <p:cNvPr id="62" name="pt62"/>
-            <p:cNvSpPr/>
-            <p:nvPr/>
-          </p:nvSpPr>
-          <p:spPr>
-            <a:xfrm>
-              <a:off x="2589461" y="2521801"/>
-              <a:ext cx="63202" cy="63202"/>
-            </a:xfrm>
-            <a:prstGeom prst="ellipse">
-              <a:avLst/>
-            </a:prstGeom>
-            <a:solidFill>
-              <a:srgbClr val="00EEEE">
-                <a:alpha val="100000"/>
-              </a:srgbClr>
-            </a:solidFill>
-            <a:ln w="9000" cap="rnd">
-              <a:solidFill>
-                <a:srgbClr val="00EEEE">
-                  <a:alpha val="100000"/>
-                </a:srgbClr>
-              </a:solidFill>
-              <a:prstDash val="solid"/>
-              <a:round/>
-            </a:ln>
-          </p:spPr>
-          <p:txBody>
-            <a:bodyPr/>
-            <a:lstStyle/>
-            <a:p>
-              <a:endParaRPr/>
-            </a:p>
-          </p:txBody>
-        </p:sp>
-        <p:sp>
-          <p:nvSpPr>
-            <p:cNvPr id="63" name="pt63"/>
-            <p:cNvSpPr/>
-            <p:nvPr/>
-          </p:nvSpPr>
-          <p:spPr>
-            <a:xfrm>
-              <a:off x="2486157" y="2390891"/>
-              <a:ext cx="63202" cy="63202"/>
-            </a:xfrm>
-            <a:prstGeom prst="ellipse">
-              <a:avLst/>
-            </a:prstGeom>
-            <a:solidFill>
-              <a:srgbClr val="9B30FF">
-                <a:alpha val="100000"/>
-              </a:srgbClr>
-            </a:solidFill>
-            <a:ln w="9000" cap="rnd">
-              <a:solidFill>
-                <a:srgbClr val="9B30FF">
-                  <a:alpha val="100000"/>
-                </a:srgbClr>
-              </a:solidFill>
-              <a:prstDash val="solid"/>
-              <a:round/>
-            </a:ln>
-          </p:spPr>
-          <p:txBody>
-            <a:bodyPr/>
-            <a:lstStyle/>
-            <a:p>
-              <a:endParaRPr/>
-            </a:p>
-          </p:txBody>
-        </p:sp>
-        <p:sp>
-          <p:nvSpPr>
-            <p:cNvPr id="64" name="pt64"/>
-            <p:cNvSpPr/>
-            <p:nvPr/>
-          </p:nvSpPr>
-          <p:spPr>
-            <a:xfrm>
-              <a:off x="1734923" y="2291609"/>
-              <a:ext cx="63202" cy="63202"/>
-            </a:xfrm>
-            <a:prstGeom prst="ellipse">
-              <a:avLst/>
-            </a:prstGeom>
-            <a:solidFill>
-              <a:srgbClr val="00EEEE">
-                <a:alpha val="100000"/>
-              </a:srgbClr>
-            </a:solidFill>
-            <a:ln w="9000" cap="rnd">
-              <a:solidFill>
-                <a:srgbClr val="00EEEE">
-                  <a:alpha val="100000"/>
-                </a:srgbClr>
-              </a:solidFill>
-              <a:prstDash val="solid"/>
-              <a:round/>
-            </a:ln>
-          </p:spPr>
-          <p:txBody>
-            <a:bodyPr/>
-            <a:lstStyle/>
-            <a:p>
-              <a:endParaRPr/>
-            </a:p>
-          </p:txBody>
-        </p:sp>
-        <p:sp>
-          <p:nvSpPr>
-            <p:cNvPr id="65" name="pt65"/>
-            <p:cNvSpPr/>
-            <p:nvPr/>
-          </p:nvSpPr>
-          <p:spPr>
-            <a:xfrm>
-              <a:off x="2811587" y="1811363"/>
-              <a:ext cx="63202" cy="63202"/>
-            </a:xfrm>
-            <a:prstGeom prst="ellipse">
-              <a:avLst/>
-            </a:prstGeom>
-            <a:solidFill>
-              <a:srgbClr val="9B30FF">
-                <a:alpha val="100000"/>
-              </a:srgbClr>
-            </a:solidFill>
-            <a:ln w="9000" cap="rnd">
-              <a:solidFill>
-                <a:srgbClr val="9B30FF">
-                  <a:alpha val="100000"/>
-                </a:srgbClr>
-              </a:solidFill>
-              <a:prstDash val="solid"/>
-              <a:round/>
-            </a:ln>
-          </p:spPr>
-          <p:txBody>
-            <a:bodyPr/>
-            <a:lstStyle/>
-            <a:p>
-              <a:endParaRPr/>
-            </a:p>
-          </p:txBody>
-        </p:sp>
-        <p:sp>
-          <p:nvSpPr>
-            <p:cNvPr id="66" name="pt66"/>
-            <p:cNvSpPr/>
-            <p:nvPr/>
-          </p:nvSpPr>
-          <p:spPr>
-            <a:xfrm>
-              <a:off x="2473027" y="2994701"/>
-              <a:ext cx="63202" cy="63202"/>
-            </a:xfrm>
-            <a:prstGeom prst="ellipse">
-              <a:avLst/>
-            </a:prstGeom>
-            <a:solidFill>
-              <a:srgbClr val="00EEEE">
-                <a:alpha val="100000"/>
-              </a:srgbClr>
-            </a:solidFill>
-            <a:ln w="9000" cap="rnd">
-              <a:solidFill>
-                <a:srgbClr val="00EEEE">
-                  <a:alpha val="100000"/>
-                </a:srgbClr>
-              </a:solidFill>
-              <a:prstDash val="solid"/>
-              <a:round/>
-            </a:ln>
-          </p:spPr>
-          <p:txBody>
-            <a:bodyPr/>
-            <a:lstStyle/>
-            <a:p>
-              <a:endParaRPr/>
-            </a:p>
-          </p:txBody>
-        </p:sp>
-        <p:sp>
-          <p:nvSpPr>
-            <p:cNvPr id="67" name="rc67"/>
-            <p:cNvSpPr/>
-            <p:nvPr/>
-          </p:nvSpPr>
-          <p:spPr>
-            <a:xfrm>
-              <a:off x="1465736" y="1208751"/>
-              <a:ext cx="1443045" cy="2048845"/>
-            </a:xfrm>
-            <a:prstGeom prst="rect">
-              <a:avLst/>
-            </a:prstGeom>
-            <a:noFill/>
-            <a:ln w="13550" cap="rnd">
-              <a:solidFill>
-                <a:srgbClr val="333333">
-                  <a:alpha val="100000"/>
-                </a:srgbClr>
-              </a:solidFill>
-              <a:prstDash val="solid"/>
-              <a:round/>
-            </a:ln>
-          </p:spPr>
-          <p:txBody>
-            <a:bodyPr/>
-            <a:lstStyle/>
-            <a:p>
-              <a:endParaRPr/>
-            </a:p>
-          </p:txBody>
-        </p:sp>
-        <p:sp>
-          <p:nvSpPr>
-            <p:cNvPr id="68" name="tx68"/>
-            <p:cNvSpPr/>
-            <p:nvPr/>
-          </p:nvSpPr>
-          <p:spPr>
-            <a:xfrm>
-              <a:off x="1148262" y="3044098"/>
-              <a:ext cx="254843" cy="80010"/>
+              <a:off x="1979712" y="4149080"/>
+              <a:ext cx="2696689" cy="225785"/>
             </a:xfrm>
             <a:prstGeom prst="rect">
               <a:avLst/>
@@ -11980,30 +12999,57 @@
                 </a:spcAft>
               </a:pPr>
               <a:r>
-                <a:rPr sz="880" b="0" i="0">
+                <a:rPr sz="2000" i="0" dirty="0">
                   <a:solidFill>
-                    <a:srgbClr val="4D4D4D">
+                    <a:srgbClr val="000000">
                       <a:alpha val="100000"/>
                     </a:srgbClr>
                   </a:solidFill>
                   <a:latin typeface="Arial"/>
                   <a:cs typeface="Arial"/>
                 </a:rPr>
-                <a:t>-0.05</a:t>
+                <a:t>RGM </a:t>
               </a:r>
+              <a:r>
+                <a:rPr lang="en-US" sz="2000" dirty="0">
+                  <a:solidFill>
+                    <a:srgbClr val="000000">
+                      <a:alpha val="100000"/>
+                    </a:srgbClr>
+                  </a:solidFill>
+                  <a:latin typeface="Arial"/>
+                  <a:cs typeface="Arial"/>
+                </a:rPr>
+                <a:t>Reference</a:t>
+              </a:r>
+              <a:endParaRPr sz="2000" i="0" dirty="0">
+                <a:solidFill>
+                  <a:srgbClr val="000000">
+                    <a:alpha val="100000"/>
+                  </a:srgbClr>
+                </a:solidFill>
+                <a:latin typeface="Arial"/>
+                <a:cs typeface="Arial"/>
+              </a:endParaRPr>
             </a:p>
           </p:txBody>
         </p:sp>
         <p:sp>
           <p:nvSpPr>
-            <p:cNvPr id="69" name="tx69"/>
+            <p:cNvPr id="102" name="tx99">
+              <a:extLst>
+                <a:ext uri="{FF2B5EF4-FFF2-40B4-BE49-F238E27FC236}">
+                  <a16:creationId xmlns:a16="http://schemas.microsoft.com/office/drawing/2014/main" id="{1829D111-5504-44C5-2BB5-4D1FAD2D4FDE}"/>
+                </a:ext>
+              </a:extLst>
+            </p:cNvPr>
             <p:cNvSpPr/>
             <p:nvPr/>
           </p:nvSpPr>
           <p:spPr>
             <a:xfrm>
-              <a:off x="1185478" y="2342872"/>
-              <a:ext cx="217627" cy="80010"/>
+              <a:off x="3419872" y="1608704"/>
+              <a:ext cx="2620301" cy="225785"/>
             </a:xfrm>
             <a:prstGeom prst="rect">
               <a:avLst/>
@@ -12023,955 +13069,7 @@
                 </a:spcAft>
               </a:pPr>
               <a:r>
-                <a:rPr sz="880" b="0" i="0">
-                  <a:solidFill>
-                    <a:srgbClr val="4D4D4D">
-                      <a:alpha val="100000"/>
-                    </a:srgbClr>
-                  </a:solidFill>
-                  <a:latin typeface="Arial"/>
-                  <a:cs typeface="Arial"/>
-                </a:rPr>
-                <a:t>0.00</a:t>
-              </a:r>
-            </a:p>
-          </p:txBody>
-        </p:sp>
-        <p:sp>
-          <p:nvSpPr>
-            <p:cNvPr id="70" name="tx70"/>
-            <p:cNvSpPr/>
-            <p:nvPr/>
-          </p:nvSpPr>
-          <p:spPr>
-            <a:xfrm>
-              <a:off x="1185478" y="1641645"/>
-              <a:ext cx="217627" cy="80010"/>
-            </a:xfrm>
-            <a:prstGeom prst="rect">
-              <a:avLst/>
-            </a:prstGeom>
-            <a:noFill/>
-          </p:spPr>
-          <p:txBody>
-            <a:bodyPr wrap="none" lIns="0" tIns="0" rIns="0" bIns="0" anchor="ctr" anchorCtr="1"/>
-            <a:lstStyle/>
-            <a:p>
-              <a:pPr marL="0" marR="0" indent="0" algn="l">
-                <a:spcBef>
-                  <a:spcPts val="0"/>
-                </a:spcBef>
-                <a:spcAft>
-                  <a:spcPts val="0"/>
-                </a:spcAft>
-              </a:pPr>
-              <a:r>
-                <a:rPr sz="880" b="0" i="0">
-                  <a:solidFill>
-                    <a:srgbClr val="4D4D4D">
-                      <a:alpha val="100000"/>
-                    </a:srgbClr>
-                  </a:solidFill>
-                  <a:latin typeface="Arial"/>
-                  <a:cs typeface="Arial"/>
-                </a:rPr>
-                <a:t>0.05</a:t>
-              </a:r>
-            </a:p>
-          </p:txBody>
-        </p:sp>
-        <p:sp>
-          <p:nvSpPr>
-            <p:cNvPr id="71" name="pl71"/>
-            <p:cNvSpPr/>
-            <p:nvPr/>
-          </p:nvSpPr>
-          <p:spPr>
-            <a:xfrm>
-              <a:off x="1430941" y="3084103"/>
-              <a:ext cx="34794" cy="0"/>
-            </a:xfrm>
-            <a:custGeom>
-              <a:avLst/>
-              <a:gdLst/>
-              <a:ahLst/>
-              <a:cxnLst/>
-              <a:rect l="0" t="0" r="0" b="0"/>
-              <a:pathLst>
-                <a:path w="34794">
-                  <a:moveTo>
-                    <a:pt x="0" y="0"/>
-                  </a:moveTo>
-                  <a:lnTo>
-                    <a:pt x="34794" y="0"/>
-                  </a:lnTo>
-                </a:path>
-              </a:pathLst>
-            </a:custGeom>
-            <a:ln w="13550" cap="flat">
-              <a:solidFill>
-                <a:srgbClr val="333333">
-                  <a:alpha val="100000"/>
-                </a:srgbClr>
-              </a:solidFill>
-              <a:prstDash val="solid"/>
-              <a:round/>
-            </a:ln>
-          </p:spPr>
-          <p:txBody>
-            <a:bodyPr/>
-            <a:lstStyle/>
-            <a:p>
-              <a:endParaRPr/>
-            </a:p>
-          </p:txBody>
-        </p:sp>
-        <p:sp>
-          <p:nvSpPr>
-            <p:cNvPr id="72" name="pl72"/>
-            <p:cNvSpPr/>
-            <p:nvPr/>
-          </p:nvSpPr>
-          <p:spPr>
-            <a:xfrm>
-              <a:off x="1430941" y="2382877"/>
-              <a:ext cx="34794" cy="0"/>
-            </a:xfrm>
-            <a:custGeom>
-              <a:avLst/>
-              <a:gdLst/>
-              <a:ahLst/>
-              <a:cxnLst/>
-              <a:rect l="0" t="0" r="0" b="0"/>
-              <a:pathLst>
-                <a:path w="34794">
-                  <a:moveTo>
-                    <a:pt x="0" y="0"/>
-                  </a:moveTo>
-                  <a:lnTo>
-                    <a:pt x="34794" y="0"/>
-                  </a:lnTo>
-                </a:path>
-              </a:pathLst>
-            </a:custGeom>
-            <a:ln w="13550" cap="flat">
-              <a:solidFill>
-                <a:srgbClr val="333333">
-                  <a:alpha val="100000"/>
-                </a:srgbClr>
-              </a:solidFill>
-              <a:prstDash val="solid"/>
-              <a:round/>
-            </a:ln>
-          </p:spPr>
-          <p:txBody>
-            <a:bodyPr/>
-            <a:lstStyle/>
-            <a:p>
-              <a:endParaRPr/>
-            </a:p>
-          </p:txBody>
-        </p:sp>
-        <p:sp>
-          <p:nvSpPr>
-            <p:cNvPr id="73" name="pl73"/>
-            <p:cNvSpPr/>
-            <p:nvPr/>
-          </p:nvSpPr>
-          <p:spPr>
-            <a:xfrm>
-              <a:off x="1430941" y="1681650"/>
-              <a:ext cx="34794" cy="0"/>
-            </a:xfrm>
-            <a:custGeom>
-              <a:avLst/>
-              <a:gdLst/>
-              <a:ahLst/>
-              <a:cxnLst/>
-              <a:rect l="0" t="0" r="0" b="0"/>
-              <a:pathLst>
-                <a:path w="34794">
-                  <a:moveTo>
-                    <a:pt x="0" y="0"/>
-                  </a:moveTo>
-                  <a:lnTo>
-                    <a:pt x="34794" y="0"/>
-                  </a:lnTo>
-                </a:path>
-              </a:pathLst>
-            </a:custGeom>
-            <a:ln w="13550" cap="flat">
-              <a:solidFill>
-                <a:srgbClr val="333333">
-                  <a:alpha val="100000"/>
-                </a:srgbClr>
-              </a:solidFill>
-              <a:prstDash val="solid"/>
-              <a:round/>
-            </a:ln>
-          </p:spPr>
-          <p:txBody>
-            <a:bodyPr/>
-            <a:lstStyle/>
-            <a:p>
-              <a:endParaRPr/>
-            </a:p>
-          </p:txBody>
-        </p:sp>
-        <p:sp>
-          <p:nvSpPr>
-            <p:cNvPr id="74" name="pl74"/>
-            <p:cNvSpPr/>
-            <p:nvPr/>
-          </p:nvSpPr>
-          <p:spPr>
-            <a:xfrm>
-              <a:off x="1952066" y="3257597"/>
-              <a:ext cx="0" cy="34794"/>
-            </a:xfrm>
-            <a:custGeom>
-              <a:avLst/>
-              <a:gdLst/>
-              <a:ahLst/>
-              <a:cxnLst/>
-              <a:rect l="0" t="0" r="0" b="0"/>
-              <a:pathLst>
-                <a:path h="34794">
-                  <a:moveTo>
-                    <a:pt x="0" y="34794"/>
-                  </a:moveTo>
-                  <a:lnTo>
-                    <a:pt x="0" y="0"/>
-                  </a:lnTo>
-                </a:path>
-              </a:pathLst>
-            </a:custGeom>
-            <a:ln w="13550" cap="flat">
-              <a:solidFill>
-                <a:srgbClr val="333333">
-                  <a:alpha val="100000"/>
-                </a:srgbClr>
-              </a:solidFill>
-              <a:prstDash val="solid"/>
-              <a:round/>
-            </a:ln>
-          </p:spPr>
-          <p:txBody>
-            <a:bodyPr/>
-            <a:lstStyle/>
-            <a:p>
-              <a:endParaRPr/>
-            </a:p>
-          </p:txBody>
-        </p:sp>
-        <p:sp>
-          <p:nvSpPr>
-            <p:cNvPr id="75" name="pl75"/>
-            <p:cNvSpPr/>
-            <p:nvPr/>
-          </p:nvSpPr>
-          <p:spPr>
-            <a:xfrm>
-              <a:off x="2470256" y="3257597"/>
-              <a:ext cx="0" cy="34794"/>
-            </a:xfrm>
-            <a:custGeom>
-              <a:avLst/>
-              <a:gdLst/>
-              <a:ahLst/>
-              <a:cxnLst/>
-              <a:rect l="0" t="0" r="0" b="0"/>
-              <a:pathLst>
-                <a:path h="34794">
-                  <a:moveTo>
-                    <a:pt x="0" y="34794"/>
-                  </a:moveTo>
-                  <a:lnTo>
-                    <a:pt x="0" y="0"/>
-                  </a:lnTo>
-                </a:path>
-              </a:pathLst>
-            </a:custGeom>
-            <a:ln w="13550" cap="flat">
-              <a:solidFill>
-                <a:srgbClr val="333333">
-                  <a:alpha val="100000"/>
-                </a:srgbClr>
-              </a:solidFill>
-              <a:prstDash val="solid"/>
-              <a:round/>
-            </a:ln>
-          </p:spPr>
-          <p:txBody>
-            <a:bodyPr/>
-            <a:lstStyle/>
-            <a:p>
-              <a:endParaRPr/>
-            </a:p>
-          </p:txBody>
-        </p:sp>
-        <p:sp>
-          <p:nvSpPr>
-            <p:cNvPr id="76" name="tx76"/>
-            <p:cNvSpPr/>
-            <p:nvPr/>
-          </p:nvSpPr>
-          <p:spPr>
-            <a:xfrm>
-              <a:off x="1855734" y="3320227"/>
-              <a:ext cx="192664" cy="80010"/>
-            </a:xfrm>
-            <a:prstGeom prst="rect">
-              <a:avLst/>
-            </a:prstGeom>
-            <a:noFill/>
-          </p:spPr>
-          <p:txBody>
-            <a:bodyPr wrap="none" lIns="0" tIns="0" rIns="0" bIns="0" anchor="ctr" anchorCtr="1"/>
-            <a:lstStyle/>
-            <a:p>
-              <a:pPr marL="0" marR="0" indent="0" algn="l">
-                <a:spcBef>
-                  <a:spcPts val="0"/>
-                </a:spcBef>
-                <a:spcAft>
-                  <a:spcPts val="0"/>
-                </a:spcAft>
-              </a:pPr>
-              <a:r>
-                <a:rPr sz="880" b="0" i="0">
-                  <a:solidFill>
-                    <a:srgbClr val="4D4D4D">
-                      <a:alpha val="100000"/>
-                    </a:srgbClr>
-                  </a:solidFill>
-                  <a:latin typeface="Arial"/>
-                  <a:cs typeface="Arial"/>
-                </a:rPr>
-                <a:t>-0.1</a:t>
-              </a:r>
-            </a:p>
-          </p:txBody>
-        </p:sp>
-        <p:sp>
-          <p:nvSpPr>
-            <p:cNvPr id="77" name="tx77"/>
-            <p:cNvSpPr/>
-            <p:nvPr/>
-          </p:nvSpPr>
-          <p:spPr>
-            <a:xfrm>
-              <a:off x="2392532" y="3320227"/>
-              <a:ext cx="155448" cy="80010"/>
-            </a:xfrm>
-            <a:prstGeom prst="rect">
-              <a:avLst/>
-            </a:prstGeom>
-            <a:noFill/>
-          </p:spPr>
-          <p:txBody>
-            <a:bodyPr wrap="none" lIns="0" tIns="0" rIns="0" bIns="0" anchor="ctr" anchorCtr="1"/>
-            <a:lstStyle/>
-            <a:p>
-              <a:pPr marL="0" marR="0" indent="0" algn="l">
-                <a:spcBef>
-                  <a:spcPts val="0"/>
-                </a:spcBef>
-                <a:spcAft>
-                  <a:spcPts val="0"/>
-                </a:spcAft>
-              </a:pPr>
-              <a:r>
-                <a:rPr sz="880" b="0" i="0">
-                  <a:solidFill>
-                    <a:srgbClr val="4D4D4D">
-                      <a:alpha val="100000"/>
-                    </a:srgbClr>
-                  </a:solidFill>
-                  <a:latin typeface="Arial"/>
-                  <a:cs typeface="Arial"/>
-                </a:rPr>
-                <a:t>0.0</a:t>
-              </a:r>
-            </a:p>
-          </p:txBody>
-        </p:sp>
-        <p:sp>
-          <p:nvSpPr>
-            <p:cNvPr id="78" name="tx78"/>
-            <p:cNvSpPr/>
-            <p:nvPr/>
-          </p:nvSpPr>
-          <p:spPr>
-            <a:xfrm>
-              <a:off x="1950337" y="3458531"/>
-              <a:ext cx="473842" cy="100035"/>
-            </a:xfrm>
-            <a:prstGeom prst="rect">
-              <a:avLst/>
-            </a:prstGeom>
-            <a:noFill/>
-          </p:spPr>
-          <p:txBody>
-            <a:bodyPr wrap="none" lIns="0" tIns="0" rIns="0" bIns="0" anchor="ctr" anchorCtr="1"/>
-            <a:lstStyle/>
-            <a:p>
-              <a:pPr marL="0" marR="0" indent="0" algn="l">
-                <a:spcBef>
-                  <a:spcPts val="0"/>
-                </a:spcBef>
-                <a:spcAft>
-                  <a:spcPts val="0"/>
-                </a:spcAft>
-              </a:pPr>
-              <a:r>
-                <a:rPr sz="1100" b="0" i="0">
-                  <a:solidFill>
-                    <a:srgbClr val="000000">
-                      <a:alpha val="100000"/>
-                    </a:srgbClr>
-                  </a:solidFill>
-                  <a:latin typeface="Arial"/>
-                  <a:cs typeface="Arial"/>
-                </a:rPr>
-                <a:t>PCoA 1</a:t>
-              </a:r>
-            </a:p>
-          </p:txBody>
-        </p:sp>
-        <p:sp>
-          <p:nvSpPr>
-            <p:cNvPr id="79" name="tx79"/>
-            <p:cNvSpPr/>
-            <p:nvPr/>
-          </p:nvSpPr>
-          <p:spPr>
-            <a:xfrm rot="-5400000">
-              <a:off x="797085" y="2183156"/>
-              <a:ext cx="473842" cy="100035"/>
-            </a:xfrm>
-            <a:prstGeom prst="rect">
-              <a:avLst/>
-            </a:prstGeom>
-            <a:noFill/>
-          </p:spPr>
-          <p:txBody>
-            <a:bodyPr wrap="none" lIns="0" tIns="0" rIns="0" bIns="0" anchor="ctr" anchorCtr="1"/>
-            <a:lstStyle/>
-            <a:p>
-              <a:pPr marL="0" marR="0" indent="0" algn="l">
-                <a:spcBef>
-                  <a:spcPts val="0"/>
-                </a:spcBef>
-                <a:spcAft>
-                  <a:spcPts val="0"/>
-                </a:spcAft>
-              </a:pPr>
-              <a:r>
-                <a:rPr sz="1100" b="0" i="0">
-                  <a:solidFill>
-                    <a:srgbClr val="000000">
-                      <a:alpha val="100000"/>
-                    </a:srgbClr>
-                  </a:solidFill>
-                  <a:latin typeface="Arial"/>
-                  <a:cs typeface="Arial"/>
-                </a:rPr>
-                <a:t>PCoA 2</a:t>
-              </a:r>
-            </a:p>
-          </p:txBody>
-        </p:sp>
-        <p:sp>
-          <p:nvSpPr>
-            <p:cNvPr id="80" name="rc80"/>
-            <p:cNvSpPr/>
-            <p:nvPr/>
-          </p:nvSpPr>
-          <p:spPr>
-            <a:xfrm>
-              <a:off x="3047959" y="1625139"/>
-              <a:ext cx="1454451" cy="1216070"/>
-            </a:xfrm>
-            <a:prstGeom prst="rect">
-              <a:avLst/>
-            </a:prstGeom>
-            <a:solidFill>
-              <a:srgbClr val="FFFFFF">
-                <a:alpha val="100000"/>
-              </a:srgbClr>
-            </a:solidFill>
-          </p:spPr>
-          <p:txBody>
-            <a:bodyPr/>
-            <a:lstStyle/>
-            <a:p>
-              <a:endParaRPr/>
-            </a:p>
-          </p:txBody>
-        </p:sp>
-        <p:sp>
-          <p:nvSpPr>
-            <p:cNvPr id="81" name="tx81"/>
-            <p:cNvSpPr/>
-            <p:nvPr/>
-          </p:nvSpPr>
-          <p:spPr>
-            <a:xfrm>
-              <a:off x="3117548" y="1709450"/>
-              <a:ext cx="1315272" cy="100035"/>
-            </a:xfrm>
-            <a:prstGeom prst="rect">
-              <a:avLst/>
-            </a:prstGeom>
-            <a:noFill/>
-          </p:spPr>
-          <p:txBody>
-            <a:bodyPr wrap="none" lIns="0" tIns="0" rIns="0" bIns="0" anchor="ctr" anchorCtr="1"/>
-            <a:lstStyle/>
-            <a:p>
-              <a:pPr marL="0" marR="0" indent="0" algn="l">
-                <a:spcBef>
-                  <a:spcPts val="0"/>
-                </a:spcBef>
-                <a:spcAft>
-                  <a:spcPts val="0"/>
-                </a:spcAft>
-              </a:pPr>
-              <a:r>
-                <a:rPr sz="1100" b="0" i="0">
-                  <a:solidFill>
-                    <a:srgbClr val="000000">
-                      <a:alpha val="100000"/>
-                    </a:srgbClr>
-                  </a:solidFill>
-                  <a:latin typeface="Arial"/>
-                  <a:cs typeface="Arial"/>
-                </a:rPr>
-                <a:t>Treatment &amp; Soil Age</a:t>
-              </a:r>
-            </a:p>
-          </p:txBody>
-        </p:sp>
-        <p:sp>
-          <p:nvSpPr>
-            <p:cNvPr id="82" name="rc82"/>
-            <p:cNvSpPr/>
-            <p:nvPr/>
-          </p:nvSpPr>
-          <p:spPr>
-            <a:xfrm>
-              <a:off x="3117548" y="1893796"/>
-              <a:ext cx="219456" cy="219456"/>
-            </a:xfrm>
-            <a:prstGeom prst="rect">
-              <a:avLst/>
-            </a:prstGeom>
-            <a:solidFill>
-              <a:srgbClr val="FFFFFF">
-                <a:alpha val="100000"/>
-              </a:srgbClr>
-            </a:solidFill>
-          </p:spPr>
-          <p:txBody>
-            <a:bodyPr/>
-            <a:lstStyle/>
-            <a:p>
-              <a:endParaRPr/>
-            </a:p>
-          </p:txBody>
-        </p:sp>
-        <p:sp>
-          <p:nvSpPr>
-            <p:cNvPr id="83" name="pt83"/>
-            <p:cNvSpPr/>
-            <p:nvPr/>
-          </p:nvSpPr>
-          <p:spPr>
-            <a:xfrm>
-              <a:off x="3195675" y="1971923"/>
-              <a:ext cx="63202" cy="63202"/>
-            </a:xfrm>
-            <a:prstGeom prst="ellipse">
-              <a:avLst/>
-            </a:prstGeom>
-            <a:solidFill>
-              <a:srgbClr val="008B8B">
-                <a:alpha val="100000"/>
-              </a:srgbClr>
-            </a:solidFill>
-            <a:ln w="9000" cap="rnd">
-              <a:solidFill>
-                <a:srgbClr val="008B8B">
-                  <a:alpha val="100000"/>
-                </a:srgbClr>
-              </a:solidFill>
-              <a:prstDash val="solid"/>
-              <a:round/>
-            </a:ln>
-          </p:spPr>
-          <p:txBody>
-            <a:bodyPr/>
-            <a:lstStyle/>
-            <a:p>
-              <a:endParaRPr/>
-            </a:p>
-          </p:txBody>
-        </p:sp>
-        <p:sp>
-          <p:nvSpPr>
-            <p:cNvPr id="84" name="rc84"/>
-            <p:cNvSpPr/>
-            <p:nvPr/>
-          </p:nvSpPr>
-          <p:spPr>
-            <a:xfrm>
-              <a:off x="3117548" y="2113252"/>
-              <a:ext cx="219456" cy="219456"/>
-            </a:xfrm>
-            <a:prstGeom prst="rect">
-              <a:avLst/>
-            </a:prstGeom>
-            <a:solidFill>
-              <a:srgbClr val="FFFFFF">
-                <a:alpha val="100000"/>
-              </a:srgbClr>
-            </a:solidFill>
-          </p:spPr>
-          <p:txBody>
-            <a:bodyPr/>
-            <a:lstStyle/>
-            <a:p>
-              <a:endParaRPr/>
-            </a:p>
-          </p:txBody>
-        </p:sp>
-        <p:sp>
-          <p:nvSpPr>
-            <p:cNvPr id="85" name="pt85"/>
-            <p:cNvSpPr/>
-            <p:nvPr/>
-          </p:nvSpPr>
-          <p:spPr>
-            <a:xfrm>
-              <a:off x="3195675" y="2191379"/>
-              <a:ext cx="63202" cy="63202"/>
-            </a:xfrm>
-            <a:prstGeom prst="ellipse">
-              <a:avLst/>
-            </a:prstGeom>
-            <a:solidFill>
-              <a:srgbClr val="00EEEE">
-                <a:alpha val="100000"/>
-              </a:srgbClr>
-            </a:solidFill>
-            <a:ln w="9000" cap="rnd">
-              <a:solidFill>
-                <a:srgbClr val="00EEEE">
-                  <a:alpha val="100000"/>
-                </a:srgbClr>
-              </a:solidFill>
-              <a:prstDash val="solid"/>
-              <a:round/>
-            </a:ln>
-          </p:spPr>
-          <p:txBody>
-            <a:bodyPr/>
-            <a:lstStyle/>
-            <a:p>
-              <a:endParaRPr/>
-            </a:p>
-          </p:txBody>
-        </p:sp>
-        <p:sp>
-          <p:nvSpPr>
-            <p:cNvPr id="86" name="rc86"/>
-            <p:cNvSpPr/>
-            <p:nvPr/>
-          </p:nvSpPr>
-          <p:spPr>
-            <a:xfrm>
-              <a:off x="3117548" y="2332708"/>
-              <a:ext cx="219456" cy="219456"/>
-            </a:xfrm>
-            <a:prstGeom prst="rect">
-              <a:avLst/>
-            </a:prstGeom>
-            <a:solidFill>
-              <a:srgbClr val="FFFFFF">
-                <a:alpha val="100000"/>
-              </a:srgbClr>
-            </a:solidFill>
-          </p:spPr>
-          <p:txBody>
-            <a:bodyPr/>
-            <a:lstStyle/>
-            <a:p>
-              <a:endParaRPr/>
-            </a:p>
-          </p:txBody>
-        </p:sp>
-        <p:sp>
-          <p:nvSpPr>
-            <p:cNvPr id="87" name="pt87"/>
-            <p:cNvSpPr/>
-            <p:nvPr/>
-          </p:nvSpPr>
-          <p:spPr>
-            <a:xfrm>
-              <a:off x="3195675" y="2410835"/>
-              <a:ext cx="63202" cy="63202"/>
-            </a:xfrm>
-            <a:prstGeom prst="ellipse">
-              <a:avLst/>
-            </a:prstGeom>
-            <a:solidFill>
-              <a:srgbClr val="551A8B">
-                <a:alpha val="100000"/>
-              </a:srgbClr>
-            </a:solidFill>
-            <a:ln w="9000" cap="rnd">
-              <a:solidFill>
-                <a:srgbClr val="551A8B">
-                  <a:alpha val="100000"/>
-                </a:srgbClr>
-              </a:solidFill>
-              <a:prstDash val="solid"/>
-              <a:round/>
-            </a:ln>
-          </p:spPr>
-          <p:txBody>
-            <a:bodyPr/>
-            <a:lstStyle/>
-            <a:p>
-              <a:endParaRPr/>
-            </a:p>
-          </p:txBody>
-        </p:sp>
-        <p:sp>
-          <p:nvSpPr>
-            <p:cNvPr id="88" name="rc88"/>
-            <p:cNvSpPr/>
-            <p:nvPr/>
-          </p:nvSpPr>
-          <p:spPr>
-            <a:xfrm>
-              <a:off x="3117548" y="2552164"/>
-              <a:ext cx="219456" cy="219456"/>
-            </a:xfrm>
-            <a:prstGeom prst="rect">
-              <a:avLst/>
-            </a:prstGeom>
-            <a:solidFill>
-              <a:srgbClr val="FFFFFF">
-                <a:alpha val="100000"/>
-              </a:srgbClr>
-            </a:solidFill>
-          </p:spPr>
-          <p:txBody>
-            <a:bodyPr/>
-            <a:lstStyle/>
-            <a:p>
-              <a:endParaRPr/>
-            </a:p>
-          </p:txBody>
-        </p:sp>
-        <p:sp>
-          <p:nvSpPr>
-            <p:cNvPr id="89" name="pt89"/>
-            <p:cNvSpPr/>
-            <p:nvPr/>
-          </p:nvSpPr>
-          <p:spPr>
-            <a:xfrm>
-              <a:off x="3195675" y="2630291"/>
-              <a:ext cx="63202" cy="63202"/>
-            </a:xfrm>
-            <a:prstGeom prst="ellipse">
-              <a:avLst/>
-            </a:prstGeom>
-            <a:solidFill>
-              <a:srgbClr val="9B30FF">
-                <a:alpha val="100000"/>
-              </a:srgbClr>
-            </a:solidFill>
-            <a:ln w="9000" cap="rnd">
-              <a:solidFill>
-                <a:srgbClr val="9B30FF">
-                  <a:alpha val="100000"/>
-                </a:srgbClr>
-              </a:solidFill>
-              <a:prstDash val="solid"/>
-              <a:round/>
-            </a:ln>
-          </p:spPr>
-          <p:txBody>
-            <a:bodyPr/>
-            <a:lstStyle/>
-            <a:p>
-              <a:endParaRPr/>
-            </a:p>
-          </p:txBody>
-        </p:sp>
-        <p:sp>
-          <p:nvSpPr>
-            <p:cNvPr id="90" name="tx90"/>
-            <p:cNvSpPr/>
-            <p:nvPr/>
-          </p:nvSpPr>
-          <p:spPr>
-            <a:xfrm>
-              <a:off x="3406593" y="1963519"/>
-              <a:ext cx="553029" cy="80010"/>
-            </a:xfrm>
-            <a:prstGeom prst="rect">
-              <a:avLst/>
-            </a:prstGeom>
-            <a:noFill/>
-          </p:spPr>
-          <p:txBody>
-            <a:bodyPr wrap="none" lIns="0" tIns="0" rIns="0" bIns="0" anchor="ctr" anchorCtr="1"/>
-            <a:lstStyle/>
-            <a:p>
-              <a:pPr marL="0" marR="0" indent="0" algn="l">
-                <a:spcBef>
-                  <a:spcPts val="0"/>
-                </a:spcBef>
-                <a:spcAft>
-                  <a:spcPts val="0"/>
-                </a:spcAft>
-              </a:pPr>
-              <a:r>
-                <a:rPr sz="880" b="0" i="0">
-                  <a:solidFill>
-                    <a:srgbClr val="000000">
-                      <a:alpha val="100000"/>
-                    </a:srgbClr>
-                  </a:solidFill>
-                  <a:latin typeface="Arial"/>
-                  <a:cs typeface="Arial"/>
-                </a:rPr>
-                <a:t>LIA Control</a:t>
-              </a:r>
-            </a:p>
-          </p:txBody>
-        </p:sp>
-        <p:sp>
-          <p:nvSpPr>
-            <p:cNvPr id="91" name="tx91"/>
-            <p:cNvSpPr/>
-            <p:nvPr/>
-          </p:nvSpPr>
-          <p:spPr>
-            <a:xfrm>
-              <a:off x="3406593" y="2182975"/>
-              <a:ext cx="652058" cy="80010"/>
-            </a:xfrm>
-            <a:prstGeom prst="rect">
-              <a:avLst/>
-            </a:prstGeom>
-            <a:noFill/>
-          </p:spPr>
-          <p:txBody>
-            <a:bodyPr wrap="none" lIns="0" tIns="0" rIns="0" bIns="0" anchor="ctr" anchorCtr="1"/>
-            <a:lstStyle/>
-            <a:p>
-              <a:pPr marL="0" marR="0" indent="0" algn="l">
-                <a:spcBef>
-                  <a:spcPts val="0"/>
-                </a:spcBef>
-                <a:spcAft>
-                  <a:spcPts val="0"/>
-                </a:spcAft>
-              </a:pPr>
-              <a:r>
-                <a:rPr sz="880" b="0" i="0">
-                  <a:solidFill>
-                    <a:srgbClr val="000000">
-                      <a:alpha val="100000"/>
-                    </a:srgbClr>
-                  </a:solidFill>
-                  <a:latin typeface="Arial"/>
-                  <a:cs typeface="Arial"/>
-                </a:rPr>
-                <a:t>RGM Control</a:t>
-              </a:r>
-            </a:p>
-          </p:txBody>
-        </p:sp>
-        <p:sp>
-          <p:nvSpPr>
-            <p:cNvPr id="92" name="tx92"/>
-            <p:cNvSpPr/>
-            <p:nvPr/>
-          </p:nvSpPr>
-          <p:spPr>
-            <a:xfrm>
-              <a:off x="3406593" y="2402431"/>
-              <a:ext cx="534558" cy="80010"/>
-            </a:xfrm>
-            <a:prstGeom prst="rect">
-              <a:avLst/>
-            </a:prstGeom>
-            <a:noFill/>
-          </p:spPr>
-          <p:txBody>
-            <a:bodyPr wrap="none" lIns="0" tIns="0" rIns="0" bIns="0" anchor="ctr" anchorCtr="1"/>
-            <a:lstStyle/>
-            <a:p>
-              <a:pPr marL="0" marR="0" indent="0" algn="l">
-                <a:spcBef>
-                  <a:spcPts val="0"/>
-                </a:spcBef>
-                <a:spcAft>
-                  <a:spcPts val="0"/>
-                </a:spcAft>
-              </a:pPr>
-              <a:r>
-                <a:rPr sz="880" b="0" i="0">
-                  <a:solidFill>
-                    <a:srgbClr val="000000">
-                      <a:alpha val="100000"/>
-                    </a:srgbClr>
-                  </a:solidFill>
-                  <a:latin typeface="Arial"/>
-                  <a:cs typeface="Arial"/>
-                </a:rPr>
-                <a:t>LIA Latrine</a:t>
-              </a:r>
-            </a:p>
-          </p:txBody>
-        </p:sp>
-        <p:sp>
-          <p:nvSpPr>
-            <p:cNvPr id="93" name="tx93"/>
-            <p:cNvSpPr/>
-            <p:nvPr/>
-          </p:nvSpPr>
-          <p:spPr>
-            <a:xfrm>
-              <a:off x="3406593" y="2621887"/>
-              <a:ext cx="633587" cy="80010"/>
-            </a:xfrm>
-            <a:prstGeom prst="rect">
-              <a:avLst/>
-            </a:prstGeom>
-            <a:noFill/>
-          </p:spPr>
-          <p:txBody>
-            <a:bodyPr wrap="none" lIns="0" tIns="0" rIns="0" bIns="0" anchor="ctr" anchorCtr="1"/>
-            <a:lstStyle/>
-            <a:p>
-              <a:pPr marL="0" marR="0" indent="0" algn="l">
-                <a:spcBef>
-                  <a:spcPts val="0"/>
-                </a:spcBef>
-                <a:spcAft>
-                  <a:spcPts val="0"/>
-                </a:spcAft>
-              </a:pPr>
-              <a:r>
-                <a:rPr sz="880" b="0" i="0">
+                <a:rPr sz="2000" b="0" i="0" dirty="0">
                   <a:solidFill>
                     <a:srgbClr val="000000">
                       <a:alpha val="100000"/>
@@ -12985,50 +13083,50 @@
             </a:p>
           </p:txBody>
         </p:sp>
-        <p:sp>
-          <p:nvSpPr>
-            <p:cNvPr id="94" name="tx94"/>
-            <p:cNvSpPr/>
-            <p:nvPr/>
-          </p:nvSpPr>
-          <p:spPr>
-            <a:xfrm>
-              <a:off x="1465736" y="983989"/>
-              <a:ext cx="838230" cy="119969"/>
-            </a:xfrm>
-            <a:prstGeom prst="rect">
-              <a:avLst/>
-            </a:prstGeom>
-            <a:noFill/>
-          </p:spPr>
-          <p:txBody>
-            <a:bodyPr wrap="none" lIns="0" tIns="0" rIns="0" bIns="0" anchor="ctr" anchorCtr="1"/>
-            <a:lstStyle/>
-            <a:p>
-              <a:pPr marL="0" marR="0" indent="0" algn="l">
-                <a:spcBef>
-                  <a:spcPts val="0"/>
-                </a:spcBef>
-                <a:spcAft>
-                  <a:spcPts val="0"/>
-                </a:spcAft>
-              </a:pPr>
-              <a:r>
-                <a:rPr sz="1320" b="0" i="0">
-                  <a:solidFill>
-                    <a:srgbClr val="000000">
-                      <a:alpha val="100000"/>
-                    </a:srgbClr>
-                  </a:solidFill>
-                  <a:latin typeface="Arial"/>
-                  <a:cs typeface="Arial"/>
-                </a:rPr>
-                <a:t>by Soil Age</a:t>
-              </a:r>
-            </a:p>
-          </p:txBody>
-        </p:sp>
       </p:grpSp>
+      <p:cxnSp>
+        <p:nvCxnSpPr>
+          <p:cNvPr id="103" name="Straight Connector 107">
+            <a:extLst>
+              <a:ext uri="{FF2B5EF4-FFF2-40B4-BE49-F238E27FC236}">
+                <a16:creationId xmlns:a16="http://schemas.microsoft.com/office/drawing/2014/main" id="{F4B97BF2-1632-7CF4-D094-6E0E5508B796}"/>
+              </a:ext>
+            </a:extLst>
+          </p:cNvPr>
+          <p:cNvCxnSpPr>
+            <a:cxnSpLocks/>
+          </p:cNvCxnSpPr>
+          <p:nvPr/>
+        </p:nvCxnSpPr>
+        <p:spPr>
+          <a:xfrm flipV="1">
+            <a:off x="8009893" y="1721597"/>
+            <a:ext cx="662912" cy="1171330"/>
+          </a:xfrm>
+          <a:prstGeom prst="line">
+            <a:avLst/>
+          </a:prstGeom>
+          <a:ln w="28575">
+            <a:solidFill>
+              <a:schemeClr val="tx1"/>
+            </a:solidFill>
+          </a:ln>
+        </p:spPr>
+        <p:style>
+          <a:lnRef idx="1">
+            <a:schemeClr val="accent1"/>
+          </a:lnRef>
+          <a:fillRef idx="0">
+            <a:schemeClr val="accent1"/>
+          </a:fillRef>
+          <a:effectRef idx="0">
+            <a:schemeClr val="accent1"/>
+          </a:effectRef>
+          <a:fontRef idx="minor">
+            <a:schemeClr val="tx1"/>
+          </a:fontRef>
+        </p:style>
+      </p:cxnSp>
     </p:spTree>
   </p:cSld>
   <p:clrMapOvr>
@@ -17331,4 +17429,10 @@
     </a:ext>
   </a:extLst>
 </a:theme>
+</file>
+
+<file path=docMetadata/LabelInfo.xml><?xml version="1.0" encoding="utf-8"?>
+<clbl:labelList xmlns:clbl="http://schemas.microsoft.com/office/2020/mipLabelMetadata">
+  <clbl:label id="{e9333c23-cac7-42f4-9989-5cee3d4a79c0}" enabled="0" method="" siteId="{e9333c23-cac7-42f4-9989-5cee3d4a79c0}" removed="1"/>
+</clbl:labelList>
 </file>